--- a/ChurnZero_atasikolexi05_presentation.pptx
+++ b/ChurnZero_atasikolexi05_presentation.pptx
@@ -2673,7 +2673,7 @@
         </p:nvSpPr>
         <p:spPr>
           <a:xfrm>
-            <a:off x="457200" y="86868"/>
+            <a:off x="457200" y="18288"/>
             <a:ext cx="8229600" cy="502920"/>
           </a:xfrm>
           <a:prstGeom prst="rect">
@@ -2711,7 +2711,7 @@
         </p:nvSpPr>
         <p:spPr>
           <a:xfrm>
-            <a:off x="464820" y="473964"/>
+            <a:off x="480060" y="443484"/>
             <a:ext cx="7315200" cy="292608"/>
           </a:xfrm>
           <a:prstGeom prst="rect">
@@ -2797,6 +2797,12 @@
             <a:prstDash val="solid"/>
           </a:ln>
         </p:spPr>
+        <p:txBody>
+          <a:bodyPr/>
+          <a:p>
+            <a:endParaRPr lang="en-US"/>
+          </a:p>
+        </p:txBody>
       </p:sp>
       <p:sp>
         <p:nvSpPr>
@@ -2822,7 +2828,7 @@
               <a:buNone/>
             </a:pPr>
             <a:r>
-              <a:rPr lang="en-US" sz="1000" b="1" dirty="0">
+              <a:rPr lang="en-US" sz="1200" b="1" dirty="0">
                 <a:solidFill>
                   <a:srgbClr val="FFFFFF"/>
                 </a:solidFill>
@@ -2832,7 +2838,14 @@
               </a:rPr>
               <a:t>#1</a:t>
             </a:r>
-            <a:endParaRPr lang="en-US" sz="1000" dirty="0"/>
+            <a:endParaRPr lang="en-US" sz="1200" b="1" dirty="0">
+              <a:solidFill>
+                <a:srgbClr val="FFFFFF"/>
+              </a:solidFill>
+              <a:latin typeface="Calibri" panose="020F0502020204030204" pitchFamily="34" charset="0"/>
+              <a:ea typeface="Calibri" panose="020F0502020204030204" pitchFamily="34" charset="-122"/>
+              <a:cs typeface="Calibri" panose="020F0502020204030204" pitchFamily="34" charset="-120"/>
+            </a:endParaRPr>
           </a:p>
         </p:txBody>
       </p:sp>
@@ -2887,7 +2900,7 @@
               <a:buNone/>
             </a:pPr>
             <a:r>
-              <a:rPr lang="en-US" sz="1000" b="1" dirty="0">
+              <a:rPr lang="en-US" sz="1200" b="1" dirty="0">
                 <a:solidFill>
                   <a:srgbClr val="0D9488"/>
                 </a:solidFill>
@@ -2897,7 +2910,14 @@
               </a:rPr>
               <a:t>0.212</a:t>
             </a:r>
-            <a:endParaRPr lang="en-US" sz="1000" dirty="0"/>
+            <a:endParaRPr lang="en-US" sz="1200" b="1" dirty="0">
+              <a:solidFill>
+                <a:srgbClr val="0D9488"/>
+              </a:solidFill>
+              <a:latin typeface="Calibri" panose="020F0502020204030204" pitchFamily="34" charset="0"/>
+              <a:ea typeface="Calibri" panose="020F0502020204030204" pitchFamily="34" charset="-122"/>
+              <a:cs typeface="Calibri" panose="020F0502020204030204" pitchFamily="34" charset="-120"/>
+            </a:endParaRPr>
           </a:p>
         </p:txBody>
       </p:sp>
@@ -2925,7 +2945,7 @@
               <a:buNone/>
             </a:pPr>
             <a:r>
-              <a:rPr lang="en-US" sz="1250" b="1" dirty="0">
+              <a:rPr lang="en-US" sz="1400" b="1" dirty="0">
                 <a:solidFill>
                   <a:srgbClr val="0F1B2D"/>
                 </a:solidFill>
@@ -2935,7 +2955,14 @@
               </a:rPr>
               <a:t>Monthly Transaction Count</a:t>
             </a:r>
-            <a:endParaRPr lang="en-US" sz="1250" dirty="0"/>
+            <a:endParaRPr lang="en-US" sz="1400" b="1" dirty="0">
+              <a:solidFill>
+                <a:srgbClr val="0F1B2D"/>
+              </a:solidFill>
+              <a:latin typeface="Calibri" panose="020F0502020204030204" pitchFamily="34" charset="0"/>
+              <a:ea typeface="Calibri" panose="020F0502020204030204" pitchFamily="34" charset="-122"/>
+              <a:cs typeface="Calibri" panose="020F0502020204030204" pitchFamily="34" charset="-120"/>
+            </a:endParaRPr>
           </a:p>
         </p:txBody>
       </p:sp>
@@ -2963,9 +2990,11 @@
               <a:buNone/>
             </a:pPr>
             <a:r>
-              <a:rPr lang="en-US" sz="1000" dirty="0">
-                <a:solidFill>
-                  <a:srgbClr val="94A3B8"/>
+              <a:rPr lang="en-US" sz="1200" dirty="0">
+                <a:solidFill>
+                  <a:schemeClr val="bg1">
+                    <a:lumMod val="50000"/>
+                  </a:schemeClr>
                 </a:solidFill>
                 <a:latin typeface="Calibri" panose="020F0502020204030204" pitchFamily="34" charset="0"/>
                 <a:ea typeface="Calibri" panose="020F0502020204030204" pitchFamily="34" charset="-122"/>
@@ -2973,7 +3002,16 @@
               </a:rPr>
               <a:t>Declining transaction frequency is the strongest churn signal; trigger outreach at &gt;30% MoM drop</a:t>
             </a:r>
-            <a:endParaRPr lang="en-US" sz="1000" dirty="0"/>
+            <a:endParaRPr lang="en-US" sz="1200" dirty="0">
+              <a:solidFill>
+                <a:schemeClr val="bg1">
+                  <a:lumMod val="50000"/>
+                </a:schemeClr>
+              </a:solidFill>
+              <a:latin typeface="Calibri" panose="020F0502020204030204" pitchFamily="34" charset="0"/>
+              <a:ea typeface="Calibri" panose="020F0502020204030204" pitchFamily="34" charset="-122"/>
+              <a:cs typeface="Calibri" panose="020F0502020204030204" pitchFamily="34" charset="-120"/>
+            </a:endParaRPr>
           </a:p>
         </p:txBody>
       </p:sp>
@@ -3108,7 +3146,7 @@
               <a:buNone/>
             </a:pPr>
             <a:r>
-              <a:rPr lang="en-US" sz="1000" b="1" dirty="0">
+              <a:rPr lang="en-US" sz="1200" b="1" dirty="0">
                 <a:solidFill>
                   <a:srgbClr val="FFFFFF"/>
                 </a:solidFill>
@@ -3118,7 +3156,14 @@
               </a:rPr>
               <a:t>#2</a:t>
             </a:r>
-            <a:endParaRPr lang="en-US" sz="1000" dirty="0"/>
+            <a:endParaRPr lang="en-US" sz="1200" b="1" dirty="0">
+              <a:solidFill>
+                <a:srgbClr val="FFFFFF"/>
+              </a:solidFill>
+              <a:latin typeface="Calibri" panose="020F0502020204030204" pitchFamily="34" charset="0"/>
+              <a:ea typeface="Calibri" panose="020F0502020204030204" pitchFamily="34" charset="-122"/>
+              <a:cs typeface="Calibri" panose="020F0502020204030204" pitchFamily="34" charset="-120"/>
+            </a:endParaRPr>
           </a:p>
         </p:txBody>
       </p:sp>
@@ -3173,7 +3218,7 @@
               <a:buNone/>
             </a:pPr>
             <a:r>
-              <a:rPr lang="en-US" sz="1000" b="1" dirty="0">
+              <a:rPr lang="en-US" sz="1200" b="1" dirty="0">
                 <a:solidFill>
                   <a:srgbClr val="0D9488"/>
                 </a:solidFill>
@@ -3183,7 +3228,14 @@
               </a:rPr>
               <a:t>0.202</a:t>
             </a:r>
-            <a:endParaRPr lang="en-US" sz="1000" dirty="0"/>
+            <a:endParaRPr lang="en-US" sz="1200" b="1" dirty="0">
+              <a:solidFill>
+                <a:srgbClr val="0D9488"/>
+              </a:solidFill>
+              <a:latin typeface="Calibri" panose="020F0502020204030204" pitchFamily="34" charset="0"/>
+              <a:ea typeface="Calibri" panose="020F0502020204030204" pitchFamily="34" charset="-122"/>
+              <a:cs typeface="Calibri" panose="020F0502020204030204" pitchFamily="34" charset="-120"/>
+            </a:endParaRPr>
           </a:p>
         </p:txBody>
       </p:sp>
@@ -3211,7 +3263,7 @@
               <a:buNone/>
             </a:pPr>
             <a:r>
-              <a:rPr lang="en-US" sz="1250" b="1" dirty="0">
+              <a:rPr lang="en-US" sz="1400" b="1" dirty="0">
                 <a:solidFill>
                   <a:srgbClr val="0F1B2D"/>
                 </a:solidFill>
@@ -3221,7 +3273,14 @@
               </a:rPr>
               <a:t>Total Digital Logins</a:t>
             </a:r>
-            <a:endParaRPr lang="en-US" sz="1250" dirty="0"/>
+            <a:endParaRPr lang="en-US" sz="1400" b="1" dirty="0">
+              <a:solidFill>
+                <a:srgbClr val="0F1B2D"/>
+              </a:solidFill>
+              <a:latin typeface="Calibri" panose="020F0502020204030204" pitchFamily="34" charset="0"/>
+              <a:ea typeface="Calibri" panose="020F0502020204030204" pitchFamily="34" charset="-122"/>
+              <a:cs typeface="Calibri" panose="020F0502020204030204" pitchFamily="34" charset="-120"/>
+            </a:endParaRPr>
           </a:p>
         </p:txBody>
       </p:sp>
@@ -3249,9 +3308,11 @@
               <a:buNone/>
             </a:pPr>
             <a:r>
-              <a:rPr lang="en-US" sz="1000" dirty="0">
-                <a:solidFill>
-                  <a:srgbClr val="94A3B8"/>
+              <a:rPr lang="en-US" sz="1200" dirty="0">
+                <a:solidFill>
+                  <a:schemeClr val="bg1">
+                    <a:lumMod val="50000"/>
+                  </a:schemeClr>
                 </a:solidFill>
                 <a:latin typeface="Calibri" panose="020F0502020204030204" pitchFamily="34" charset="0"/>
                 <a:ea typeface="Calibri" panose="020F0502020204030204" pitchFamily="34" charset="-122"/>
@@ -3259,7 +3320,16 @@
               </a:rPr>
               <a:t>Low digital banking activity indicates reduced loyalty; re-engage via personalised app campaigns</a:t>
             </a:r>
-            <a:endParaRPr lang="en-US" sz="1000" dirty="0"/>
+            <a:endParaRPr lang="en-US" sz="1200" dirty="0">
+              <a:solidFill>
+                <a:schemeClr val="bg1">
+                  <a:lumMod val="50000"/>
+                </a:schemeClr>
+              </a:solidFill>
+              <a:latin typeface="Calibri" panose="020F0502020204030204" pitchFamily="34" charset="0"/>
+              <a:ea typeface="Calibri" panose="020F0502020204030204" pitchFamily="34" charset="-122"/>
+              <a:cs typeface="Calibri" panose="020F0502020204030204" pitchFamily="34" charset="-120"/>
+            </a:endParaRPr>
           </a:p>
         </p:txBody>
       </p:sp>
@@ -3394,7 +3464,7 @@
               <a:buNone/>
             </a:pPr>
             <a:r>
-              <a:rPr lang="en-US" sz="1000" b="1" dirty="0">
+              <a:rPr lang="en-US" sz="1200" b="1" dirty="0">
                 <a:solidFill>
                   <a:srgbClr val="FFFFFF"/>
                 </a:solidFill>
@@ -3404,7 +3474,14 @@
               </a:rPr>
               <a:t>#3</a:t>
             </a:r>
-            <a:endParaRPr lang="en-US" sz="1000" dirty="0"/>
+            <a:endParaRPr lang="en-US" sz="1200" b="1" dirty="0">
+              <a:solidFill>
+                <a:srgbClr val="FFFFFF"/>
+              </a:solidFill>
+              <a:latin typeface="Calibri" panose="020F0502020204030204" pitchFamily="34" charset="0"/>
+              <a:ea typeface="Calibri" panose="020F0502020204030204" pitchFamily="34" charset="-122"/>
+              <a:cs typeface="Calibri" panose="020F0502020204030204" pitchFamily="34" charset="-120"/>
+            </a:endParaRPr>
           </a:p>
         </p:txBody>
       </p:sp>
@@ -3459,7 +3536,7 @@
               <a:buNone/>
             </a:pPr>
             <a:r>
-              <a:rPr lang="en-US" sz="1000" b="1" dirty="0">
+              <a:rPr lang="en-US" sz="1200" b="1" dirty="0">
                 <a:solidFill>
                   <a:srgbClr val="334155"/>
                 </a:solidFill>
@@ -3469,7 +3546,14 @@
               </a:rPr>
               <a:t>0.075</a:t>
             </a:r>
-            <a:endParaRPr lang="en-US" sz="1000" dirty="0"/>
+            <a:endParaRPr lang="en-US" sz="1200" b="1" dirty="0">
+              <a:solidFill>
+                <a:srgbClr val="334155"/>
+              </a:solidFill>
+              <a:latin typeface="Calibri" panose="020F0502020204030204" pitchFamily="34" charset="0"/>
+              <a:ea typeface="Calibri" panose="020F0502020204030204" pitchFamily="34" charset="-122"/>
+              <a:cs typeface="Calibri" panose="020F0502020204030204" pitchFamily="34" charset="-120"/>
+            </a:endParaRPr>
           </a:p>
         </p:txBody>
       </p:sp>
@@ -3497,7 +3581,7 @@
               <a:buNone/>
             </a:pPr>
             <a:r>
-              <a:rPr lang="en-US" sz="1250" b="1" dirty="0">
+              <a:rPr lang="en-US" sz="1400" b="1" dirty="0">
                 <a:solidFill>
                   <a:srgbClr val="0F1B2D"/>
                 </a:solidFill>
@@ -3507,7 +3591,14 @@
               </a:rPr>
               <a:t>RM Interaction Count</a:t>
             </a:r>
-            <a:endParaRPr lang="en-US" sz="1250" dirty="0"/>
+            <a:endParaRPr lang="en-US" sz="1400" b="1" dirty="0">
+              <a:solidFill>
+                <a:srgbClr val="0F1B2D"/>
+              </a:solidFill>
+              <a:latin typeface="Calibri" panose="020F0502020204030204" pitchFamily="34" charset="0"/>
+              <a:ea typeface="Calibri" panose="020F0502020204030204" pitchFamily="34" charset="-122"/>
+              <a:cs typeface="Calibri" panose="020F0502020204030204" pitchFamily="34" charset="-120"/>
+            </a:endParaRPr>
           </a:p>
         </p:txBody>
       </p:sp>
@@ -3535,9 +3626,11 @@
               <a:buNone/>
             </a:pPr>
             <a:r>
-              <a:rPr lang="en-US" sz="1000" dirty="0">
-                <a:solidFill>
-                  <a:srgbClr val="94A3B8"/>
+              <a:rPr lang="en-US" sz="1200" dirty="0">
+                <a:solidFill>
+                  <a:schemeClr val="bg1">
+                    <a:lumMod val="50000"/>
+                  </a:schemeClr>
                 </a:solidFill>
                 <a:latin typeface="Calibri" panose="020F0502020204030204" pitchFamily="34" charset="0"/>
                 <a:ea typeface="Calibri" panose="020F0502020204030204" pitchFamily="34" charset="-122"/>
@@ -3545,7 +3638,16 @@
               </a:rPr>
               <a:t>Low relationship manager contact flags disengagement; proactive RM check-ins improve retention</a:t>
             </a:r>
-            <a:endParaRPr lang="en-US" sz="1000" dirty="0"/>
+            <a:endParaRPr lang="en-US" sz="1200" dirty="0">
+              <a:solidFill>
+                <a:schemeClr val="bg1">
+                  <a:lumMod val="50000"/>
+                </a:schemeClr>
+              </a:solidFill>
+              <a:latin typeface="Calibri" panose="020F0502020204030204" pitchFamily="34" charset="0"/>
+              <a:ea typeface="Calibri" panose="020F0502020204030204" pitchFamily="34" charset="-122"/>
+              <a:cs typeface="Calibri" panose="020F0502020204030204" pitchFamily="34" charset="-120"/>
+            </a:endParaRPr>
           </a:p>
         </p:txBody>
       </p:sp>
@@ -3680,7 +3782,7 @@
               <a:buNone/>
             </a:pPr>
             <a:r>
-              <a:rPr lang="en-US" sz="1000" b="1" dirty="0">
+              <a:rPr lang="en-US" sz="1200" b="1" dirty="0">
                 <a:solidFill>
                   <a:srgbClr val="FFFFFF"/>
                 </a:solidFill>
@@ -3690,7 +3792,14 @@
               </a:rPr>
               <a:t>#4</a:t>
             </a:r>
-            <a:endParaRPr lang="en-US" sz="1000" dirty="0"/>
+            <a:endParaRPr lang="en-US" sz="1200" b="1" dirty="0">
+              <a:solidFill>
+                <a:srgbClr val="FFFFFF"/>
+              </a:solidFill>
+              <a:latin typeface="Calibri" panose="020F0502020204030204" pitchFamily="34" charset="0"/>
+              <a:ea typeface="Calibri" panose="020F0502020204030204" pitchFamily="34" charset="-122"/>
+              <a:cs typeface="Calibri" panose="020F0502020204030204" pitchFamily="34" charset="-120"/>
+            </a:endParaRPr>
           </a:p>
         </p:txBody>
       </p:sp>
@@ -3745,7 +3854,7 @@
               <a:buNone/>
             </a:pPr>
             <a:r>
-              <a:rPr lang="en-US" sz="1000" b="1" dirty="0">
+              <a:rPr lang="en-US" sz="1200" b="1" dirty="0">
                 <a:solidFill>
                   <a:srgbClr val="334155"/>
                 </a:solidFill>
@@ -3755,7 +3864,14 @@
               </a:rPr>
               <a:t>0.066</a:t>
             </a:r>
-            <a:endParaRPr lang="en-US" sz="1000" dirty="0"/>
+            <a:endParaRPr lang="en-US" sz="1200" b="1" dirty="0">
+              <a:solidFill>
+                <a:srgbClr val="334155"/>
+              </a:solidFill>
+              <a:latin typeface="Calibri" panose="020F0502020204030204" pitchFamily="34" charset="0"/>
+              <a:ea typeface="Calibri" panose="020F0502020204030204" pitchFamily="34" charset="-122"/>
+              <a:cs typeface="Calibri" panose="020F0502020204030204" pitchFamily="34" charset="-120"/>
+            </a:endParaRPr>
           </a:p>
         </p:txBody>
       </p:sp>
@@ -3783,7 +3899,7 @@
               <a:buNone/>
             </a:pPr>
             <a:r>
-              <a:rPr lang="en-US" sz="1250" b="1" dirty="0">
+              <a:rPr lang="en-US" sz="1400" b="1" dirty="0">
                 <a:solidFill>
                   <a:srgbClr val="0F1B2D"/>
                 </a:solidFill>
@@ -3793,7 +3909,14 @@
               </a:rPr>
               <a:t>Balance Decline %</a:t>
             </a:r>
-            <a:endParaRPr lang="en-US" sz="1250" dirty="0"/>
+            <a:endParaRPr lang="en-US" sz="1400" b="1" dirty="0">
+              <a:solidFill>
+                <a:srgbClr val="0F1B2D"/>
+              </a:solidFill>
+              <a:latin typeface="Calibri" panose="020F0502020204030204" pitchFamily="34" charset="0"/>
+              <a:ea typeface="Calibri" panose="020F0502020204030204" pitchFamily="34" charset="-122"/>
+              <a:cs typeface="Calibri" panose="020F0502020204030204" pitchFamily="34" charset="-120"/>
+            </a:endParaRPr>
           </a:p>
         </p:txBody>
       </p:sp>
@@ -3821,9 +3944,11 @@
               <a:buNone/>
             </a:pPr>
             <a:r>
-              <a:rPr lang="en-US" sz="1000" dirty="0">
-                <a:solidFill>
-                  <a:srgbClr val="94A3B8"/>
+              <a:rPr lang="en-US" sz="1200" dirty="0">
+                <a:solidFill>
+                  <a:schemeClr val="bg1">
+                    <a:lumMod val="50000"/>
+                  </a:schemeClr>
                 </a:solidFill>
                 <a:latin typeface="Calibri" panose="020F0502020204030204" pitchFamily="34" charset="0"/>
                 <a:ea typeface="Calibri" panose="020F0502020204030204" pitchFamily="34" charset="-122"/>
@@ -3831,7 +3956,16 @@
               </a:rPr>
               <a:t>Falling balances signal imminent exit; immediate outreach recommended at &gt;15% monthly decline</a:t>
             </a:r>
-            <a:endParaRPr lang="en-US" sz="1000" dirty="0"/>
+            <a:endParaRPr lang="en-US" sz="1200" dirty="0">
+              <a:solidFill>
+                <a:schemeClr val="bg1">
+                  <a:lumMod val="50000"/>
+                </a:schemeClr>
+              </a:solidFill>
+              <a:latin typeface="Calibri" panose="020F0502020204030204" pitchFamily="34" charset="0"/>
+              <a:ea typeface="Calibri" panose="020F0502020204030204" pitchFamily="34" charset="-122"/>
+              <a:cs typeface="Calibri" panose="020F0502020204030204" pitchFamily="34" charset="-120"/>
+            </a:endParaRPr>
           </a:p>
         </p:txBody>
       </p:sp>
@@ -3966,7 +4100,7 @@
               <a:buNone/>
             </a:pPr>
             <a:r>
-              <a:rPr lang="en-US" sz="1000" b="1" dirty="0">
+              <a:rPr lang="en-US" sz="1200" b="1" dirty="0">
                 <a:solidFill>
                   <a:srgbClr val="FFFFFF"/>
                 </a:solidFill>
@@ -3976,7 +4110,14 @@
               </a:rPr>
               <a:t>#5</a:t>
             </a:r>
-            <a:endParaRPr lang="en-US" sz="1000" dirty="0"/>
+            <a:endParaRPr lang="en-US" sz="1200" b="1" dirty="0">
+              <a:solidFill>
+                <a:srgbClr val="FFFFFF"/>
+              </a:solidFill>
+              <a:latin typeface="Calibri" panose="020F0502020204030204" pitchFamily="34" charset="0"/>
+              <a:ea typeface="Calibri" panose="020F0502020204030204" pitchFamily="34" charset="-122"/>
+              <a:cs typeface="Calibri" panose="020F0502020204030204" pitchFamily="34" charset="-120"/>
+            </a:endParaRPr>
           </a:p>
         </p:txBody>
       </p:sp>
@@ -4031,7 +4172,7 @@
               <a:buNone/>
             </a:pPr>
             <a:r>
-              <a:rPr lang="en-US" sz="1000" b="1" dirty="0">
+              <a:rPr lang="en-US" sz="1200" b="1" dirty="0">
                 <a:solidFill>
                   <a:srgbClr val="334155"/>
                 </a:solidFill>
@@ -4041,7 +4182,14 @@
               </a:rPr>
               <a:t>0.057</a:t>
             </a:r>
-            <a:endParaRPr lang="en-US" sz="1000" dirty="0"/>
+            <a:endParaRPr lang="en-US" sz="1200" b="1" dirty="0">
+              <a:solidFill>
+                <a:srgbClr val="334155"/>
+              </a:solidFill>
+              <a:latin typeface="Calibri" panose="020F0502020204030204" pitchFamily="34" charset="0"/>
+              <a:ea typeface="Calibri" panose="020F0502020204030204" pitchFamily="34" charset="-122"/>
+              <a:cs typeface="Calibri" panose="020F0502020204030204" pitchFamily="34" charset="-120"/>
+            </a:endParaRPr>
           </a:p>
         </p:txBody>
       </p:sp>
@@ -4069,7 +4217,7 @@
               <a:buNone/>
             </a:pPr>
             <a:r>
-              <a:rPr lang="en-US" sz="1250" b="1" dirty="0">
+              <a:rPr lang="en-US" sz="1400" b="1" dirty="0">
                 <a:solidFill>
                   <a:srgbClr val="0F1B2D"/>
                 </a:solidFill>
@@ -4079,7 +4227,14 @@
               </a:rPr>
               <a:t>Referral Count</a:t>
             </a:r>
-            <a:endParaRPr lang="en-US" sz="1250" dirty="0"/>
+            <a:endParaRPr lang="en-US" sz="1400" b="1" dirty="0">
+              <a:solidFill>
+                <a:srgbClr val="0F1B2D"/>
+              </a:solidFill>
+              <a:latin typeface="Calibri" panose="020F0502020204030204" pitchFamily="34" charset="0"/>
+              <a:ea typeface="Calibri" panose="020F0502020204030204" pitchFamily="34" charset="-122"/>
+              <a:cs typeface="Calibri" panose="020F0502020204030204" pitchFamily="34" charset="-120"/>
+            </a:endParaRPr>
           </a:p>
         </p:txBody>
       </p:sp>
@@ -4107,9 +4262,11 @@
               <a:buNone/>
             </a:pPr>
             <a:r>
-              <a:rPr lang="en-US" sz="1000" dirty="0">
-                <a:solidFill>
-                  <a:srgbClr val="94A3B8"/>
+              <a:rPr lang="en-US" sz="1200" dirty="0">
+                <a:solidFill>
+                  <a:schemeClr val="bg1">
+                    <a:lumMod val="50000"/>
+                  </a:schemeClr>
                 </a:solidFill>
                 <a:latin typeface="Calibri" panose="020F0502020204030204" pitchFamily="34" charset="0"/>
                 <a:ea typeface="Calibri" panose="020F0502020204030204" pitchFamily="34" charset="-122"/>
@@ -4117,7 +4274,16 @@
               </a:rPr>
               <a:t>Customers who refer others are deeply loyal; low referral count = low brand attachment and churn risk</a:t>
             </a:r>
-            <a:endParaRPr lang="en-US" sz="1000" dirty="0"/>
+            <a:endParaRPr lang="en-US" sz="1200" dirty="0">
+              <a:solidFill>
+                <a:schemeClr val="bg1">
+                  <a:lumMod val="50000"/>
+                </a:schemeClr>
+              </a:solidFill>
+              <a:latin typeface="Calibri" panose="020F0502020204030204" pitchFamily="34" charset="0"/>
+              <a:ea typeface="Calibri" panose="020F0502020204030204" pitchFamily="34" charset="-122"/>
+              <a:cs typeface="Calibri" panose="020F0502020204030204" pitchFamily="34" charset="-120"/>
+            </a:endParaRPr>
           </a:p>
         </p:txBody>
       </p:sp>
@@ -4195,7 +4361,7 @@
               <a:buNone/>
             </a:pPr>
             <a:r>
-              <a:rPr lang="en-US" sz="900" i="1" dirty="0">
+              <a:rPr lang="en-US" sz="1000" i="1" dirty="0">
                 <a:solidFill>
                   <a:srgbClr val="94A3B8"/>
                 </a:solidFill>
@@ -4205,7 +4371,14 @@
               </a:rPr>
               <a:t>Feature importances from final XGBoost model — no leakage, fit only on training data</a:t>
             </a:r>
-            <a:endParaRPr lang="en-US" sz="900" dirty="0"/>
+            <a:endParaRPr lang="en-US" sz="1000" i="1" dirty="0">
+              <a:solidFill>
+                <a:srgbClr val="94A3B8"/>
+              </a:solidFill>
+              <a:latin typeface="Calibri" panose="020F0502020204030204" pitchFamily="34" charset="0"/>
+              <a:ea typeface="Calibri" panose="020F0502020204030204" pitchFamily="34" charset="-122"/>
+              <a:cs typeface="Calibri" panose="020F0502020204030204" pitchFamily="34" charset="-120"/>
+            </a:endParaRPr>
           </a:p>
         </p:txBody>
       </p:sp>
@@ -4250,7 +4423,7 @@
         </p:nvSpPr>
         <p:spPr>
           <a:xfrm>
-            <a:off x="457200" y="205740"/>
+            <a:off x="457200" y="152400"/>
             <a:ext cx="7315200" cy="594360"/>
           </a:xfrm>
           <a:prstGeom prst="rect">
@@ -4288,7 +4461,7 @@
         </p:nvSpPr>
         <p:spPr>
           <a:xfrm>
-            <a:off x="457200" y="751332"/>
+            <a:off x="457200" y="697992"/>
             <a:ext cx="8229600" cy="274320"/>
           </a:xfrm>
           <a:prstGeom prst="rect">
@@ -4399,7 +4572,7 @@
               <a:buNone/>
             </a:pPr>
             <a:r>
-              <a:rPr lang="en-US" sz="1400" b="1" dirty="0">
+              <a:rPr lang="en-US" sz="1600" b="1" dirty="0">
                 <a:solidFill>
                   <a:srgbClr val="0D9488"/>
                 </a:solidFill>
@@ -4409,7 +4582,14 @@
               </a:rPr>
               <a:t>🏆  Model Achievement</a:t>
             </a:r>
-            <a:endParaRPr lang="en-US" sz="1400" dirty="0"/>
+            <a:endParaRPr lang="en-US" sz="1600" b="1" dirty="0">
+              <a:solidFill>
+                <a:srgbClr val="0D9488"/>
+              </a:solidFill>
+              <a:latin typeface="Calibri" panose="020F0502020204030204" pitchFamily="34" charset="0"/>
+              <a:ea typeface="Calibri" panose="020F0502020204030204" pitchFamily="34" charset="-122"/>
+              <a:cs typeface="Calibri" panose="020F0502020204030204" pitchFamily="34" charset="-120"/>
+            </a:endParaRPr>
           </a:p>
         </p:txBody>
       </p:sp>
@@ -4421,7 +4601,7 @@
         </p:nvSpPr>
         <p:spPr>
           <a:xfrm>
-            <a:off x="530352" y="1746504"/>
+            <a:off x="530352" y="1670304"/>
             <a:ext cx="3794760" cy="914400"/>
           </a:xfrm>
           <a:prstGeom prst="rect">
@@ -4440,7 +4620,7 @@
               <a:buNone/>
             </a:pPr>
             <a:r>
-              <a:rPr lang="en-US" sz="1150" dirty="0">
+              <a:rPr lang="en-US" sz="1400" dirty="0">
                 <a:solidFill>
                   <a:srgbClr val="94A3B8"/>
                 </a:solidFill>
@@ -4450,7 +4630,14 @@
               </a:rPr>
               <a:t>XGBoost with SMOTE achieved PR-AUC of 0.9989 and F1 of 0.886 — significantly outperforming the logistic regression baseline</a:t>
             </a:r>
-            <a:endParaRPr lang="en-US" sz="1150" dirty="0"/>
+            <a:endParaRPr lang="en-US" sz="1400" dirty="0">
+              <a:solidFill>
+                <a:srgbClr val="94A3B8"/>
+              </a:solidFill>
+              <a:latin typeface="Calibri" panose="020F0502020204030204" pitchFamily="34" charset="0"/>
+              <a:ea typeface="Calibri" panose="020F0502020204030204" pitchFamily="34" charset="-122"/>
+              <a:cs typeface="Calibri" panose="020F0502020204030204" pitchFamily="34" charset="-120"/>
+            </a:endParaRPr>
           </a:p>
         </p:txBody>
       </p:sp>
@@ -4510,7 +4697,7 @@
               <a:buNone/>
             </a:pPr>
             <a:r>
-              <a:rPr lang="en-US" sz="1400" b="1" dirty="0">
+              <a:rPr lang="en-US" sz="1600" b="1" dirty="0">
                 <a:solidFill>
                   <a:srgbClr val="F59E0B"/>
                 </a:solidFill>
@@ -4520,7 +4707,14 @@
               </a:rPr>
               <a:t>💰  Business Value</a:t>
             </a:r>
-            <a:endParaRPr lang="en-US" sz="1400" dirty="0"/>
+            <a:endParaRPr lang="en-US" sz="1600" b="1" dirty="0">
+              <a:solidFill>
+                <a:srgbClr val="F59E0B"/>
+              </a:solidFill>
+              <a:latin typeface="Calibri" panose="020F0502020204030204" pitchFamily="34" charset="0"/>
+              <a:ea typeface="Calibri" panose="020F0502020204030204" pitchFamily="34" charset="-122"/>
+              <a:cs typeface="Calibri" panose="020F0502020204030204" pitchFamily="34" charset="-120"/>
+            </a:endParaRPr>
           </a:p>
         </p:txBody>
       </p:sp>
@@ -4532,7 +4726,7 @@
         </p:nvSpPr>
         <p:spPr>
           <a:xfrm>
-            <a:off x="5010912" y="1746504"/>
+            <a:off x="5010912" y="1670304"/>
             <a:ext cx="3794760" cy="914400"/>
           </a:xfrm>
           <a:prstGeom prst="rect">
@@ -4551,7 +4745,7 @@
               <a:buNone/>
             </a:pPr>
             <a:r>
-              <a:rPr lang="en-US" sz="1150" dirty="0">
+              <a:rPr lang="en-US" sz="1400" dirty="0">
                 <a:solidFill>
                   <a:srgbClr val="94A3B8"/>
                 </a:solidFill>
@@ -4561,7 +4755,14 @@
               </a:rPr>
               <a:t>Cost-optimised threshold (0.01) achieves 100% recall, catching every churner with total validation cost of just ₹33,500</a:t>
             </a:r>
-            <a:endParaRPr lang="en-US" sz="1150" dirty="0"/>
+            <a:endParaRPr lang="en-US" sz="1400" dirty="0">
+              <a:solidFill>
+                <a:srgbClr val="94A3B8"/>
+              </a:solidFill>
+              <a:latin typeface="Calibri" panose="020F0502020204030204" pitchFamily="34" charset="0"/>
+              <a:ea typeface="Calibri" panose="020F0502020204030204" pitchFamily="34" charset="-122"/>
+              <a:cs typeface="Calibri" panose="020F0502020204030204" pitchFamily="34" charset="-120"/>
+            </a:endParaRPr>
           </a:p>
         </p:txBody>
       </p:sp>
@@ -4621,7 +4822,7 @@
               <a:buNone/>
             </a:pPr>
             <a:r>
-              <a:rPr lang="en-US" sz="1400" b="1" dirty="0">
+              <a:rPr lang="en-US" sz="1600" b="1" dirty="0">
                 <a:solidFill>
                   <a:srgbClr val="22C55E"/>
                 </a:solidFill>
@@ -4631,7 +4832,14 @@
               </a:rPr>
               <a:t>🔒  Data Integrity</a:t>
             </a:r>
-            <a:endParaRPr lang="en-US" sz="1400" dirty="0"/>
+            <a:endParaRPr lang="en-US" sz="1600" b="1" dirty="0">
+              <a:solidFill>
+                <a:srgbClr val="22C55E"/>
+              </a:solidFill>
+              <a:latin typeface="Calibri" panose="020F0502020204030204" pitchFamily="34" charset="0"/>
+              <a:ea typeface="Calibri" panose="020F0502020204030204" pitchFamily="34" charset="-122"/>
+              <a:cs typeface="Calibri" panose="020F0502020204030204" pitchFamily="34" charset="-120"/>
+            </a:endParaRPr>
           </a:p>
         </p:txBody>
       </p:sp>
@@ -4643,7 +4851,7 @@
         </p:nvSpPr>
         <p:spPr>
           <a:xfrm>
-            <a:off x="530352" y="3392424"/>
+            <a:off x="530352" y="3300984"/>
             <a:ext cx="3794760" cy="914400"/>
           </a:xfrm>
           <a:prstGeom prst="rect">
@@ -4662,7 +4870,7 @@
               <a:buNone/>
             </a:pPr>
             <a:r>
-              <a:rPr lang="en-US" sz="1150" dirty="0">
+              <a:rPr lang="en-US" sz="1400" dirty="0">
                 <a:solidFill>
                   <a:srgbClr val="94A3B8"/>
                 </a:solidFill>
@@ -4672,7 +4880,14 @@
               </a:rPr>
               <a:t>Zero data leakage enforced throughout — all preprocessing fit exclusively on training data for honest evaluation</a:t>
             </a:r>
-            <a:endParaRPr lang="en-US" sz="1150" dirty="0"/>
+            <a:endParaRPr lang="en-US" sz="1400" dirty="0">
+              <a:solidFill>
+                <a:srgbClr val="94A3B8"/>
+              </a:solidFill>
+              <a:latin typeface="Calibri" panose="020F0502020204030204" pitchFamily="34" charset="0"/>
+              <a:ea typeface="Calibri" panose="020F0502020204030204" pitchFamily="34" charset="-122"/>
+              <a:cs typeface="Calibri" panose="020F0502020204030204" pitchFamily="34" charset="-120"/>
+            </a:endParaRPr>
           </a:p>
         </p:txBody>
       </p:sp>
@@ -4732,7 +4947,7 @@
               <a:buNone/>
             </a:pPr>
             <a:r>
-              <a:rPr lang="en-US" sz="1400" b="1" dirty="0">
+              <a:rPr lang="en-US" sz="1600" b="1" dirty="0">
                 <a:solidFill>
                   <a:srgbClr val="6366F1"/>
                 </a:solidFill>
@@ -4742,7 +4957,14 @@
               </a:rPr>
               <a:t>🎯  Actionable Output</a:t>
             </a:r>
-            <a:endParaRPr lang="en-US" sz="1400" dirty="0"/>
+            <a:endParaRPr lang="en-US" sz="1600" b="1" dirty="0">
+              <a:solidFill>
+                <a:srgbClr val="6366F1"/>
+              </a:solidFill>
+              <a:latin typeface="Calibri" panose="020F0502020204030204" pitchFamily="34" charset="0"/>
+              <a:ea typeface="Calibri" panose="020F0502020204030204" pitchFamily="34" charset="-122"/>
+              <a:cs typeface="Calibri" panose="020F0502020204030204" pitchFamily="34" charset="-120"/>
+            </a:endParaRPr>
           </a:p>
         </p:txBody>
       </p:sp>
@@ -4754,7 +4976,7 @@
         </p:nvSpPr>
         <p:spPr>
           <a:xfrm>
-            <a:off x="5010912" y="3392424"/>
+            <a:off x="5010912" y="3285744"/>
             <a:ext cx="3794760" cy="914400"/>
           </a:xfrm>
           <a:prstGeom prst="rect">
@@ -4773,7 +4995,7 @@
               <a:buNone/>
             </a:pPr>
             <a:r>
-              <a:rPr lang="en-US" sz="1150" dirty="0">
+              <a:rPr lang="en-US" sz="1400" dirty="0">
                 <a:solidFill>
                   <a:srgbClr val="94A3B8"/>
                 </a:solidFill>
@@ -4783,7 +5005,14 @@
               </a:rPr>
               <a:t>Top 5 churn drivers: transaction count (0.212), digital logins (0.202), RM interaction (0.075), balance decline (0.066), referrals (0.057)</a:t>
             </a:r>
-            <a:endParaRPr lang="en-US" sz="1150" dirty="0"/>
+            <a:endParaRPr lang="en-US" sz="1400" dirty="0">
+              <a:solidFill>
+                <a:srgbClr val="94A3B8"/>
+              </a:solidFill>
+              <a:latin typeface="Calibri" panose="020F0502020204030204" pitchFamily="34" charset="0"/>
+              <a:ea typeface="Calibri" panose="020F0502020204030204" pitchFamily="34" charset="-122"/>
+              <a:cs typeface="Calibri" panose="020F0502020204030204" pitchFamily="34" charset="-120"/>
+            </a:endParaRPr>
           </a:p>
         </p:txBody>
       </p:sp>
@@ -4916,7 +5145,7 @@
         </p:nvSpPr>
         <p:spPr>
           <a:xfrm>
-            <a:off x="0" y="777240"/>
+            <a:off x="0" y="792480"/>
             <a:ext cx="9144000" cy="54864"/>
           </a:xfrm>
           <a:prstGeom prst="rect">
@@ -4941,7 +5170,7 @@
         </p:nvSpPr>
         <p:spPr>
           <a:xfrm>
-            <a:off x="457200" y="109728"/>
+            <a:off x="449580" y="41148"/>
             <a:ext cx="7315200" cy="502920"/>
           </a:xfrm>
           <a:prstGeom prst="rect">
@@ -4979,7 +5208,7 @@
         </p:nvSpPr>
         <p:spPr>
           <a:xfrm>
-            <a:off x="457200" y="489204"/>
+            <a:off x="457200" y="451104"/>
             <a:ext cx="6400800" cy="292608"/>
           </a:xfrm>
           <a:prstGeom prst="rect">
@@ -5196,7 +5425,7 @@
                 <a:ea typeface="Consolas" panose="020B0609020204030204" pitchFamily="34" charset="-122"/>
                 <a:cs typeface="Consolas" panose="020B0609020204030204" pitchFamily="34" charset="-120"/>
               </a:rPr>
-              <a:t>ChurnZero_AtasiKole_Predictions.csv</a:t>
+              <a:t>Churnzero_atasikolexi05_Predictions.csv</a:t>
             </a:r>
             <a:endParaRPr lang="en-US" sz="900" dirty="0"/>
           </a:p>
@@ -5210,7 +5439,7 @@
         </p:nvSpPr>
         <p:spPr>
           <a:xfrm>
-            <a:off x="438912" y="2450592"/>
+            <a:off x="438912" y="2496312"/>
             <a:ext cx="146304" cy="146304"/>
           </a:xfrm>
           <a:prstGeom prst="ellipse">
@@ -5251,7 +5480,7 @@
               <a:buNone/>
             </a:pPr>
             <a:r>
-              <a:rPr lang="en-US" sz="1100" dirty="0">
+              <a:rPr lang="en-US" sz="1200" dirty="0">
                 <a:solidFill>
                   <a:srgbClr val="334155"/>
                 </a:solidFill>
@@ -5261,7 +5490,14 @@
               </a:rPr>
               <a:t>2,026 rows matching test customer_ids</a:t>
             </a:r>
-            <a:endParaRPr lang="en-US" sz="1100" dirty="0"/>
+            <a:endParaRPr lang="en-US" sz="1200" dirty="0">
+              <a:solidFill>
+                <a:srgbClr val="334155"/>
+              </a:solidFill>
+              <a:latin typeface="Calibri" panose="020F0502020204030204" pitchFamily="34" charset="0"/>
+              <a:ea typeface="Calibri" panose="020F0502020204030204" pitchFamily="34" charset="-122"/>
+              <a:cs typeface="Calibri" panose="020F0502020204030204" pitchFamily="34" charset="-120"/>
+            </a:endParaRPr>
           </a:p>
         </p:txBody>
       </p:sp>
@@ -5298,7 +5534,7 @@
         </p:nvSpPr>
         <p:spPr>
           <a:xfrm>
-            <a:off x="649224" y="2898648"/>
+            <a:off x="649224" y="2822448"/>
             <a:ext cx="2286000" cy="457200"/>
           </a:xfrm>
           <a:prstGeom prst="rect">
@@ -5314,7 +5550,7 @@
               <a:buNone/>
             </a:pPr>
             <a:r>
-              <a:rPr lang="en-US" sz="1100" dirty="0">
+              <a:rPr lang="en-US" sz="1200" dirty="0">
                 <a:solidFill>
                   <a:srgbClr val="334155"/>
                 </a:solidFill>
@@ -5324,7 +5560,14 @@
               </a:rPr>
               <a:t>churn_prediction: binary (0/1)</a:t>
             </a:r>
-            <a:endParaRPr lang="en-US" sz="1100" dirty="0"/>
+            <a:endParaRPr lang="en-US" sz="1200" dirty="0">
+              <a:solidFill>
+                <a:srgbClr val="334155"/>
+              </a:solidFill>
+              <a:latin typeface="Calibri" panose="020F0502020204030204" pitchFamily="34" charset="0"/>
+              <a:ea typeface="Calibri" panose="020F0502020204030204" pitchFamily="34" charset="-122"/>
+              <a:cs typeface="Calibri" panose="020F0502020204030204" pitchFamily="34" charset="-120"/>
+            </a:endParaRPr>
           </a:p>
         </p:txBody>
       </p:sp>
@@ -5361,7 +5604,7 @@
         </p:nvSpPr>
         <p:spPr>
           <a:xfrm>
-            <a:off x="649224" y="3401568"/>
+            <a:off x="649224" y="3317748"/>
             <a:ext cx="2286000" cy="457200"/>
           </a:xfrm>
           <a:prstGeom prst="rect">
@@ -5377,7 +5620,7 @@
               <a:buNone/>
             </a:pPr>
             <a:r>
-              <a:rPr lang="en-US" sz="1100" dirty="0">
+              <a:rPr lang="en-US" sz="1200" dirty="0">
                 <a:solidFill>
                   <a:srgbClr val="334155"/>
                 </a:solidFill>
@@ -5387,7 +5630,14 @@
               </a:rPr>
               <a:t>churn_probability: float 0–1</a:t>
             </a:r>
-            <a:endParaRPr lang="en-US" sz="1100" dirty="0"/>
+            <a:endParaRPr lang="en-US" sz="1200" dirty="0">
+              <a:solidFill>
+                <a:srgbClr val="334155"/>
+              </a:solidFill>
+              <a:latin typeface="Calibri" panose="020F0502020204030204" pitchFamily="34" charset="0"/>
+              <a:ea typeface="Calibri" panose="020F0502020204030204" pitchFamily="34" charset="-122"/>
+              <a:cs typeface="Calibri" panose="020F0502020204030204" pitchFamily="34" charset="-120"/>
+            </a:endParaRPr>
           </a:p>
         </p:txBody>
       </p:sp>
@@ -5440,7 +5690,7 @@
               <a:buNone/>
             </a:pPr>
             <a:r>
-              <a:rPr lang="en-US" sz="1100" dirty="0">
+              <a:rPr lang="en-US" sz="1200" dirty="0">
                 <a:solidFill>
                   <a:srgbClr val="334155"/>
                 </a:solidFill>
@@ -5450,7 +5700,14 @@
               </a:rPr>
               <a:t>Zero null values in output columns</a:t>
             </a:r>
-            <a:endParaRPr lang="en-US" sz="1100" dirty="0"/>
+            <a:endParaRPr lang="en-US" sz="1200" dirty="0">
+              <a:solidFill>
+                <a:srgbClr val="334155"/>
+              </a:solidFill>
+              <a:latin typeface="Calibri" panose="020F0502020204030204" pitchFamily="34" charset="0"/>
+              <a:ea typeface="Calibri" panose="020F0502020204030204" pitchFamily="34" charset="-122"/>
+              <a:cs typeface="Calibri" panose="020F0502020204030204" pitchFamily="34" charset="-120"/>
+            </a:endParaRPr>
           </a:p>
         </p:txBody>
       </p:sp>
@@ -5641,9 +5898,12 @@
                 <a:ea typeface="Consolas" panose="020B0609020204030204" pitchFamily="34" charset="-122"/>
                 <a:cs typeface="Consolas" panose="020B0609020204030204" pitchFamily="34" charset="-120"/>
               </a:rPr>
-              <a:t>github.com/atasikolexi05/ChurnZero</a:t>
-            </a:r>
-            <a:endParaRPr lang="en-US" sz="900" dirty="0"/>
+              <a:t>github.com/Atasii/churnzero26-banking-churn</a:t>
+            </a:r>
+            <a:endParaRPr lang="en-US" altLang="en-US" sz="900" dirty="0">
+              <a:latin typeface="Consolas" panose="020B0609020204030204" pitchFamily="34" charset="0"/>
+              <a:cs typeface="Consolas" panose="020B0609020204030204" pitchFamily="34" charset="0"/>
+            </a:endParaRPr>
           </a:p>
         </p:txBody>
       </p:sp>
@@ -5680,7 +5940,7 @@
         </p:nvSpPr>
         <p:spPr>
           <a:xfrm>
-            <a:off x="3593592" y="2395728"/>
+            <a:off x="3593592" y="2304288"/>
             <a:ext cx="2286000" cy="457200"/>
           </a:xfrm>
           <a:prstGeom prst="rect">
@@ -5696,7 +5956,7 @@
               <a:buNone/>
             </a:pPr>
             <a:r>
-              <a:rPr lang="en-US" sz="1100" dirty="0">
+              <a:rPr lang="en-US" sz="1200" dirty="0">
                 <a:solidFill>
                   <a:srgbClr val="334155"/>
                 </a:solidFill>
@@ -5706,7 +5966,14 @@
               </a:rPr>
               <a:t>README with reproduction guide</a:t>
             </a:r>
-            <a:endParaRPr lang="en-US" sz="1100" dirty="0"/>
+            <a:endParaRPr lang="en-US" sz="1200" dirty="0">
+              <a:solidFill>
+                <a:srgbClr val="334155"/>
+              </a:solidFill>
+              <a:latin typeface="Calibri" panose="020F0502020204030204" pitchFamily="34" charset="0"/>
+              <a:ea typeface="Calibri" panose="020F0502020204030204" pitchFamily="34" charset="-122"/>
+              <a:cs typeface="Calibri" panose="020F0502020204030204" pitchFamily="34" charset="-120"/>
+            </a:endParaRPr>
           </a:p>
         </p:txBody>
       </p:sp>
@@ -5743,7 +6010,7 @@
         </p:nvSpPr>
         <p:spPr>
           <a:xfrm>
-            <a:off x="3593592" y="2898648"/>
+            <a:off x="3593592" y="2814828"/>
             <a:ext cx="2286000" cy="457200"/>
           </a:xfrm>
           <a:prstGeom prst="rect">
@@ -5759,7 +6026,7 @@
               <a:buNone/>
             </a:pPr>
             <a:r>
-              <a:rPr lang="en-US" sz="1100" dirty="0">
+              <a:rPr lang="en-US" sz="1200" dirty="0">
                 <a:solidFill>
                   <a:srgbClr val="334155"/>
                 </a:solidFill>
@@ -5769,7 +6036,14 @@
               </a:rPr>
               <a:t>requirements.txt included</a:t>
             </a:r>
-            <a:endParaRPr lang="en-US" sz="1100" dirty="0"/>
+            <a:endParaRPr lang="en-US" sz="1200" dirty="0">
+              <a:solidFill>
+                <a:srgbClr val="334155"/>
+              </a:solidFill>
+              <a:latin typeface="Calibri" panose="020F0502020204030204" pitchFamily="34" charset="0"/>
+              <a:ea typeface="Calibri" panose="020F0502020204030204" pitchFamily="34" charset="-122"/>
+              <a:cs typeface="Calibri" panose="020F0502020204030204" pitchFamily="34" charset="-120"/>
+            </a:endParaRPr>
           </a:p>
         </p:txBody>
       </p:sp>
@@ -5806,7 +6080,7 @@
         </p:nvSpPr>
         <p:spPr>
           <a:xfrm>
-            <a:off x="3593592" y="3401568"/>
+            <a:off x="3593592" y="3317748"/>
             <a:ext cx="2286000" cy="457200"/>
           </a:xfrm>
           <a:prstGeom prst="rect">
@@ -5822,7 +6096,7 @@
               <a:buNone/>
             </a:pPr>
             <a:r>
-              <a:rPr lang="en-US" sz="1100" dirty="0">
+              <a:rPr lang="en-US" sz="1200" dirty="0">
                 <a:solidFill>
                   <a:srgbClr val="334155"/>
                 </a:solidFill>
@@ -5832,7 +6106,14 @@
               </a:rPr>
               <a:t>Notebook runs end-to-end</a:t>
             </a:r>
-            <a:endParaRPr lang="en-US" sz="1100" dirty="0"/>
+            <a:endParaRPr lang="en-US" sz="1200" dirty="0">
+              <a:solidFill>
+                <a:srgbClr val="334155"/>
+              </a:solidFill>
+              <a:latin typeface="Calibri" panose="020F0502020204030204" pitchFamily="34" charset="0"/>
+              <a:ea typeface="Calibri" panose="020F0502020204030204" pitchFamily="34" charset="-122"/>
+              <a:cs typeface="Calibri" panose="020F0502020204030204" pitchFamily="34" charset="-120"/>
+            </a:endParaRPr>
           </a:p>
         </p:txBody>
       </p:sp>
@@ -5869,7 +6150,7 @@
         </p:nvSpPr>
         <p:spPr>
           <a:xfrm>
-            <a:off x="3593592" y="3904488"/>
+            <a:off x="3593592" y="3881628"/>
             <a:ext cx="2286000" cy="457200"/>
           </a:xfrm>
           <a:prstGeom prst="rect">
@@ -5885,7 +6166,7 @@
               <a:buNone/>
             </a:pPr>
             <a:r>
-              <a:rPr lang="en-US" sz="1100" dirty="0">
+              <a:rPr lang="en-US" sz="1200" dirty="0">
                 <a:solidFill>
                   <a:srgbClr val="334155"/>
                 </a:solidFill>
@@ -5895,7 +6176,14 @@
               </a:rPr>
               <a:t>Data folder structure documented</a:t>
             </a:r>
-            <a:endParaRPr lang="en-US" sz="1100" dirty="0"/>
+            <a:endParaRPr lang="en-US" sz="1200" dirty="0">
+              <a:solidFill>
+                <a:srgbClr val="334155"/>
+              </a:solidFill>
+              <a:latin typeface="Calibri" panose="020F0502020204030204" pitchFamily="34" charset="0"/>
+              <a:ea typeface="Calibri" panose="020F0502020204030204" pitchFamily="34" charset="-122"/>
+              <a:cs typeface="Calibri" panose="020F0502020204030204" pitchFamily="34" charset="-120"/>
+            </a:endParaRPr>
           </a:p>
         </p:txBody>
       </p:sp>
@@ -6086,7 +6374,7 @@
                 <a:ea typeface="Consolas" panose="020B0609020204030204" pitchFamily="34" charset="-122"/>
                 <a:cs typeface="Consolas" panose="020B0609020204030204" pitchFamily="34" charset="-120"/>
               </a:rPr>
-              <a:t>ChurnZero_AtasiKole_Code.ipynb</a:t>
+              <a:t>churnzero_atasikolexi05_code.ipynb</a:t>
             </a:r>
             <a:endParaRPr lang="en-US" sz="900" dirty="0"/>
           </a:p>
@@ -6100,7 +6388,7 @@
         </p:nvSpPr>
         <p:spPr>
           <a:xfrm>
-            <a:off x="6327648" y="2450592"/>
+            <a:off x="6327648" y="2496312"/>
             <a:ext cx="146304" cy="146304"/>
           </a:xfrm>
           <a:prstGeom prst="ellipse">
@@ -6125,7 +6413,7 @@
         </p:nvSpPr>
         <p:spPr>
           <a:xfrm>
-            <a:off x="6537960" y="2395728"/>
+            <a:off x="6537960" y="2334768"/>
             <a:ext cx="2286000" cy="457200"/>
           </a:xfrm>
           <a:prstGeom prst="rect">
@@ -6141,7 +6429,7 @@
               <a:buNone/>
             </a:pPr>
             <a:r>
-              <a:rPr lang="en-US" sz="1100" dirty="0">
+              <a:rPr lang="en-US" sz="1200" dirty="0">
                 <a:solidFill>
                   <a:srgbClr val="334155"/>
                 </a:solidFill>
@@ -6151,7 +6439,14 @@
               </a:rPr>
               <a:t>Runs top-to-bottom sequentially</a:t>
             </a:r>
-            <a:endParaRPr lang="en-US" sz="1100" dirty="0"/>
+            <a:endParaRPr lang="en-US" sz="1200" dirty="0">
+              <a:solidFill>
+                <a:srgbClr val="334155"/>
+              </a:solidFill>
+              <a:latin typeface="Calibri" panose="020F0502020204030204" pitchFamily="34" charset="0"/>
+              <a:ea typeface="Calibri" panose="020F0502020204030204" pitchFamily="34" charset="-122"/>
+              <a:cs typeface="Calibri" panose="020F0502020204030204" pitchFamily="34" charset="-120"/>
+            </a:endParaRPr>
           </a:p>
         </p:txBody>
       </p:sp>
@@ -6188,7 +6483,7 @@
         </p:nvSpPr>
         <p:spPr>
           <a:xfrm>
-            <a:off x="6537960" y="2898648"/>
+            <a:off x="6537960" y="2883408"/>
             <a:ext cx="2286000" cy="457200"/>
           </a:xfrm>
           <a:prstGeom prst="rect">
@@ -6204,7 +6499,7 @@
               <a:buNone/>
             </a:pPr>
             <a:r>
-              <a:rPr lang="en-US" sz="1100" dirty="0">
+              <a:rPr lang="en-US" sz="1200" dirty="0">
                 <a:solidFill>
                   <a:srgbClr val="334155"/>
                 </a:solidFill>
@@ -6214,7 +6509,14 @@
               </a:rPr>
               <a:t>No hidden state or out-of-order cells</a:t>
             </a:r>
-            <a:endParaRPr lang="en-US" sz="1100" dirty="0"/>
+            <a:endParaRPr lang="en-US" sz="1200" dirty="0">
+              <a:solidFill>
+                <a:srgbClr val="334155"/>
+              </a:solidFill>
+              <a:latin typeface="Calibri" panose="020F0502020204030204" pitchFamily="34" charset="0"/>
+              <a:ea typeface="Calibri" panose="020F0502020204030204" pitchFamily="34" charset="-122"/>
+              <a:cs typeface="Calibri" panose="020F0502020204030204" pitchFamily="34" charset="-120"/>
+            </a:endParaRPr>
           </a:p>
         </p:txBody>
       </p:sp>
@@ -6251,7 +6553,7 @@
         </p:nvSpPr>
         <p:spPr>
           <a:xfrm>
-            <a:off x="6537960" y="3401568"/>
+            <a:off x="6537960" y="3325368"/>
             <a:ext cx="2286000" cy="457200"/>
           </a:xfrm>
           <a:prstGeom prst="rect">
@@ -6267,7 +6569,7 @@
               <a:buNone/>
             </a:pPr>
             <a:r>
-              <a:rPr lang="en-US" sz="1100" dirty="0">
+              <a:rPr lang="en-US" sz="1200" dirty="0">
                 <a:solidFill>
                   <a:srgbClr val="334155"/>
                 </a:solidFill>
@@ -6277,7 +6579,14 @@
               </a:rPr>
               <a:t>Comments explain every step</a:t>
             </a:r>
-            <a:endParaRPr lang="en-US" sz="1100" dirty="0"/>
+            <a:endParaRPr lang="en-US" sz="1200" dirty="0">
+              <a:solidFill>
+                <a:srgbClr val="334155"/>
+              </a:solidFill>
+              <a:latin typeface="Calibri" panose="020F0502020204030204" pitchFamily="34" charset="0"/>
+              <a:ea typeface="Calibri" panose="020F0502020204030204" pitchFamily="34" charset="-122"/>
+              <a:cs typeface="Calibri" panose="020F0502020204030204" pitchFamily="34" charset="-120"/>
+            </a:endParaRPr>
           </a:p>
         </p:txBody>
       </p:sp>
@@ -6314,7 +6623,7 @@
         </p:nvSpPr>
         <p:spPr>
           <a:xfrm>
-            <a:off x="6537960" y="3904488"/>
+            <a:off x="6537960" y="3805428"/>
             <a:ext cx="2286000" cy="457200"/>
           </a:xfrm>
           <a:prstGeom prst="rect">
@@ -6330,7 +6639,7 @@
               <a:buNone/>
             </a:pPr>
             <a:r>
-              <a:rPr lang="en-US" sz="1100" dirty="0">
+              <a:rPr lang="en-US" sz="1200" dirty="0">
                 <a:solidFill>
                   <a:srgbClr val="334155"/>
                 </a:solidFill>
@@ -6340,7 +6649,14 @@
               </a:rPr>
               <a:t>Random seed 42 — deterministic</a:t>
             </a:r>
-            <a:endParaRPr lang="en-US" sz="1100" dirty="0"/>
+            <a:endParaRPr lang="en-US" sz="1200" dirty="0">
+              <a:solidFill>
+                <a:srgbClr val="334155"/>
+              </a:solidFill>
+              <a:latin typeface="Calibri" panose="020F0502020204030204" pitchFamily="34" charset="0"/>
+              <a:ea typeface="Calibri" panose="020F0502020204030204" pitchFamily="34" charset="-122"/>
+              <a:cs typeface="Calibri" panose="020F0502020204030204" pitchFamily="34" charset="-120"/>
+            </a:endParaRPr>
           </a:p>
         </p:txBody>
       </p:sp>
@@ -6448,7 +6764,7 @@
         </p:nvSpPr>
         <p:spPr>
           <a:xfrm>
-            <a:off x="0" y="777240"/>
+            <a:off x="0" y="785495"/>
             <a:ext cx="9144000" cy="54864"/>
           </a:xfrm>
           <a:prstGeom prst="rect">
@@ -6473,7 +6789,7 @@
         </p:nvSpPr>
         <p:spPr>
           <a:xfrm>
-            <a:off x="457200" y="76708"/>
+            <a:off x="457200" y="35433"/>
             <a:ext cx="7315200" cy="502920"/>
           </a:xfrm>
           <a:prstGeom prst="rect">
@@ -6511,7 +6827,7 @@
         </p:nvSpPr>
         <p:spPr>
           <a:xfrm>
-            <a:off x="472440" y="495554"/>
+            <a:off x="480060" y="479044"/>
             <a:ext cx="6400800" cy="292608"/>
           </a:xfrm>
           <a:prstGeom prst="rect">
@@ -6550,7 +6866,7 @@
           <p:nvPr/>
         </p:nvGraphicFramePr>
         <p:xfrm>
-          <a:off x="274320" y="1005840"/>
+          <a:off x="274320" y="931545"/>
           <a:ext cx="8595360" cy="2432304"/>
         </p:xfrm>
         <a:graphic>
@@ -6572,14 +6888,18 @@
                         <a:buNone/>
                       </a:pPr>
                       <a:r>
-                        <a:rPr lang="en-US" sz="1100" b="1" dirty="0">
+                        <a:rPr lang="en-US" sz="1400" b="1" dirty="0">
                           <a:solidFill>
                             <a:srgbClr val="FFFFFF"/>
                           </a:solidFill>
                         </a:rPr>
                         <a:t>Metric</a:t>
                       </a:r>
-                      <a:endParaRPr lang="en-US" sz="1100" dirty="0"/>
+                      <a:endParaRPr lang="en-US" sz="1400" b="1" dirty="0">
+                        <a:solidFill>
+                          <a:srgbClr val="FFFFFF"/>
+                        </a:solidFill>
+                      </a:endParaRPr>
                     </a:p>
                   </a:txBody>
                   <a:tcPr>
@@ -6633,14 +6953,18 @@
                         <a:buNone/>
                       </a:pPr>
                       <a:r>
-                        <a:rPr lang="en-US" sz="1100" b="1" dirty="0">
+                        <a:rPr lang="en-US" sz="1400" b="1" dirty="0">
                           <a:solidFill>
                             <a:srgbClr val="FFFFFF"/>
                           </a:solidFill>
                         </a:rPr>
                         <a:t>Formula</a:t>
                       </a:r>
-                      <a:endParaRPr lang="en-US" sz="1100" dirty="0"/>
+                      <a:endParaRPr lang="en-US" sz="1400" b="1" dirty="0">
+                        <a:solidFill>
+                          <a:srgbClr val="FFFFFF"/>
+                        </a:solidFill>
+                      </a:endParaRPr>
                     </a:p>
                   </a:txBody>
                   <a:tcPr>
@@ -6694,14 +7018,18 @@
                         <a:buNone/>
                       </a:pPr>
                       <a:r>
-                        <a:rPr lang="en-US" sz="1100" b="1" dirty="0">
+                        <a:rPr lang="en-US" sz="1400" b="1" dirty="0">
                           <a:solidFill>
                             <a:srgbClr val="FFFFFF"/>
                           </a:solidFill>
                         </a:rPr>
                         <a:t>Result (Validation)</a:t>
                       </a:r>
-                      <a:endParaRPr lang="en-US" sz="1100" dirty="0"/>
+                      <a:endParaRPr lang="en-US" sz="1400" b="1" dirty="0">
+                        <a:solidFill>
+                          <a:srgbClr val="FFFFFF"/>
+                        </a:solidFill>
+                      </a:endParaRPr>
                     </a:p>
                   </a:txBody>
                   <a:tcPr>
@@ -6757,14 +7085,18 @@
                         <a:buNone/>
                       </a:pPr>
                       <a:r>
-                        <a:rPr lang="en-US" sz="1100" dirty="0">
+                        <a:rPr lang="en-US" sz="1400" dirty="0">
                           <a:solidFill>
                             <a:srgbClr val="334155"/>
                           </a:solidFill>
                         </a:rPr>
                         <a:t>PR-AUC</a:t>
                       </a:r>
-                      <a:endParaRPr lang="en-US" sz="1100" dirty="0"/>
+                      <a:endParaRPr lang="en-US" sz="1400" dirty="0">
+                        <a:solidFill>
+                          <a:srgbClr val="334155"/>
+                        </a:solidFill>
+                      </a:endParaRPr>
                     </a:p>
                   </a:txBody>
                   <a:tcPr>
@@ -6818,14 +7150,18 @@
                         <a:buNone/>
                       </a:pPr>
                       <a:r>
-                        <a:rPr lang="en-US" sz="1100" dirty="0">
+                        <a:rPr lang="en-US" sz="1400" dirty="0">
                           <a:solidFill>
                             <a:srgbClr val="334155"/>
                           </a:solidFill>
                         </a:rPr>
                         <a:t>Area under Precision-Recall curve</a:t>
                       </a:r>
-                      <a:endParaRPr lang="en-US" sz="1100" dirty="0"/>
+                      <a:endParaRPr lang="en-US" sz="1400" dirty="0">
+                        <a:solidFill>
+                          <a:srgbClr val="334155"/>
+                        </a:solidFill>
+                      </a:endParaRPr>
                     </a:p>
                   </a:txBody>
                   <a:tcPr>
@@ -6879,14 +7215,18 @@
                         <a:buNone/>
                       </a:pPr>
                       <a:r>
-                        <a:rPr lang="en-US" sz="1100" dirty="0">
+                        <a:rPr lang="en-US" sz="1400" dirty="0">
                           <a:solidFill>
                             <a:srgbClr val="334155"/>
                           </a:solidFill>
                         </a:rPr>
                         <a:t>0.9989</a:t>
                       </a:r>
-                      <a:endParaRPr lang="en-US" sz="1100" dirty="0"/>
+                      <a:endParaRPr lang="en-US" sz="1400" dirty="0">
+                        <a:solidFill>
+                          <a:srgbClr val="334155"/>
+                        </a:solidFill>
+                      </a:endParaRPr>
                     </a:p>
                   </a:txBody>
                   <a:tcPr>
@@ -6942,14 +7282,18 @@
                         <a:buNone/>
                       </a:pPr>
                       <a:r>
-                        <a:rPr lang="en-US" sz="1100" dirty="0">
+                        <a:rPr lang="en-US" sz="1400" dirty="0">
                           <a:solidFill>
                             <a:srgbClr val="334155"/>
                           </a:solidFill>
                         </a:rPr>
                         <a:t>F1-Score</a:t>
                       </a:r>
-                      <a:endParaRPr lang="en-US" sz="1100" dirty="0"/>
+                      <a:endParaRPr lang="en-US" sz="1400" dirty="0">
+                        <a:solidFill>
+                          <a:srgbClr val="334155"/>
+                        </a:solidFill>
+                      </a:endParaRPr>
                     </a:p>
                   </a:txBody>
                   <a:tcPr>
@@ -7003,14 +7347,18 @@
                         <a:buNone/>
                       </a:pPr>
                       <a:r>
-                        <a:rPr lang="en-US" sz="1100" dirty="0">
+                        <a:rPr lang="en-US" sz="1400" dirty="0">
                           <a:solidFill>
                             <a:srgbClr val="334155"/>
                           </a:solidFill>
                         </a:rPr>
                         <a:t>2 × (P × R) / (P + R)</a:t>
                       </a:r>
-                      <a:endParaRPr lang="en-US" sz="1100" dirty="0"/>
+                      <a:endParaRPr lang="en-US" sz="1400" dirty="0">
+                        <a:solidFill>
+                          <a:srgbClr val="334155"/>
+                        </a:solidFill>
+                      </a:endParaRPr>
                     </a:p>
                   </a:txBody>
                   <a:tcPr>
@@ -7064,14 +7412,18 @@
                         <a:buNone/>
                       </a:pPr>
                       <a:r>
-                        <a:rPr lang="en-US" sz="1100" dirty="0">
+                        <a:rPr lang="en-US" sz="1400" dirty="0">
                           <a:solidFill>
                             <a:srgbClr val="334155"/>
                           </a:solidFill>
                         </a:rPr>
                         <a:t>0.886</a:t>
                       </a:r>
-                      <a:endParaRPr lang="en-US" sz="1100" dirty="0"/>
+                      <a:endParaRPr lang="en-US" sz="1400" dirty="0">
+                        <a:solidFill>
+                          <a:srgbClr val="334155"/>
+                        </a:solidFill>
+                      </a:endParaRPr>
                     </a:p>
                   </a:txBody>
                   <a:tcPr>
@@ -7127,14 +7479,18 @@
                         <a:buNone/>
                       </a:pPr>
                       <a:r>
-                        <a:rPr lang="en-US" sz="1100" dirty="0">
+                        <a:rPr lang="en-US" sz="1400" dirty="0">
                           <a:solidFill>
                             <a:srgbClr val="334155"/>
                           </a:solidFill>
                         </a:rPr>
                         <a:t>Recall</a:t>
                       </a:r>
-                      <a:endParaRPr lang="en-US" sz="1100" dirty="0"/>
+                      <a:endParaRPr lang="en-US" sz="1400" dirty="0">
+                        <a:solidFill>
+                          <a:srgbClr val="334155"/>
+                        </a:solidFill>
+                      </a:endParaRPr>
                     </a:p>
                   </a:txBody>
                   <a:tcPr>
@@ -7188,14 +7544,18 @@
                         <a:buNone/>
                       </a:pPr>
                       <a:r>
-                        <a:rPr lang="en-US" sz="1100" dirty="0">
+                        <a:rPr lang="en-US" sz="1400" dirty="0">
                           <a:solidFill>
                             <a:srgbClr val="334155"/>
                           </a:solidFill>
                         </a:rPr>
                         <a:t>TP / (TP + FN)</a:t>
                       </a:r>
-                      <a:endParaRPr lang="en-US" sz="1100" dirty="0"/>
+                      <a:endParaRPr lang="en-US" sz="1400" dirty="0">
+                        <a:solidFill>
+                          <a:srgbClr val="334155"/>
+                        </a:solidFill>
+                      </a:endParaRPr>
                     </a:p>
                   </a:txBody>
                   <a:tcPr>
@@ -7249,14 +7609,18 @@
                         <a:buNone/>
                       </a:pPr>
                       <a:r>
-                        <a:rPr lang="en-US" sz="1100" dirty="0">
+                        <a:rPr lang="en-US" sz="1400" dirty="0">
                           <a:solidFill>
                             <a:srgbClr val="334155"/>
                           </a:solidFill>
                         </a:rPr>
                         <a:t>100% (FN = 0)</a:t>
                       </a:r>
-                      <a:endParaRPr lang="en-US" sz="1100" dirty="0"/>
+                      <a:endParaRPr lang="en-US" sz="1400" dirty="0">
+                        <a:solidFill>
+                          <a:srgbClr val="334155"/>
+                        </a:solidFill>
+                      </a:endParaRPr>
                     </a:p>
                   </a:txBody>
                   <a:tcPr>
@@ -7312,14 +7676,18 @@
                         <a:buNone/>
                       </a:pPr>
                       <a:r>
-                        <a:rPr lang="en-US" sz="1100" dirty="0">
+                        <a:rPr lang="en-US" sz="1400" dirty="0">
                           <a:solidFill>
                             <a:srgbClr val="334155"/>
                           </a:solidFill>
                         </a:rPr>
                         <a:t>Precision</a:t>
                       </a:r>
-                      <a:endParaRPr lang="en-US" sz="1100" dirty="0"/>
+                      <a:endParaRPr lang="en-US" sz="1400" dirty="0">
+                        <a:solidFill>
+                          <a:srgbClr val="334155"/>
+                        </a:solidFill>
+                      </a:endParaRPr>
                     </a:p>
                   </a:txBody>
                   <a:tcPr>
@@ -7373,14 +7741,18 @@
                         <a:buNone/>
                       </a:pPr>
                       <a:r>
-                        <a:rPr lang="en-US" sz="1100" dirty="0">
+                        <a:rPr lang="en-US" sz="1400" dirty="0">
                           <a:solidFill>
                             <a:srgbClr val="334155"/>
                           </a:solidFill>
                         </a:rPr>
                         <a:t>TP / (TP + FP)</a:t>
                       </a:r>
-                      <a:endParaRPr lang="en-US" sz="1100" dirty="0"/>
+                      <a:endParaRPr lang="en-US" sz="1400" dirty="0">
+                        <a:solidFill>
+                          <a:srgbClr val="334155"/>
+                        </a:solidFill>
+                      </a:endParaRPr>
                     </a:p>
                   </a:txBody>
                   <a:tcPr>
@@ -7434,14 +7806,18 @@
                         <a:buNone/>
                       </a:pPr>
                       <a:r>
-                        <a:rPr lang="en-US" sz="1100" dirty="0">
+                        <a:rPr lang="en-US" sz="1400" dirty="0">
                           <a:solidFill>
                             <a:srgbClr val="334155"/>
                           </a:solidFill>
                         </a:rPr>
                         <a:t>79.6%</a:t>
                       </a:r>
-                      <a:endParaRPr lang="en-US" sz="1100" dirty="0"/>
+                      <a:endParaRPr lang="en-US" sz="1400" dirty="0">
+                        <a:solidFill>
+                          <a:srgbClr val="334155"/>
+                        </a:solidFill>
+                      </a:endParaRPr>
                     </a:p>
                   </a:txBody>
                   <a:tcPr>
@@ -7497,14 +7873,18 @@
                         <a:buNone/>
                       </a:pPr>
                       <a:r>
-                        <a:rPr lang="en-US" sz="1100" dirty="0">
+                        <a:rPr lang="en-US" sz="1400" dirty="0">
                           <a:solidFill>
                             <a:srgbClr val="334155"/>
                           </a:solidFill>
                         </a:rPr>
                         <a:t>Threshold</a:t>
                       </a:r>
-                      <a:endParaRPr lang="en-US" sz="1100" dirty="0"/>
+                      <a:endParaRPr lang="en-US" sz="1400" dirty="0">
+                        <a:solidFill>
+                          <a:srgbClr val="334155"/>
+                        </a:solidFill>
+                      </a:endParaRPr>
                     </a:p>
                   </a:txBody>
                   <a:tcPr>
@@ -7558,14 +7938,18 @@
                         <a:buNone/>
                       </a:pPr>
                       <a:r>
-                        <a:rPr lang="en-US" sz="1100" dirty="0">
+                        <a:rPr lang="en-US" sz="1400" dirty="0">
                           <a:solidFill>
                             <a:srgbClr val="334155"/>
                           </a:solidFill>
                         </a:rPr>
                         <a:t>Cost-minimised sweep 0.01–0.99</a:t>
                       </a:r>
-                      <a:endParaRPr lang="en-US" sz="1100" dirty="0"/>
+                      <a:endParaRPr lang="en-US" sz="1400" dirty="0">
+                        <a:solidFill>
+                          <a:srgbClr val="334155"/>
+                        </a:solidFill>
+                      </a:endParaRPr>
                     </a:p>
                   </a:txBody>
                   <a:tcPr>
@@ -7619,14 +8003,18 @@
                         <a:buNone/>
                       </a:pPr>
                       <a:r>
-                        <a:rPr lang="en-US" sz="1100" dirty="0">
+                        <a:rPr lang="en-US" sz="1400" dirty="0">
                           <a:solidFill>
                             <a:srgbClr val="334155"/>
                           </a:solidFill>
                         </a:rPr>
                         <a:t>0.01</a:t>
                       </a:r>
-                      <a:endParaRPr lang="en-US" sz="1100" dirty="0"/>
+                      <a:endParaRPr lang="en-US" sz="1400" dirty="0">
+                        <a:solidFill>
+                          <a:srgbClr val="334155"/>
+                        </a:solidFill>
+                      </a:endParaRPr>
                     </a:p>
                   </a:txBody>
                   <a:tcPr>
@@ -7682,14 +8070,18 @@
                         <a:buNone/>
                       </a:pPr>
                       <a:r>
-                        <a:rPr lang="en-US" sz="1100" dirty="0">
+                        <a:rPr lang="en-US" sz="1400" dirty="0">
                           <a:solidFill>
                             <a:srgbClr val="334155"/>
                           </a:solidFill>
                         </a:rPr>
                         <a:t>Business Cost</a:t>
                       </a:r>
-                      <a:endParaRPr lang="en-US" sz="1100" dirty="0"/>
+                      <a:endParaRPr lang="en-US" sz="1400" dirty="0">
+                        <a:solidFill>
+                          <a:srgbClr val="334155"/>
+                        </a:solidFill>
+                      </a:endParaRPr>
                     </a:p>
                   </a:txBody>
                   <a:tcPr>
@@ -7743,14 +8135,18 @@
                         <a:buNone/>
                       </a:pPr>
                       <a:r>
-                        <a:rPr lang="en-US" sz="1100" dirty="0">
+                        <a:rPr lang="en-US" sz="1400" dirty="0">
                           <a:solidFill>
                             <a:srgbClr val="334155"/>
                           </a:solidFill>
                         </a:rPr>
                         <a:t>FP×500 + FN×40000</a:t>
                       </a:r>
-                      <a:endParaRPr lang="en-US" sz="1100" dirty="0"/>
+                      <a:endParaRPr lang="en-US" sz="1400" dirty="0">
+                        <a:solidFill>
+                          <a:srgbClr val="334155"/>
+                        </a:solidFill>
+                      </a:endParaRPr>
                     </a:p>
                   </a:txBody>
                   <a:tcPr>
@@ -7804,14 +8200,18 @@
                         <a:buNone/>
                       </a:pPr>
                       <a:r>
-                        <a:rPr lang="en-US" sz="1100" dirty="0">
+                        <a:rPr lang="en-US" sz="1400" dirty="0">
                           <a:solidFill>
                             <a:srgbClr val="334155"/>
                           </a:solidFill>
                         </a:rPr>
                         <a:t>₹33,500 (67 FP, 0 FN)</a:t>
                       </a:r>
-                      <a:endParaRPr lang="en-US" sz="1100" dirty="0"/>
+                      <a:endParaRPr lang="en-US" sz="1400" dirty="0">
+                        <a:solidFill>
+                          <a:srgbClr val="334155"/>
+                        </a:solidFill>
+                      </a:endParaRPr>
                     </a:p>
                   </a:txBody>
                   <a:tcPr>
@@ -7869,8 +8269,8 @@
         </p:nvSpPr>
         <p:spPr>
           <a:xfrm>
-            <a:off x="274320" y="3566160"/>
-            <a:ext cx="4572000" cy="1398270"/>
+            <a:off x="274320" y="3455670"/>
+            <a:ext cx="4572000" cy="1508760"/>
           </a:xfrm>
           <a:prstGeom prst="rect">
             <a:avLst/>
@@ -7901,7 +8301,7 @@
         </p:nvSpPr>
         <p:spPr>
           <a:xfrm>
-            <a:off x="274320" y="3566160"/>
+            <a:off x="274320" y="3467100"/>
             <a:ext cx="4572000" cy="54864"/>
           </a:xfrm>
           <a:prstGeom prst="rect">
@@ -7926,7 +8326,7 @@
         </p:nvSpPr>
         <p:spPr>
           <a:xfrm>
-            <a:off x="403860" y="3565017"/>
+            <a:off x="403860" y="3482467"/>
             <a:ext cx="4297680" cy="292608"/>
           </a:xfrm>
           <a:prstGeom prst="rect">
@@ -7964,7 +8364,7 @@
         </p:nvSpPr>
         <p:spPr>
           <a:xfrm>
-            <a:off x="411480" y="3959352"/>
+            <a:off x="403860" y="3885057"/>
             <a:ext cx="4297680" cy="822960"/>
           </a:xfrm>
           <a:prstGeom prst="rect">
@@ -8033,7 +8433,14 @@
               </a:rPr>
               <a:t>Correlation-based: |corr| &gt; 0.70 to target investigated and removed if post-event</a:t>
             </a:r>
-            <a:endParaRPr lang="en-US" sz="1000" dirty="0"/>
+            <a:endParaRPr lang="en-US" sz="1000" dirty="0">
+              <a:solidFill>
+                <a:srgbClr val="334155"/>
+              </a:solidFill>
+              <a:latin typeface="Calibri" panose="020F0502020204030204" pitchFamily="34" charset="0"/>
+              <a:ea typeface="Calibri" panose="020F0502020204030204" pitchFamily="34" charset="-122"/>
+              <a:cs typeface="Calibri" panose="020F0502020204030204" pitchFamily="34" charset="-120"/>
+            </a:endParaRPr>
           </a:p>
         </p:txBody>
       </p:sp>
@@ -8045,8 +8452,8 @@
         </p:nvSpPr>
         <p:spPr>
           <a:xfrm>
-            <a:off x="5029200" y="3566160"/>
-            <a:ext cx="3840480" cy="1406525"/>
+            <a:off x="5029200" y="3470910"/>
+            <a:ext cx="3840480" cy="1501775"/>
           </a:xfrm>
           <a:prstGeom prst="rect">
             <a:avLst/>
@@ -8077,7 +8484,7 @@
         </p:nvSpPr>
         <p:spPr>
           <a:xfrm>
-            <a:off x="5029200" y="3566160"/>
+            <a:off x="5029200" y="3467100"/>
             <a:ext cx="3840480" cy="54864"/>
           </a:xfrm>
           <a:prstGeom prst="rect">
@@ -8102,7 +8509,7 @@
         </p:nvSpPr>
         <p:spPr>
           <a:xfrm>
-            <a:off x="5166360" y="3581527"/>
+            <a:off x="5166360" y="3548507"/>
             <a:ext cx="3566160" cy="292608"/>
           </a:xfrm>
           <a:prstGeom prst="rect">
@@ -8140,7 +8547,7 @@
         </p:nvSpPr>
         <p:spPr>
           <a:xfrm>
-            <a:off x="5166360" y="3959352"/>
+            <a:off x="5166360" y="3885057"/>
             <a:ext cx="3566160" cy="219456"/>
           </a:xfrm>
           <a:prstGeom prst="rect">
@@ -8156,7 +8563,7 @@
               <a:buNone/>
             </a:pPr>
             <a:r>
-              <a:rPr lang="en-US" sz="1050" dirty="0">
+              <a:rPr lang="en-US" sz="1200" dirty="0">
                 <a:solidFill>
                   <a:srgbClr val="334155"/>
                 </a:solidFill>
@@ -8166,7 +8573,14 @@
               </a:rPr>
               <a:t>✅  np.random.seed(42)</a:t>
             </a:r>
-            <a:endParaRPr lang="en-US" sz="1050" dirty="0"/>
+            <a:endParaRPr lang="en-US" sz="1200" dirty="0">
+              <a:solidFill>
+                <a:srgbClr val="334155"/>
+              </a:solidFill>
+              <a:latin typeface="Calibri" panose="020F0502020204030204" pitchFamily="34" charset="0"/>
+              <a:ea typeface="Calibri" panose="020F0502020204030204" pitchFamily="34" charset="-122"/>
+              <a:cs typeface="Calibri" panose="020F0502020204030204" pitchFamily="34" charset="-120"/>
+            </a:endParaRPr>
           </a:p>
         </p:txBody>
       </p:sp>
@@ -8178,7 +8592,7 @@
         </p:nvSpPr>
         <p:spPr>
           <a:xfrm>
-            <a:off x="5166360" y="4178808"/>
+            <a:off x="5166360" y="4137533"/>
             <a:ext cx="3566160" cy="219456"/>
           </a:xfrm>
           <a:prstGeom prst="rect">
@@ -8194,7 +8608,7 @@
               <a:buNone/>
             </a:pPr>
             <a:r>
-              <a:rPr lang="en-US" sz="1050" dirty="0">
+              <a:rPr lang="en-US" sz="1200" dirty="0">
                 <a:solidFill>
                   <a:srgbClr val="334155"/>
                 </a:solidFill>
@@ -8204,7 +8618,14 @@
               </a:rPr>
               <a:t>✅  train_test_split(stratify=y, random_state=42)</a:t>
             </a:r>
-            <a:endParaRPr lang="en-US" sz="1050" dirty="0"/>
+            <a:endParaRPr lang="en-US" sz="1200" dirty="0">
+              <a:solidFill>
+                <a:srgbClr val="334155"/>
+              </a:solidFill>
+              <a:latin typeface="Calibri" panose="020F0502020204030204" pitchFamily="34" charset="0"/>
+              <a:ea typeface="Calibri" panose="020F0502020204030204" pitchFamily="34" charset="-122"/>
+              <a:cs typeface="Calibri" panose="020F0502020204030204" pitchFamily="34" charset="-120"/>
+            </a:endParaRPr>
           </a:p>
         </p:txBody>
       </p:sp>
@@ -8216,7 +8637,7 @@
         </p:nvSpPr>
         <p:spPr>
           <a:xfrm>
-            <a:off x="5166360" y="4398264"/>
+            <a:off x="5166360" y="4381754"/>
             <a:ext cx="3566160" cy="219456"/>
           </a:xfrm>
           <a:prstGeom prst="rect">
@@ -8232,7 +8653,7 @@
               <a:buNone/>
             </a:pPr>
             <a:r>
-              <a:rPr lang="en-US" sz="1050" dirty="0">
+              <a:rPr lang="en-US" sz="1200" dirty="0">
                 <a:solidFill>
                   <a:srgbClr val="334155"/>
                 </a:solidFill>
@@ -8242,7 +8663,14 @@
               </a:rPr>
               <a:t>✅  SMOTE(random_state=42)</a:t>
             </a:r>
-            <a:endParaRPr lang="en-US" sz="1050" dirty="0"/>
+            <a:endParaRPr lang="en-US" sz="1200" dirty="0">
+              <a:solidFill>
+                <a:srgbClr val="334155"/>
+              </a:solidFill>
+              <a:latin typeface="Calibri" panose="020F0502020204030204" pitchFamily="34" charset="0"/>
+              <a:ea typeface="Calibri" panose="020F0502020204030204" pitchFamily="34" charset="-122"/>
+              <a:cs typeface="Calibri" panose="020F0502020204030204" pitchFamily="34" charset="-120"/>
+            </a:endParaRPr>
           </a:p>
         </p:txBody>
       </p:sp>
@@ -8270,7 +8698,7 @@
               <a:buNone/>
             </a:pPr>
             <a:r>
-              <a:rPr lang="en-US" sz="1050" dirty="0">
+              <a:rPr lang="en-US" sz="1200" dirty="0">
                 <a:solidFill>
                   <a:srgbClr val="334155"/>
                 </a:solidFill>
@@ -8280,7 +8708,14 @@
               </a:rPr>
               <a:t>✅  XGBClassifier(random_state=42)</a:t>
             </a:r>
-            <a:endParaRPr lang="en-US" sz="1050" dirty="0"/>
+            <a:endParaRPr lang="en-US" sz="1200" dirty="0">
+              <a:solidFill>
+                <a:srgbClr val="334155"/>
+              </a:solidFill>
+              <a:latin typeface="Calibri" panose="020F0502020204030204" pitchFamily="34" charset="0"/>
+              <a:ea typeface="Calibri" panose="020F0502020204030204" pitchFamily="34" charset="-122"/>
+              <a:cs typeface="Calibri" panose="020F0502020204030204" pitchFamily="34" charset="-120"/>
+            </a:endParaRPr>
           </a:p>
         </p:txBody>
       </p:sp>
@@ -8388,7 +8823,7 @@
         </p:nvSpPr>
         <p:spPr>
           <a:xfrm>
-            <a:off x="0" y="807720"/>
+            <a:off x="0" y="822960"/>
             <a:ext cx="9144000" cy="54864"/>
           </a:xfrm>
           <a:prstGeom prst="rect">
@@ -8413,7 +8848,7 @@
         </p:nvSpPr>
         <p:spPr>
           <a:xfrm>
-            <a:off x="457200" y="109728"/>
+            <a:off x="457200" y="71628"/>
             <a:ext cx="5486400" cy="502920"/>
           </a:xfrm>
           <a:prstGeom prst="rect">
@@ -8451,7 +8886,7 @@
         </p:nvSpPr>
         <p:spPr>
           <a:xfrm>
-            <a:off x="464820" y="481584"/>
+            <a:off x="464820" y="489204"/>
             <a:ext cx="5486400" cy="292608"/>
           </a:xfrm>
           <a:prstGeom prst="rect">
@@ -8481,885 +8916,984 @@
           </a:p>
         </p:txBody>
       </p:sp>
-      <p:sp>
-        <p:nvSpPr>
-          <p:cNvPr id="6" name="Shape 4"/>
-          <p:cNvSpPr/>
-          <p:nvPr/>
-        </p:nvSpPr>
-        <p:spPr>
-          <a:xfrm>
-            <a:off x="228600" y="1005840"/>
-            <a:ext cx="2788920" cy="3566160"/>
-          </a:xfrm>
-          <a:prstGeom prst="rect">
-            <a:avLst/>
-          </a:prstGeom>
-          <a:solidFill>
-            <a:srgbClr val="FFFFFF"/>
-          </a:solidFill>
-          <a:ln w="12700">
+      <p:grpSp>
+        <p:nvGrpSpPr>
+          <p:cNvPr id="34" name="Group 33"/>
+          <p:cNvGrpSpPr/>
+          <p:nvPr/>
+        </p:nvGrpSpPr>
+        <p:grpSpPr>
+          <a:xfrm>
+            <a:off x="228600" y="1135380"/>
+            <a:ext cx="8641080" cy="3566160"/>
+            <a:chOff x="360" y="1584"/>
+            <a:chExt cx="13608" cy="5616"/>
+          </a:xfrm>
+        </p:grpSpPr>
+        <p:sp>
+          <p:nvSpPr>
+            <p:cNvPr id="6" name="Shape 4"/>
+            <p:cNvSpPr/>
+            <p:nvPr/>
+          </p:nvSpPr>
+          <p:spPr>
+            <a:xfrm>
+              <a:off x="360" y="1584"/>
+              <a:ext cx="4392" cy="5616"/>
+            </a:xfrm>
+            <a:prstGeom prst="rect">
+              <a:avLst/>
+            </a:prstGeom>
             <a:solidFill>
-              <a:srgbClr val="E2E8F0"/>
+              <a:srgbClr val="FFFFFF"/>
             </a:solidFill>
-            <a:prstDash val="solid"/>
-          </a:ln>
-          <a:effectLst>
-            <a:outerShdw blurRad="101600" dist="25400" dir="8100000" algn="bl" rotWithShape="0">
-              <a:srgbClr val="000000">
-                <a:alpha val="10000"/>
-              </a:srgbClr>
-            </a:outerShdw>
-          </a:effectLst>
-        </p:spPr>
-      </p:sp>
-      <p:sp>
-        <p:nvSpPr>
-          <p:cNvPr id="7" name="Shape 5"/>
-          <p:cNvSpPr/>
-          <p:nvPr/>
-        </p:nvSpPr>
-        <p:spPr>
-          <a:xfrm>
-            <a:off x="228600" y="1005840"/>
-            <a:ext cx="2788920" cy="54864"/>
-          </a:xfrm>
-          <a:prstGeom prst="rect">
-            <a:avLst/>
-          </a:prstGeom>
-          <a:solidFill>
-            <a:srgbClr val="EF4444"/>
-          </a:solidFill>
-          <a:ln w="12700">
+            <a:ln w="12700">
+              <a:solidFill>
+                <a:srgbClr val="E2E8F0"/>
+              </a:solidFill>
+              <a:prstDash val="solid"/>
+            </a:ln>
+            <a:effectLst>
+              <a:outerShdw blurRad="101600" dist="25400" dir="8100000" algn="bl" rotWithShape="0">
+                <a:srgbClr val="000000">
+                  <a:alpha val="10000"/>
+                </a:srgbClr>
+              </a:outerShdw>
+            </a:effectLst>
+          </p:spPr>
+        </p:sp>
+        <p:sp>
+          <p:nvSpPr>
+            <p:cNvPr id="7" name="Shape 5"/>
+            <p:cNvSpPr/>
+            <p:nvPr/>
+          </p:nvSpPr>
+          <p:spPr>
+            <a:xfrm>
+              <a:off x="360" y="1584"/>
+              <a:ext cx="4392" cy="86"/>
+            </a:xfrm>
+            <a:prstGeom prst="rect">
+              <a:avLst/>
+            </a:prstGeom>
             <a:solidFill>
               <a:srgbClr val="EF4444"/>
             </a:solidFill>
-            <a:prstDash val="solid"/>
-          </a:ln>
-        </p:spPr>
-      </p:sp>
-      <p:sp>
-        <p:nvSpPr>
-          <p:cNvPr id="8" name="Text 6"/>
-          <p:cNvSpPr/>
-          <p:nvPr/>
-        </p:nvSpPr>
-        <p:spPr>
-          <a:xfrm>
-            <a:off x="365760" y="1115568"/>
-            <a:ext cx="2514600" cy="411480"/>
-          </a:xfrm>
-          <a:prstGeom prst="rect">
-            <a:avLst/>
-          </a:prstGeom>
-          <a:noFill/>
-        </p:spPr>
-        <p:txBody>
-          <a:bodyPr wrap="square" rtlCol="0" anchor="ctr"/>
-          <a:lstStyle/>
-          <a:p>
-            <a:pPr marL="0" indent="0">
-              <a:buNone/>
-            </a:pPr>
-            <a:r>
-              <a:rPr lang="en-US" sz="1300" b="1" dirty="0">
+            <a:ln w="12700">
+              <a:solidFill>
+                <a:srgbClr val="EF4444"/>
+              </a:solidFill>
+              <a:prstDash val="solid"/>
+            </a:ln>
+          </p:spPr>
+        </p:sp>
+        <p:sp>
+          <p:nvSpPr>
+            <p:cNvPr id="8" name="Text 6"/>
+            <p:cNvSpPr/>
+            <p:nvPr/>
+          </p:nvSpPr>
+          <p:spPr>
+            <a:xfrm>
+              <a:off x="576" y="1757"/>
+              <a:ext cx="3960" cy="648"/>
+            </a:xfrm>
+            <a:prstGeom prst="rect">
+              <a:avLst/>
+            </a:prstGeom>
+            <a:noFill/>
+          </p:spPr>
+          <p:txBody>
+            <a:bodyPr wrap="square" rtlCol="0" anchor="ctr"/>
+            <a:lstStyle/>
+            <a:p>
+              <a:pPr marL="0" indent="0">
+                <a:buNone/>
+              </a:pPr>
+              <a:r>
+                <a:rPr lang="en-US" sz="1400" b="1" dirty="0">
+                  <a:solidFill>
+                    <a:srgbClr val="0F1B2D"/>
+                  </a:solidFill>
+                  <a:latin typeface="Calibri" panose="020F0502020204030204" pitchFamily="34" charset="0"/>
+                  <a:ea typeface="Calibri" panose="020F0502020204030204" pitchFamily="34" charset="-122"/>
+                  <a:cs typeface="Calibri" panose="020F0502020204030204" pitchFamily="34" charset="-120"/>
+                </a:rPr>
+                <a:t>Business Challenge</a:t>
+              </a:r>
+              <a:endParaRPr lang="en-US" sz="1400" b="1" dirty="0">
                 <a:solidFill>
                   <a:srgbClr val="0F1B2D"/>
                 </a:solidFill>
                 <a:latin typeface="Calibri" panose="020F0502020204030204" pitchFamily="34" charset="0"/>
                 <a:ea typeface="Calibri" panose="020F0502020204030204" pitchFamily="34" charset="-122"/>
                 <a:cs typeface="Calibri" panose="020F0502020204030204" pitchFamily="34" charset="-120"/>
-              </a:rPr>
-              <a:t>Business Challenge</a:t>
-            </a:r>
-            <a:endParaRPr lang="en-US" sz="1300" dirty="0"/>
-          </a:p>
-        </p:txBody>
-      </p:sp>
-      <p:sp>
-        <p:nvSpPr>
-          <p:cNvPr id="9" name="Shape 7"/>
-          <p:cNvSpPr/>
-          <p:nvPr/>
-        </p:nvSpPr>
-        <p:spPr>
-          <a:xfrm>
-            <a:off x="365760" y="1664208"/>
-            <a:ext cx="201168" cy="201168"/>
-          </a:xfrm>
-          <a:prstGeom prst="ellipse">
-            <a:avLst/>
-          </a:prstGeom>
-          <a:solidFill>
-            <a:srgbClr val="EF4444"/>
-          </a:solidFill>
-          <a:ln w="12700">
+              </a:endParaRPr>
+            </a:p>
+          </p:txBody>
+        </p:sp>
+        <p:sp>
+          <p:nvSpPr>
+            <p:cNvPr id="9" name="Shape 7"/>
+            <p:cNvSpPr/>
+            <p:nvPr/>
+          </p:nvSpPr>
+          <p:spPr>
+            <a:xfrm>
+              <a:off x="576" y="2705"/>
+              <a:ext cx="317" cy="317"/>
+            </a:xfrm>
+            <a:prstGeom prst="ellipse">
+              <a:avLst/>
+            </a:prstGeom>
             <a:solidFill>
               <a:srgbClr val="EF4444"/>
             </a:solidFill>
-            <a:prstDash val="solid"/>
-          </a:ln>
-        </p:spPr>
-      </p:sp>
-      <p:sp>
-        <p:nvSpPr>
-          <p:cNvPr id="10" name="Text 8"/>
-          <p:cNvSpPr/>
-          <p:nvPr/>
-        </p:nvSpPr>
-        <p:spPr>
-          <a:xfrm>
-            <a:off x="630936" y="1479804"/>
-            <a:ext cx="2286000" cy="731520"/>
-          </a:xfrm>
-          <a:prstGeom prst="rect">
-            <a:avLst/>
-          </a:prstGeom>
-          <a:noFill/>
-        </p:spPr>
-        <p:txBody>
-          <a:bodyPr wrap="square" rtlCol="0" anchor="ctr"/>
-          <a:lstStyle/>
-          <a:p>
-            <a:pPr marL="0" indent="0">
-              <a:lnSpc>
-                <a:spcPct val="120000"/>
-              </a:lnSpc>
-              <a:buNone/>
-            </a:pPr>
-            <a:r>
-              <a:rPr lang="en-US" sz="1150" dirty="0">
+            <a:ln w="12700">
+              <a:solidFill>
+                <a:srgbClr val="EF4444"/>
+              </a:solidFill>
+              <a:prstDash val="solid"/>
+            </a:ln>
+          </p:spPr>
+        </p:sp>
+        <p:sp>
+          <p:nvSpPr>
+            <p:cNvPr id="10" name="Text 8"/>
+            <p:cNvSpPr/>
+            <p:nvPr/>
+          </p:nvSpPr>
+          <p:spPr>
+            <a:xfrm>
+              <a:off x="994" y="2606"/>
+              <a:ext cx="3600" cy="1152"/>
+            </a:xfrm>
+            <a:prstGeom prst="rect">
+              <a:avLst/>
+            </a:prstGeom>
+            <a:noFill/>
+          </p:spPr>
+          <p:txBody>
+            <a:bodyPr wrap="square" rtlCol="0" anchor="ctr"/>
+            <a:lstStyle/>
+            <a:p>
+              <a:pPr marL="0" indent="0">
+                <a:lnSpc>
+                  <a:spcPct val="120000"/>
+                </a:lnSpc>
+                <a:buNone/>
+              </a:pPr>
+              <a:r>
+                <a:rPr lang="en-US" sz="1400" dirty="0">
+                  <a:solidFill>
+                    <a:srgbClr val="334155"/>
+                  </a:solidFill>
+                  <a:latin typeface="Calibri" panose="020F0502020204030204" pitchFamily="34" charset="0"/>
+                  <a:ea typeface="Calibri" panose="020F0502020204030204" pitchFamily="34" charset="-122"/>
+                  <a:cs typeface="Calibri" panose="020F0502020204030204" pitchFamily="34" charset="-120"/>
+                </a:rPr>
+                <a:t>Banks lose 20–30% revenue annually from customer churn</a:t>
+              </a:r>
+              <a:endParaRPr lang="en-US" sz="1400" dirty="0">
                 <a:solidFill>
                   <a:srgbClr val="334155"/>
                 </a:solidFill>
                 <a:latin typeface="Calibri" panose="020F0502020204030204" pitchFamily="34" charset="0"/>
                 <a:ea typeface="Calibri" panose="020F0502020204030204" pitchFamily="34" charset="-122"/>
                 <a:cs typeface="Calibri" panose="020F0502020204030204" pitchFamily="34" charset="-120"/>
-              </a:rPr>
-              <a:t>Banks lose 20–30% revenue annually from customer churn</a:t>
-            </a:r>
-            <a:endParaRPr lang="en-US" sz="1150" dirty="0"/>
-          </a:p>
-        </p:txBody>
-      </p:sp>
-      <p:sp>
-        <p:nvSpPr>
-          <p:cNvPr id="11" name="Shape 9"/>
-          <p:cNvSpPr/>
-          <p:nvPr/>
-        </p:nvSpPr>
-        <p:spPr>
-          <a:xfrm>
-            <a:off x="365760" y="2487168"/>
-            <a:ext cx="201168" cy="201168"/>
-          </a:xfrm>
-          <a:prstGeom prst="ellipse">
-            <a:avLst/>
-          </a:prstGeom>
-          <a:solidFill>
-            <a:srgbClr val="EF4444"/>
-          </a:solidFill>
-          <a:ln w="12700">
+              </a:endParaRPr>
+            </a:p>
+          </p:txBody>
+        </p:sp>
+        <p:sp>
+          <p:nvSpPr>
+            <p:cNvPr id="11" name="Shape 9"/>
+            <p:cNvSpPr/>
+            <p:nvPr/>
+          </p:nvSpPr>
+          <p:spPr>
+            <a:xfrm>
+              <a:off x="576" y="4109"/>
+              <a:ext cx="317" cy="317"/>
+            </a:xfrm>
+            <a:prstGeom prst="ellipse">
+              <a:avLst/>
+            </a:prstGeom>
             <a:solidFill>
               <a:srgbClr val="EF4444"/>
             </a:solidFill>
-            <a:prstDash val="solid"/>
-          </a:ln>
-        </p:spPr>
-      </p:sp>
-      <p:sp>
-        <p:nvSpPr>
-          <p:cNvPr id="12" name="Text 10"/>
-          <p:cNvSpPr/>
-          <p:nvPr/>
-        </p:nvSpPr>
-        <p:spPr>
-          <a:xfrm>
-            <a:off x="630936" y="2318004"/>
-            <a:ext cx="2286000" cy="731520"/>
-          </a:xfrm>
-          <a:prstGeom prst="rect">
-            <a:avLst/>
-          </a:prstGeom>
-          <a:noFill/>
-        </p:spPr>
-        <p:txBody>
-          <a:bodyPr wrap="square" rtlCol="0" anchor="ctr"/>
-          <a:lstStyle/>
-          <a:p>
-            <a:pPr marL="0" indent="0">
-              <a:lnSpc>
-                <a:spcPct val="120000"/>
-              </a:lnSpc>
-              <a:buNone/>
-            </a:pPr>
-            <a:r>
-              <a:rPr lang="en-US" sz="1150" dirty="0">
+            <a:ln w="12700">
+              <a:solidFill>
+                <a:srgbClr val="EF4444"/>
+              </a:solidFill>
+              <a:prstDash val="solid"/>
+            </a:ln>
+          </p:spPr>
+        </p:sp>
+        <p:sp>
+          <p:nvSpPr>
+            <p:cNvPr id="12" name="Text 10"/>
+            <p:cNvSpPr/>
+            <p:nvPr/>
+          </p:nvSpPr>
+          <p:spPr>
+            <a:xfrm>
+              <a:off x="994" y="3974"/>
+              <a:ext cx="3600" cy="1152"/>
+            </a:xfrm>
+            <a:prstGeom prst="rect">
+              <a:avLst/>
+            </a:prstGeom>
+            <a:noFill/>
+          </p:spPr>
+          <p:txBody>
+            <a:bodyPr wrap="square" rtlCol="0" anchor="ctr"/>
+            <a:lstStyle/>
+            <a:p>
+              <a:pPr marL="0" indent="0">
+                <a:lnSpc>
+                  <a:spcPct val="120000"/>
+                </a:lnSpc>
+                <a:buNone/>
+              </a:pPr>
+              <a:r>
+                <a:rPr lang="en-US" sz="1400" dirty="0">
+                  <a:solidFill>
+                    <a:srgbClr val="334155"/>
+                  </a:solidFill>
+                  <a:latin typeface="Calibri" panose="020F0502020204030204" pitchFamily="34" charset="0"/>
+                  <a:ea typeface="Calibri" panose="020F0502020204030204" pitchFamily="34" charset="-122"/>
+                  <a:cs typeface="Calibri" panose="020F0502020204030204" pitchFamily="34" charset="-120"/>
+                </a:rPr>
+                <a:t>Acquiring new customers costs 5× more than retaining existing ones</a:t>
+              </a:r>
+              <a:endParaRPr lang="en-US" sz="1400" dirty="0">
                 <a:solidFill>
                   <a:srgbClr val="334155"/>
                 </a:solidFill>
                 <a:latin typeface="Calibri" panose="020F0502020204030204" pitchFamily="34" charset="0"/>
                 <a:ea typeface="Calibri" panose="020F0502020204030204" pitchFamily="34" charset="-122"/>
                 <a:cs typeface="Calibri" panose="020F0502020204030204" pitchFamily="34" charset="-120"/>
-              </a:rPr>
-              <a:t>Acquiring new customers costs 5× more than retaining existing ones</a:t>
-            </a:r>
-            <a:endParaRPr lang="en-US" sz="1150" dirty="0"/>
-          </a:p>
-        </p:txBody>
-      </p:sp>
-      <p:sp>
-        <p:nvSpPr>
-          <p:cNvPr id="13" name="Shape 11"/>
-          <p:cNvSpPr/>
-          <p:nvPr/>
-        </p:nvSpPr>
-        <p:spPr>
-          <a:xfrm>
-            <a:off x="365760" y="3310128"/>
-            <a:ext cx="201168" cy="201168"/>
-          </a:xfrm>
-          <a:prstGeom prst="ellipse">
-            <a:avLst/>
-          </a:prstGeom>
-          <a:solidFill>
-            <a:srgbClr val="EF4444"/>
-          </a:solidFill>
-          <a:ln w="12700">
+              </a:endParaRPr>
+            </a:p>
+          </p:txBody>
+        </p:sp>
+        <p:sp>
+          <p:nvSpPr>
+            <p:cNvPr id="13" name="Shape 11"/>
+            <p:cNvSpPr/>
+            <p:nvPr/>
+          </p:nvSpPr>
+          <p:spPr>
+            <a:xfrm>
+              <a:off x="576" y="5417"/>
+              <a:ext cx="317" cy="317"/>
+            </a:xfrm>
+            <a:prstGeom prst="ellipse">
+              <a:avLst/>
+            </a:prstGeom>
             <a:solidFill>
               <a:srgbClr val="EF4444"/>
             </a:solidFill>
-            <a:prstDash val="solid"/>
-          </a:ln>
-        </p:spPr>
-      </p:sp>
-      <p:sp>
-        <p:nvSpPr>
-          <p:cNvPr id="14" name="Text 12"/>
-          <p:cNvSpPr/>
-          <p:nvPr/>
-        </p:nvSpPr>
-        <p:spPr>
-          <a:xfrm>
-            <a:off x="630936" y="3156204"/>
-            <a:ext cx="2286000" cy="731520"/>
-          </a:xfrm>
-          <a:prstGeom prst="rect">
-            <a:avLst/>
-          </a:prstGeom>
-          <a:noFill/>
-        </p:spPr>
-        <p:txBody>
-          <a:bodyPr wrap="square" rtlCol="0" anchor="ctr"/>
-          <a:lstStyle/>
-          <a:p>
-            <a:pPr marL="0" indent="0">
-              <a:lnSpc>
-                <a:spcPct val="120000"/>
-              </a:lnSpc>
-              <a:buNone/>
-            </a:pPr>
-            <a:r>
-              <a:rPr lang="en-US" sz="1150" dirty="0">
+            <a:ln w="12700">
+              <a:solidFill>
+                <a:srgbClr val="EF4444"/>
+              </a:solidFill>
+              <a:prstDash val="solid"/>
+            </a:ln>
+          </p:spPr>
+        </p:sp>
+        <p:sp>
+          <p:nvSpPr>
+            <p:cNvPr id="14" name="Text 12"/>
+            <p:cNvSpPr/>
+            <p:nvPr/>
+          </p:nvSpPr>
+          <p:spPr>
+            <a:xfrm>
+              <a:off x="994" y="5390"/>
+              <a:ext cx="3600" cy="1152"/>
+            </a:xfrm>
+            <a:prstGeom prst="rect">
+              <a:avLst/>
+            </a:prstGeom>
+            <a:noFill/>
+          </p:spPr>
+          <p:txBody>
+            <a:bodyPr wrap="square" rtlCol="0" anchor="ctr"/>
+            <a:lstStyle/>
+            <a:p>
+              <a:pPr marL="0" indent="0">
+                <a:lnSpc>
+                  <a:spcPct val="120000"/>
+                </a:lnSpc>
+                <a:buNone/>
+              </a:pPr>
+              <a:r>
+                <a:rPr lang="en-US" sz="1400" dirty="0">
+                  <a:solidFill>
+                    <a:srgbClr val="334155"/>
+                  </a:solidFill>
+                  <a:latin typeface="Calibri" panose="020F0502020204030204" pitchFamily="34" charset="0"/>
+                  <a:ea typeface="Calibri" panose="020F0502020204030204" pitchFamily="34" charset="-122"/>
+                  <a:cs typeface="Calibri" panose="020F0502020204030204" pitchFamily="34" charset="-120"/>
+                </a:rPr>
+                <a:t>Early detection enables targeted, cost-effective intervention</a:t>
+              </a:r>
+              <a:endParaRPr lang="en-US" sz="1400" dirty="0">
                 <a:solidFill>
                   <a:srgbClr val="334155"/>
                 </a:solidFill>
                 <a:latin typeface="Calibri" panose="020F0502020204030204" pitchFamily="34" charset="0"/>
                 <a:ea typeface="Calibri" panose="020F0502020204030204" pitchFamily="34" charset="-122"/>
                 <a:cs typeface="Calibri" panose="020F0502020204030204" pitchFamily="34" charset="-120"/>
-              </a:rPr>
-              <a:t>Early detection enables targeted, cost-effective intervention</a:t>
-            </a:r>
-            <a:endParaRPr lang="en-US" sz="1150" dirty="0"/>
-          </a:p>
-        </p:txBody>
-      </p:sp>
-      <p:sp>
-        <p:nvSpPr>
-          <p:cNvPr id="15" name="Shape 13"/>
-          <p:cNvSpPr/>
-          <p:nvPr/>
-        </p:nvSpPr>
-        <p:spPr>
-          <a:xfrm>
-            <a:off x="3154680" y="1005840"/>
-            <a:ext cx="2788920" cy="3566160"/>
-          </a:xfrm>
-          <a:prstGeom prst="rect">
-            <a:avLst/>
-          </a:prstGeom>
-          <a:solidFill>
-            <a:srgbClr val="FFFFFF"/>
-          </a:solidFill>
-          <a:ln w="12700">
+              </a:endParaRPr>
+            </a:p>
+          </p:txBody>
+        </p:sp>
+        <p:sp>
+          <p:nvSpPr>
+            <p:cNvPr id="15" name="Shape 13"/>
+            <p:cNvSpPr/>
+            <p:nvPr/>
+          </p:nvSpPr>
+          <p:spPr>
+            <a:xfrm>
+              <a:off x="4968" y="1584"/>
+              <a:ext cx="4392" cy="5616"/>
+            </a:xfrm>
+            <a:prstGeom prst="rect">
+              <a:avLst/>
+            </a:prstGeom>
             <a:solidFill>
-              <a:srgbClr val="E2E8F0"/>
+              <a:srgbClr val="FFFFFF"/>
             </a:solidFill>
-            <a:prstDash val="solid"/>
-          </a:ln>
-          <a:effectLst>
-            <a:outerShdw blurRad="101600" dist="25400" dir="8100000" algn="bl" rotWithShape="0">
-              <a:srgbClr val="000000">
-                <a:alpha val="10000"/>
-              </a:srgbClr>
-            </a:outerShdw>
-          </a:effectLst>
-        </p:spPr>
-      </p:sp>
-      <p:sp>
-        <p:nvSpPr>
-          <p:cNvPr id="16" name="Shape 14"/>
-          <p:cNvSpPr/>
-          <p:nvPr/>
-        </p:nvSpPr>
-        <p:spPr>
-          <a:xfrm>
-            <a:off x="3154680" y="1005840"/>
-            <a:ext cx="2788920" cy="54864"/>
-          </a:xfrm>
-          <a:prstGeom prst="rect">
-            <a:avLst/>
-          </a:prstGeom>
-          <a:solidFill>
-            <a:srgbClr val="F59E0B"/>
-          </a:solidFill>
-          <a:ln w="12700">
+            <a:ln w="12700">
+              <a:solidFill>
+                <a:srgbClr val="E2E8F0"/>
+              </a:solidFill>
+              <a:prstDash val="solid"/>
+            </a:ln>
+            <a:effectLst>
+              <a:outerShdw blurRad="101600" dist="25400" dir="8100000" algn="bl" rotWithShape="0">
+                <a:srgbClr val="000000">
+                  <a:alpha val="10000"/>
+                </a:srgbClr>
+              </a:outerShdw>
+            </a:effectLst>
+          </p:spPr>
+        </p:sp>
+        <p:sp>
+          <p:nvSpPr>
+            <p:cNvPr id="16" name="Shape 14"/>
+            <p:cNvSpPr/>
+            <p:nvPr/>
+          </p:nvSpPr>
+          <p:spPr>
+            <a:xfrm>
+              <a:off x="4968" y="1584"/>
+              <a:ext cx="4392" cy="86"/>
+            </a:xfrm>
+            <a:prstGeom prst="rect">
+              <a:avLst/>
+            </a:prstGeom>
             <a:solidFill>
               <a:srgbClr val="F59E0B"/>
             </a:solidFill>
-            <a:prstDash val="solid"/>
-          </a:ln>
-        </p:spPr>
-      </p:sp>
-      <p:sp>
-        <p:nvSpPr>
-          <p:cNvPr id="17" name="Text 15"/>
-          <p:cNvSpPr/>
-          <p:nvPr/>
-        </p:nvSpPr>
-        <p:spPr>
-          <a:xfrm>
-            <a:off x="3291840" y="1115568"/>
-            <a:ext cx="2514600" cy="411480"/>
-          </a:xfrm>
-          <a:prstGeom prst="rect">
-            <a:avLst/>
-          </a:prstGeom>
-          <a:noFill/>
-        </p:spPr>
-        <p:txBody>
-          <a:bodyPr wrap="square" rtlCol="0" anchor="ctr"/>
-          <a:lstStyle/>
-          <a:p>
-            <a:pPr marL="0" indent="0">
-              <a:buNone/>
-            </a:pPr>
-            <a:r>
-              <a:rPr lang="en-US" sz="1300" b="1" dirty="0">
+            <a:ln w="12700">
+              <a:solidFill>
+                <a:srgbClr val="F59E0B"/>
+              </a:solidFill>
+              <a:prstDash val="solid"/>
+            </a:ln>
+          </p:spPr>
+        </p:sp>
+        <p:sp>
+          <p:nvSpPr>
+            <p:cNvPr id="17" name="Text 15"/>
+            <p:cNvSpPr/>
+            <p:nvPr/>
+          </p:nvSpPr>
+          <p:spPr>
+            <a:xfrm>
+              <a:off x="5184" y="1757"/>
+              <a:ext cx="3960" cy="648"/>
+            </a:xfrm>
+            <a:prstGeom prst="rect">
+              <a:avLst/>
+            </a:prstGeom>
+            <a:noFill/>
+          </p:spPr>
+          <p:txBody>
+            <a:bodyPr wrap="square" rtlCol="0" anchor="ctr"/>
+            <a:lstStyle/>
+            <a:p>
+              <a:pPr marL="0" indent="0">
+                <a:buNone/>
+              </a:pPr>
+              <a:r>
+                <a:rPr lang="en-US" sz="1400" b="1" dirty="0">
+                  <a:solidFill>
+                    <a:srgbClr val="0F1B2D"/>
+                  </a:solidFill>
+                  <a:latin typeface="Calibri" panose="020F0502020204030204" pitchFamily="34" charset="0"/>
+                  <a:ea typeface="Calibri" panose="020F0502020204030204" pitchFamily="34" charset="-122"/>
+                  <a:cs typeface="Calibri" panose="020F0502020204030204" pitchFamily="34" charset="-120"/>
+                </a:rPr>
+                <a:t>Why Churn Prediction Matters</a:t>
+              </a:r>
+              <a:endParaRPr lang="en-US" sz="1400" b="1" dirty="0">
                 <a:solidFill>
                   <a:srgbClr val="0F1B2D"/>
                 </a:solidFill>
                 <a:latin typeface="Calibri" panose="020F0502020204030204" pitchFamily="34" charset="0"/>
                 <a:ea typeface="Calibri" panose="020F0502020204030204" pitchFamily="34" charset="-122"/>
                 <a:cs typeface="Calibri" panose="020F0502020204030204" pitchFamily="34" charset="-120"/>
-              </a:rPr>
-              <a:t>Why Churn Prediction Matters</a:t>
-            </a:r>
-            <a:endParaRPr lang="en-US" sz="1300" dirty="0"/>
-          </a:p>
-        </p:txBody>
-      </p:sp>
-      <p:sp>
-        <p:nvSpPr>
-          <p:cNvPr id="18" name="Shape 16"/>
-          <p:cNvSpPr/>
-          <p:nvPr/>
-        </p:nvSpPr>
-        <p:spPr>
-          <a:xfrm>
-            <a:off x="3291840" y="1664208"/>
-            <a:ext cx="201168" cy="201168"/>
-          </a:xfrm>
-          <a:prstGeom prst="ellipse">
-            <a:avLst/>
-          </a:prstGeom>
-          <a:solidFill>
-            <a:srgbClr val="F59E0B"/>
-          </a:solidFill>
-          <a:ln w="12700">
+              </a:endParaRPr>
+            </a:p>
+          </p:txBody>
+        </p:sp>
+        <p:sp>
+          <p:nvSpPr>
+            <p:cNvPr id="18" name="Shape 16"/>
+            <p:cNvSpPr/>
+            <p:nvPr/>
+          </p:nvSpPr>
+          <p:spPr>
+            <a:xfrm>
+              <a:off x="5184" y="2621"/>
+              <a:ext cx="317" cy="317"/>
+            </a:xfrm>
+            <a:prstGeom prst="ellipse">
+              <a:avLst/>
+            </a:prstGeom>
             <a:solidFill>
               <a:srgbClr val="F59E0B"/>
             </a:solidFill>
-            <a:prstDash val="solid"/>
-          </a:ln>
-        </p:spPr>
-      </p:sp>
-      <p:sp>
-        <p:nvSpPr>
-          <p:cNvPr id="19" name="Text 17"/>
-          <p:cNvSpPr/>
-          <p:nvPr/>
-        </p:nvSpPr>
-        <p:spPr>
-          <a:xfrm>
-            <a:off x="3557016" y="1495044"/>
-            <a:ext cx="2286000" cy="731520"/>
-          </a:xfrm>
-          <a:prstGeom prst="rect">
-            <a:avLst/>
-          </a:prstGeom>
-          <a:noFill/>
-        </p:spPr>
-        <p:txBody>
-          <a:bodyPr wrap="square" rtlCol="0" anchor="ctr"/>
-          <a:lstStyle/>
-          <a:p>
-            <a:pPr marL="0" indent="0">
-              <a:lnSpc>
-                <a:spcPct val="120000"/>
-              </a:lnSpc>
-              <a:buNone/>
-            </a:pPr>
-            <a:r>
-              <a:rPr lang="en-US" sz="1150" dirty="0">
+            <a:ln w="12700">
+              <a:solidFill>
+                <a:srgbClr val="F59E0B"/>
+              </a:solidFill>
+              <a:prstDash val="solid"/>
+            </a:ln>
+          </p:spPr>
+        </p:sp>
+        <p:sp>
+          <p:nvSpPr>
+            <p:cNvPr id="19" name="Text 17"/>
+            <p:cNvSpPr/>
+            <p:nvPr/>
+          </p:nvSpPr>
+          <p:spPr>
+            <a:xfrm>
+              <a:off x="5602" y="2354"/>
+              <a:ext cx="3600" cy="1152"/>
+            </a:xfrm>
+            <a:prstGeom prst="rect">
+              <a:avLst/>
+            </a:prstGeom>
+            <a:noFill/>
+          </p:spPr>
+          <p:txBody>
+            <a:bodyPr wrap="square" rtlCol="0" anchor="ctr"/>
+            <a:lstStyle/>
+            <a:p>
+              <a:pPr marL="0" indent="0">
+                <a:lnSpc>
+                  <a:spcPct val="120000"/>
+                </a:lnSpc>
+                <a:buNone/>
+              </a:pPr>
+              <a:r>
+                <a:rPr lang="en-US" sz="1400" dirty="0">
+                  <a:solidFill>
+                    <a:srgbClr val="334155"/>
+                  </a:solidFill>
+                  <a:latin typeface="Calibri" panose="020F0502020204030204" pitchFamily="34" charset="0"/>
+                  <a:ea typeface="Calibri" panose="020F0502020204030204" pitchFamily="34" charset="-122"/>
+                  <a:cs typeface="Calibri" panose="020F0502020204030204" pitchFamily="34" charset="-120"/>
+                </a:rPr>
+                <a:t>Each missed churner (FN) costs the bank ₹40,000</a:t>
+              </a:r>
+              <a:endParaRPr lang="en-US" sz="1400" dirty="0">
                 <a:solidFill>
                   <a:srgbClr val="334155"/>
                 </a:solidFill>
                 <a:latin typeface="Calibri" panose="020F0502020204030204" pitchFamily="34" charset="0"/>
                 <a:ea typeface="Calibri" panose="020F0502020204030204" pitchFamily="34" charset="-122"/>
                 <a:cs typeface="Calibri" panose="020F0502020204030204" pitchFamily="34" charset="-120"/>
-              </a:rPr>
-              <a:t>Each missed churner (FN) costs the bank ₹40,000</a:t>
-            </a:r>
-            <a:endParaRPr lang="en-US" sz="1150" dirty="0"/>
-          </a:p>
-        </p:txBody>
-      </p:sp>
-      <p:sp>
-        <p:nvSpPr>
-          <p:cNvPr id="20" name="Shape 18"/>
-          <p:cNvSpPr/>
-          <p:nvPr/>
-        </p:nvSpPr>
-        <p:spPr>
-          <a:xfrm>
-            <a:off x="3291840" y="2487168"/>
-            <a:ext cx="201168" cy="201168"/>
-          </a:xfrm>
-          <a:prstGeom prst="ellipse">
-            <a:avLst/>
-          </a:prstGeom>
-          <a:solidFill>
-            <a:srgbClr val="F59E0B"/>
-          </a:solidFill>
-          <a:ln w="12700">
+              </a:endParaRPr>
+            </a:p>
+          </p:txBody>
+        </p:sp>
+        <p:sp>
+          <p:nvSpPr>
+            <p:cNvPr id="20" name="Shape 18"/>
+            <p:cNvSpPr/>
+            <p:nvPr/>
+          </p:nvSpPr>
+          <p:spPr>
+            <a:xfrm>
+              <a:off x="5184" y="3917"/>
+              <a:ext cx="317" cy="317"/>
+            </a:xfrm>
+            <a:prstGeom prst="ellipse">
+              <a:avLst/>
+            </a:prstGeom>
             <a:solidFill>
               <a:srgbClr val="F59E0B"/>
             </a:solidFill>
-            <a:prstDash val="solid"/>
-          </a:ln>
-        </p:spPr>
-      </p:sp>
-      <p:sp>
-        <p:nvSpPr>
-          <p:cNvPr id="21" name="Text 19"/>
-          <p:cNvSpPr/>
-          <p:nvPr/>
-        </p:nvSpPr>
-        <p:spPr>
-          <a:xfrm>
-            <a:off x="3557016" y="2318004"/>
-            <a:ext cx="2286000" cy="731520"/>
-          </a:xfrm>
-          <a:prstGeom prst="rect">
-            <a:avLst/>
-          </a:prstGeom>
-          <a:noFill/>
-        </p:spPr>
-        <p:txBody>
-          <a:bodyPr wrap="square" rtlCol="0" anchor="ctr"/>
-          <a:lstStyle/>
-          <a:p>
-            <a:pPr marL="0" indent="0">
-              <a:lnSpc>
-                <a:spcPct val="120000"/>
-              </a:lnSpc>
-              <a:buNone/>
-            </a:pPr>
-            <a:r>
-              <a:rPr lang="en-US" sz="1150" dirty="0">
+            <a:ln w="12700">
+              <a:solidFill>
+                <a:srgbClr val="F59E0B"/>
+              </a:solidFill>
+              <a:prstDash val="solid"/>
+            </a:ln>
+          </p:spPr>
+        </p:sp>
+        <p:sp>
+          <p:nvSpPr>
+            <p:cNvPr id="21" name="Text 19"/>
+            <p:cNvSpPr/>
+            <p:nvPr/>
+          </p:nvSpPr>
+          <p:spPr>
+            <a:xfrm>
+              <a:off x="5602" y="3746"/>
+              <a:ext cx="3600" cy="1152"/>
+            </a:xfrm>
+            <a:prstGeom prst="rect">
+              <a:avLst/>
+            </a:prstGeom>
+            <a:noFill/>
+          </p:spPr>
+          <p:txBody>
+            <a:bodyPr wrap="square" rtlCol="0" anchor="ctr"/>
+            <a:lstStyle/>
+            <a:p>
+              <a:pPr marL="0" indent="0">
+                <a:lnSpc>
+                  <a:spcPct val="120000"/>
+                </a:lnSpc>
+                <a:buNone/>
+              </a:pPr>
+              <a:r>
+                <a:rPr lang="en-US" sz="1400" dirty="0">
+                  <a:solidFill>
+                    <a:srgbClr val="334155"/>
+                  </a:solidFill>
+                  <a:latin typeface="Calibri" panose="020F0502020204030204" pitchFamily="34" charset="0"/>
+                  <a:ea typeface="Calibri" panose="020F0502020204030204" pitchFamily="34" charset="-122"/>
+                  <a:cs typeface="Calibri" panose="020F0502020204030204" pitchFamily="34" charset="-120"/>
+                </a:rPr>
+                <a:t>Wrongly flagging loyal customers (FP) costs ₹500 per case</a:t>
+              </a:r>
+              <a:endParaRPr lang="en-US" sz="1400" dirty="0">
                 <a:solidFill>
                   <a:srgbClr val="334155"/>
                 </a:solidFill>
                 <a:latin typeface="Calibri" panose="020F0502020204030204" pitchFamily="34" charset="0"/>
                 <a:ea typeface="Calibri" panose="020F0502020204030204" pitchFamily="34" charset="-122"/>
                 <a:cs typeface="Calibri" panose="020F0502020204030204" pitchFamily="34" charset="-120"/>
-              </a:rPr>
-              <a:t>Wrongly flagging loyal customers (FP) costs ₹500 per case</a:t>
-            </a:r>
-            <a:endParaRPr lang="en-US" sz="1150" dirty="0"/>
-          </a:p>
-        </p:txBody>
-      </p:sp>
-      <p:sp>
-        <p:nvSpPr>
-          <p:cNvPr id="22" name="Shape 20"/>
-          <p:cNvSpPr/>
-          <p:nvPr/>
-        </p:nvSpPr>
-        <p:spPr>
-          <a:xfrm>
-            <a:off x="3291840" y="3310128"/>
-            <a:ext cx="201168" cy="201168"/>
-          </a:xfrm>
-          <a:prstGeom prst="ellipse">
-            <a:avLst/>
-          </a:prstGeom>
-          <a:solidFill>
-            <a:srgbClr val="F59E0B"/>
-          </a:solidFill>
-          <a:ln w="12700">
+              </a:endParaRPr>
+            </a:p>
+          </p:txBody>
+        </p:sp>
+        <p:sp>
+          <p:nvSpPr>
+            <p:cNvPr id="22" name="Shape 20"/>
+            <p:cNvSpPr/>
+            <p:nvPr/>
+          </p:nvSpPr>
+          <p:spPr>
+            <a:xfrm>
+              <a:off x="5184" y="5309"/>
+              <a:ext cx="317" cy="317"/>
+            </a:xfrm>
+            <a:prstGeom prst="ellipse">
+              <a:avLst/>
+            </a:prstGeom>
             <a:solidFill>
               <a:srgbClr val="F59E0B"/>
             </a:solidFill>
-            <a:prstDash val="solid"/>
-          </a:ln>
-        </p:spPr>
-      </p:sp>
-      <p:sp>
-        <p:nvSpPr>
-          <p:cNvPr id="23" name="Text 21"/>
-          <p:cNvSpPr/>
-          <p:nvPr/>
-        </p:nvSpPr>
-        <p:spPr>
-          <a:xfrm>
-            <a:off x="3557016" y="3156204"/>
-            <a:ext cx="2286000" cy="731520"/>
-          </a:xfrm>
-          <a:prstGeom prst="rect">
-            <a:avLst/>
-          </a:prstGeom>
-          <a:noFill/>
-        </p:spPr>
-        <p:txBody>
-          <a:bodyPr wrap="square" rtlCol="0" anchor="ctr"/>
-          <a:lstStyle/>
-          <a:p>
-            <a:pPr marL="0" indent="0">
-              <a:lnSpc>
-                <a:spcPct val="120000"/>
-              </a:lnSpc>
-              <a:buNone/>
-            </a:pPr>
-            <a:r>
-              <a:rPr lang="en-US" sz="1150" dirty="0">
+            <a:ln w="12700">
+              <a:solidFill>
+                <a:srgbClr val="F59E0B"/>
+              </a:solidFill>
+              <a:prstDash val="solid"/>
+            </a:ln>
+          </p:spPr>
+        </p:sp>
+        <p:sp>
+          <p:nvSpPr>
+            <p:cNvPr id="23" name="Text 21"/>
+            <p:cNvSpPr/>
+            <p:nvPr/>
+          </p:nvSpPr>
+          <p:spPr>
+            <a:xfrm>
+              <a:off x="5602" y="5234"/>
+              <a:ext cx="3600" cy="1152"/>
+            </a:xfrm>
+            <a:prstGeom prst="rect">
+              <a:avLst/>
+            </a:prstGeom>
+            <a:noFill/>
+          </p:spPr>
+          <p:txBody>
+            <a:bodyPr wrap="square" rtlCol="0" anchor="ctr"/>
+            <a:lstStyle/>
+            <a:p>
+              <a:pPr marL="0" indent="0">
+                <a:lnSpc>
+                  <a:spcPct val="120000"/>
+                </a:lnSpc>
+                <a:buNone/>
+              </a:pPr>
+              <a:r>
+                <a:rPr lang="en-US" sz="1400" dirty="0">
+                  <a:solidFill>
+                    <a:srgbClr val="334155"/>
+                  </a:solidFill>
+                  <a:latin typeface="Calibri" panose="020F0502020204030204" pitchFamily="34" charset="0"/>
+                  <a:ea typeface="Calibri" panose="020F0502020204030204" pitchFamily="34" charset="-122"/>
+                  <a:cs typeface="Calibri" panose="020F0502020204030204" pitchFamily="34" charset="-120"/>
+                </a:rPr>
+                <a:t>A data-driven model prioritizes outreach &amp; minimizes spend</a:t>
+              </a:r>
+              <a:endParaRPr lang="en-US" sz="1400" dirty="0">
                 <a:solidFill>
                   <a:srgbClr val="334155"/>
                 </a:solidFill>
                 <a:latin typeface="Calibri" panose="020F0502020204030204" pitchFamily="34" charset="0"/>
                 <a:ea typeface="Calibri" panose="020F0502020204030204" pitchFamily="34" charset="-122"/>
                 <a:cs typeface="Calibri" panose="020F0502020204030204" pitchFamily="34" charset="-120"/>
-              </a:rPr>
-              <a:t>A data-driven model prioritizes outreach &amp; minimizes spend</a:t>
-            </a:r>
-            <a:endParaRPr lang="en-US" sz="1150" dirty="0"/>
-          </a:p>
-        </p:txBody>
-      </p:sp>
-      <p:sp>
-        <p:nvSpPr>
-          <p:cNvPr id="24" name="Shape 22"/>
-          <p:cNvSpPr/>
-          <p:nvPr/>
-        </p:nvSpPr>
-        <p:spPr>
-          <a:xfrm>
-            <a:off x="6080760" y="1005840"/>
-            <a:ext cx="2788920" cy="3566160"/>
-          </a:xfrm>
-          <a:prstGeom prst="rect">
-            <a:avLst/>
-          </a:prstGeom>
-          <a:solidFill>
-            <a:srgbClr val="FFFFFF"/>
-          </a:solidFill>
-          <a:ln w="12700">
+              </a:endParaRPr>
+            </a:p>
+          </p:txBody>
+        </p:sp>
+        <p:sp>
+          <p:nvSpPr>
+            <p:cNvPr id="24" name="Shape 22"/>
+            <p:cNvSpPr/>
+            <p:nvPr/>
+          </p:nvSpPr>
+          <p:spPr>
+            <a:xfrm>
+              <a:off x="9576" y="1584"/>
+              <a:ext cx="4392" cy="5616"/>
+            </a:xfrm>
+            <a:prstGeom prst="rect">
+              <a:avLst/>
+            </a:prstGeom>
             <a:solidFill>
-              <a:srgbClr val="E2E8F0"/>
+              <a:srgbClr val="FFFFFF"/>
             </a:solidFill>
-            <a:prstDash val="solid"/>
-          </a:ln>
-          <a:effectLst>
-            <a:outerShdw blurRad="101600" dist="25400" dir="8100000" algn="bl" rotWithShape="0">
-              <a:srgbClr val="000000">
-                <a:alpha val="10000"/>
-              </a:srgbClr>
-            </a:outerShdw>
-          </a:effectLst>
-        </p:spPr>
-      </p:sp>
-      <p:sp>
-        <p:nvSpPr>
-          <p:cNvPr id="25" name="Shape 23"/>
-          <p:cNvSpPr/>
-          <p:nvPr/>
-        </p:nvSpPr>
-        <p:spPr>
-          <a:xfrm>
-            <a:off x="6080760" y="1005840"/>
-            <a:ext cx="2788920" cy="54864"/>
-          </a:xfrm>
-          <a:prstGeom prst="rect">
-            <a:avLst/>
-          </a:prstGeom>
-          <a:solidFill>
-            <a:srgbClr val="0D9488"/>
-          </a:solidFill>
-          <a:ln w="12700">
+            <a:ln w="12700">
+              <a:solidFill>
+                <a:srgbClr val="E2E8F0"/>
+              </a:solidFill>
+              <a:prstDash val="solid"/>
+            </a:ln>
+            <a:effectLst>
+              <a:outerShdw blurRad="101600" dist="25400" dir="8100000" algn="bl" rotWithShape="0">
+                <a:srgbClr val="000000">
+                  <a:alpha val="10000"/>
+                </a:srgbClr>
+              </a:outerShdw>
+            </a:effectLst>
+          </p:spPr>
+        </p:sp>
+        <p:sp>
+          <p:nvSpPr>
+            <p:cNvPr id="25" name="Shape 23"/>
+            <p:cNvSpPr/>
+            <p:nvPr/>
+          </p:nvSpPr>
+          <p:spPr>
+            <a:xfrm>
+              <a:off x="9576" y="1584"/>
+              <a:ext cx="4392" cy="86"/>
+            </a:xfrm>
+            <a:prstGeom prst="rect">
+              <a:avLst/>
+            </a:prstGeom>
             <a:solidFill>
               <a:srgbClr val="0D9488"/>
             </a:solidFill>
-            <a:prstDash val="solid"/>
-          </a:ln>
-        </p:spPr>
-      </p:sp>
-      <p:sp>
-        <p:nvSpPr>
-          <p:cNvPr id="26" name="Text 24"/>
-          <p:cNvSpPr/>
-          <p:nvPr/>
-        </p:nvSpPr>
-        <p:spPr>
-          <a:xfrm>
-            <a:off x="6217920" y="1115568"/>
-            <a:ext cx="2514600" cy="411480"/>
-          </a:xfrm>
-          <a:prstGeom prst="rect">
-            <a:avLst/>
-          </a:prstGeom>
-          <a:noFill/>
-        </p:spPr>
-        <p:txBody>
-          <a:bodyPr wrap="square" rtlCol="0" anchor="ctr"/>
-          <a:lstStyle/>
-          <a:p>
-            <a:pPr marL="0" indent="0">
-              <a:buNone/>
-            </a:pPr>
-            <a:r>
-              <a:rPr lang="en-US" sz="1300" b="1" dirty="0">
+            <a:ln w="12700">
+              <a:solidFill>
+                <a:srgbClr val="0D9488"/>
+              </a:solidFill>
+              <a:prstDash val="solid"/>
+            </a:ln>
+          </p:spPr>
+        </p:sp>
+        <p:sp>
+          <p:nvSpPr>
+            <p:cNvPr id="26" name="Text 24"/>
+            <p:cNvSpPr/>
+            <p:nvPr/>
+          </p:nvSpPr>
+          <p:spPr>
+            <a:xfrm>
+              <a:off x="9792" y="1757"/>
+              <a:ext cx="3960" cy="648"/>
+            </a:xfrm>
+            <a:prstGeom prst="rect">
+              <a:avLst/>
+            </a:prstGeom>
+            <a:noFill/>
+          </p:spPr>
+          <p:txBody>
+            <a:bodyPr wrap="square" rtlCol="0" anchor="ctr"/>
+            <a:lstStyle/>
+            <a:p>
+              <a:pPr marL="0" indent="0">
+                <a:buNone/>
+              </a:pPr>
+              <a:r>
+                <a:rPr lang="en-US" sz="1400" b="1" dirty="0">
+                  <a:solidFill>
+                    <a:srgbClr val="0F1B2D"/>
+                  </a:solidFill>
+                  <a:latin typeface="Calibri" panose="020F0502020204030204" pitchFamily="34" charset="0"/>
+                  <a:ea typeface="Calibri" panose="020F0502020204030204" pitchFamily="34" charset="-122"/>
+                  <a:cs typeface="Calibri" panose="020F0502020204030204" pitchFamily="34" charset="-120"/>
+                </a:rPr>
+                <a:t>Expected Business Impact</a:t>
+              </a:r>
+              <a:endParaRPr lang="en-US" sz="1400" b="1" dirty="0">
                 <a:solidFill>
                   <a:srgbClr val="0F1B2D"/>
                 </a:solidFill>
                 <a:latin typeface="Calibri" panose="020F0502020204030204" pitchFamily="34" charset="0"/>
                 <a:ea typeface="Calibri" panose="020F0502020204030204" pitchFamily="34" charset="-122"/>
                 <a:cs typeface="Calibri" panose="020F0502020204030204" pitchFamily="34" charset="-120"/>
-              </a:rPr>
-              <a:t>Expected Business Impact</a:t>
-            </a:r>
-            <a:endParaRPr lang="en-US" sz="1300" dirty="0"/>
-          </a:p>
-        </p:txBody>
-      </p:sp>
-      <p:sp>
-        <p:nvSpPr>
-          <p:cNvPr id="27" name="Shape 25"/>
-          <p:cNvSpPr/>
-          <p:nvPr/>
-        </p:nvSpPr>
-        <p:spPr>
-          <a:xfrm>
-            <a:off x="6217920" y="1664208"/>
-            <a:ext cx="201168" cy="201168"/>
-          </a:xfrm>
-          <a:prstGeom prst="ellipse">
-            <a:avLst/>
-          </a:prstGeom>
-          <a:solidFill>
-            <a:srgbClr val="0D9488"/>
-          </a:solidFill>
-          <a:ln w="12700">
+              </a:endParaRPr>
+            </a:p>
+          </p:txBody>
+        </p:sp>
+        <p:sp>
+          <p:nvSpPr>
+            <p:cNvPr id="27" name="Shape 25"/>
+            <p:cNvSpPr/>
+            <p:nvPr/>
+          </p:nvSpPr>
+          <p:spPr>
+            <a:xfrm>
+              <a:off x="9792" y="2621"/>
+              <a:ext cx="317" cy="317"/>
+            </a:xfrm>
+            <a:prstGeom prst="ellipse">
+              <a:avLst/>
+            </a:prstGeom>
             <a:solidFill>
               <a:srgbClr val="0D9488"/>
             </a:solidFill>
-            <a:prstDash val="solid"/>
-          </a:ln>
-        </p:spPr>
-      </p:sp>
-      <p:sp>
-        <p:nvSpPr>
-          <p:cNvPr id="28" name="Text 26"/>
-          <p:cNvSpPr/>
-          <p:nvPr/>
-        </p:nvSpPr>
-        <p:spPr>
-          <a:xfrm>
-            <a:off x="6483096" y="1479804"/>
-            <a:ext cx="2286000" cy="731520"/>
-          </a:xfrm>
-          <a:prstGeom prst="rect">
-            <a:avLst/>
-          </a:prstGeom>
-          <a:noFill/>
-        </p:spPr>
-        <p:txBody>
-          <a:bodyPr wrap="square" rtlCol="0" anchor="ctr"/>
-          <a:lstStyle/>
-          <a:p>
-            <a:pPr marL="0" indent="0">
-              <a:lnSpc>
-                <a:spcPct val="120000"/>
-              </a:lnSpc>
-              <a:buNone/>
-            </a:pPr>
-            <a:r>
-              <a:rPr lang="en-US" sz="1150" dirty="0">
+            <a:ln w="12700">
+              <a:solidFill>
+                <a:srgbClr val="0D9488"/>
+              </a:solidFill>
+              <a:prstDash val="solid"/>
+            </a:ln>
+          </p:spPr>
+        </p:sp>
+        <p:sp>
+          <p:nvSpPr>
+            <p:cNvPr id="28" name="Text 26"/>
+            <p:cNvSpPr/>
+            <p:nvPr/>
+          </p:nvSpPr>
+          <p:spPr>
+            <a:xfrm>
+              <a:off x="10210" y="2546"/>
+              <a:ext cx="3600" cy="1152"/>
+            </a:xfrm>
+            <a:prstGeom prst="rect">
+              <a:avLst/>
+            </a:prstGeom>
+            <a:noFill/>
+          </p:spPr>
+          <p:txBody>
+            <a:bodyPr wrap="square" rtlCol="0" anchor="ctr"/>
+            <a:lstStyle/>
+            <a:p>
+              <a:pPr marL="0" indent="0">
+                <a:lnSpc>
+                  <a:spcPct val="120000"/>
+                </a:lnSpc>
+                <a:buNone/>
+              </a:pPr>
+              <a:r>
+                <a:rPr lang="en-US" sz="1400" dirty="0">
+                  <a:solidFill>
+                    <a:srgbClr val="334155"/>
+                  </a:solidFill>
+                  <a:latin typeface="Calibri" panose="020F0502020204030204" pitchFamily="34" charset="0"/>
+                  <a:ea typeface="Calibri" panose="020F0502020204030204" pitchFamily="34" charset="-122"/>
+                  <a:cs typeface="Calibri" panose="020F0502020204030204" pitchFamily="34" charset="-120"/>
+                </a:rPr>
+                <a:t>Proactive identification of high-risk customers before they exit</a:t>
+              </a:r>
+              <a:endParaRPr lang="en-US" sz="1400" dirty="0">
                 <a:solidFill>
                   <a:srgbClr val="334155"/>
                 </a:solidFill>
                 <a:latin typeface="Calibri" panose="020F0502020204030204" pitchFamily="34" charset="0"/>
                 <a:ea typeface="Calibri" panose="020F0502020204030204" pitchFamily="34" charset="-122"/>
                 <a:cs typeface="Calibri" panose="020F0502020204030204" pitchFamily="34" charset="-120"/>
-              </a:rPr>
-              <a:t>Proactive identification of high-risk customers before they exit</a:t>
-            </a:r>
-            <a:endParaRPr lang="en-US" sz="1150" dirty="0"/>
-          </a:p>
-        </p:txBody>
-      </p:sp>
-      <p:sp>
-        <p:nvSpPr>
-          <p:cNvPr id="29" name="Shape 27"/>
-          <p:cNvSpPr/>
-          <p:nvPr/>
-        </p:nvSpPr>
-        <p:spPr>
-          <a:xfrm>
-            <a:off x="6217920" y="2487168"/>
-            <a:ext cx="201168" cy="201168"/>
-          </a:xfrm>
-          <a:prstGeom prst="ellipse">
-            <a:avLst/>
-          </a:prstGeom>
-          <a:solidFill>
-            <a:srgbClr val="0D9488"/>
-          </a:solidFill>
-          <a:ln w="12700">
+              </a:endParaRPr>
+            </a:p>
+          </p:txBody>
+        </p:sp>
+        <p:sp>
+          <p:nvSpPr>
+            <p:cNvPr id="29" name="Shape 27"/>
+            <p:cNvSpPr/>
+            <p:nvPr/>
+          </p:nvSpPr>
+          <p:spPr>
+            <a:xfrm>
+              <a:off x="9792" y="3989"/>
+              <a:ext cx="317" cy="317"/>
+            </a:xfrm>
+            <a:prstGeom prst="ellipse">
+              <a:avLst/>
+            </a:prstGeom>
             <a:solidFill>
               <a:srgbClr val="0D9488"/>
             </a:solidFill>
-            <a:prstDash val="solid"/>
-          </a:ln>
-        </p:spPr>
-      </p:sp>
-      <p:sp>
-        <p:nvSpPr>
-          <p:cNvPr id="30" name="Text 28"/>
-          <p:cNvSpPr/>
-          <p:nvPr/>
-        </p:nvSpPr>
-        <p:spPr>
-          <a:xfrm>
-            <a:off x="6483096" y="2302764"/>
-            <a:ext cx="2286000" cy="731520"/>
-          </a:xfrm>
-          <a:prstGeom prst="rect">
-            <a:avLst/>
-          </a:prstGeom>
-          <a:noFill/>
-        </p:spPr>
-        <p:txBody>
-          <a:bodyPr wrap="square" rtlCol="0" anchor="ctr"/>
-          <a:lstStyle/>
-          <a:p>
-            <a:pPr marL="0" indent="0">
-              <a:lnSpc>
-                <a:spcPct val="120000"/>
-              </a:lnSpc>
-              <a:buNone/>
-            </a:pPr>
-            <a:r>
-              <a:rPr lang="en-US" sz="1150" dirty="0">
+            <a:ln w="12700">
+              <a:solidFill>
+                <a:srgbClr val="0D9488"/>
+              </a:solidFill>
+              <a:prstDash val="solid"/>
+            </a:ln>
+          </p:spPr>
+        </p:sp>
+        <p:sp>
+          <p:nvSpPr>
+            <p:cNvPr id="30" name="Text 28"/>
+            <p:cNvSpPr/>
+            <p:nvPr/>
+          </p:nvSpPr>
+          <p:spPr>
+            <a:xfrm>
+              <a:off x="10210" y="3686"/>
+              <a:ext cx="3600" cy="1152"/>
+            </a:xfrm>
+            <a:prstGeom prst="rect">
+              <a:avLst/>
+            </a:prstGeom>
+            <a:noFill/>
+          </p:spPr>
+          <p:txBody>
+            <a:bodyPr wrap="square" rtlCol="0" anchor="ctr"/>
+            <a:lstStyle/>
+            <a:p>
+              <a:pPr marL="0" indent="0">
+                <a:lnSpc>
+                  <a:spcPct val="120000"/>
+                </a:lnSpc>
+                <a:buNone/>
+              </a:pPr>
+              <a:r>
+                <a:rPr lang="en-US" sz="1400" dirty="0">
+                  <a:solidFill>
+                    <a:srgbClr val="334155"/>
+                  </a:solidFill>
+                  <a:latin typeface="Calibri" panose="020F0502020204030204" pitchFamily="34" charset="0"/>
+                  <a:ea typeface="Calibri" panose="020F0502020204030204" pitchFamily="34" charset="-122"/>
+                  <a:cs typeface="Calibri" panose="020F0502020204030204" pitchFamily="34" charset="-120"/>
+                </a:rPr>
+                <a:t>Significant reduction in total churn-related financial loss</a:t>
+              </a:r>
+              <a:endParaRPr lang="en-US" sz="1400" dirty="0">
                 <a:solidFill>
                   <a:srgbClr val="334155"/>
                 </a:solidFill>
                 <a:latin typeface="Calibri" panose="020F0502020204030204" pitchFamily="34" charset="0"/>
                 <a:ea typeface="Calibri" panose="020F0502020204030204" pitchFamily="34" charset="-122"/>
                 <a:cs typeface="Calibri" panose="020F0502020204030204" pitchFamily="34" charset="-120"/>
-              </a:rPr>
-              <a:t>Significant reduction in total churn-related financial loss</a:t>
-            </a:r>
-            <a:endParaRPr lang="en-US" sz="1150" dirty="0"/>
-          </a:p>
-        </p:txBody>
-      </p:sp>
-      <p:sp>
-        <p:nvSpPr>
-          <p:cNvPr id="31" name="Shape 29"/>
-          <p:cNvSpPr/>
-          <p:nvPr/>
-        </p:nvSpPr>
-        <p:spPr>
-          <a:xfrm>
-            <a:off x="6217920" y="3310128"/>
-            <a:ext cx="201168" cy="201168"/>
-          </a:xfrm>
-          <a:prstGeom prst="ellipse">
-            <a:avLst/>
-          </a:prstGeom>
-          <a:solidFill>
-            <a:srgbClr val="0D9488"/>
-          </a:solidFill>
-          <a:ln w="12700">
+              </a:endParaRPr>
+            </a:p>
+          </p:txBody>
+        </p:sp>
+        <p:sp>
+          <p:nvSpPr>
+            <p:cNvPr id="31" name="Shape 29"/>
+            <p:cNvSpPr/>
+            <p:nvPr/>
+          </p:nvSpPr>
+          <p:spPr>
+            <a:xfrm>
+              <a:off x="9792" y="5213"/>
+              <a:ext cx="317" cy="317"/>
+            </a:xfrm>
+            <a:prstGeom prst="ellipse">
+              <a:avLst/>
+            </a:prstGeom>
             <a:solidFill>
               <a:srgbClr val="0D9488"/>
             </a:solidFill>
-            <a:prstDash val="solid"/>
-          </a:ln>
-        </p:spPr>
-      </p:sp>
-      <p:sp>
-        <p:nvSpPr>
-          <p:cNvPr id="32" name="Text 30"/>
-          <p:cNvSpPr/>
-          <p:nvPr/>
-        </p:nvSpPr>
-        <p:spPr>
-          <a:xfrm>
-            <a:off x="6483096" y="3110484"/>
-            <a:ext cx="2286000" cy="731520"/>
-          </a:xfrm>
-          <a:prstGeom prst="rect">
-            <a:avLst/>
-          </a:prstGeom>
-          <a:noFill/>
-        </p:spPr>
-        <p:txBody>
-          <a:bodyPr wrap="square" rtlCol="0" anchor="ctr"/>
-          <a:lstStyle/>
-          <a:p>
-            <a:pPr marL="0" indent="0">
-              <a:lnSpc>
-                <a:spcPct val="120000"/>
-              </a:lnSpc>
-              <a:buNone/>
-            </a:pPr>
-            <a:r>
-              <a:rPr lang="en-US" sz="1150" dirty="0">
+            <a:ln w="12700">
+              <a:solidFill>
+                <a:srgbClr val="0D9488"/>
+              </a:solidFill>
+              <a:prstDash val="solid"/>
+            </a:ln>
+          </p:spPr>
+        </p:sp>
+        <p:sp>
+          <p:nvSpPr>
+            <p:cNvPr id="32" name="Text 30"/>
+            <p:cNvSpPr/>
+            <p:nvPr/>
+          </p:nvSpPr>
+          <p:spPr>
+            <a:xfrm>
+              <a:off x="10210" y="4826"/>
+              <a:ext cx="3600" cy="1152"/>
+            </a:xfrm>
+            <a:prstGeom prst="rect">
+              <a:avLst/>
+            </a:prstGeom>
+            <a:noFill/>
+          </p:spPr>
+          <p:txBody>
+            <a:bodyPr wrap="square" rtlCol="0" anchor="ctr"/>
+            <a:lstStyle/>
+            <a:p>
+              <a:pPr marL="0" indent="0">
+                <a:lnSpc>
+                  <a:spcPct val="120000"/>
+                </a:lnSpc>
+                <a:buNone/>
+              </a:pPr>
+              <a:r>
+                <a:rPr lang="en-US" sz="1400" dirty="0">
+                  <a:solidFill>
+                    <a:srgbClr val="334155"/>
+                  </a:solidFill>
+                  <a:latin typeface="Calibri" panose="020F0502020204030204" pitchFamily="34" charset="0"/>
+                  <a:ea typeface="Calibri" panose="020F0502020204030204" pitchFamily="34" charset="-122"/>
+                  <a:cs typeface="Calibri" panose="020F0502020204030204" pitchFamily="34" charset="-120"/>
+                </a:rPr>
+                <a:t>Actionable insights into top churn drivers for strategy</a:t>
+              </a:r>
+              <a:endParaRPr lang="en-US" sz="1400" dirty="0">
                 <a:solidFill>
                   <a:srgbClr val="334155"/>
                 </a:solidFill>
                 <a:latin typeface="Calibri" panose="020F0502020204030204" pitchFamily="34" charset="0"/>
                 <a:ea typeface="Calibri" panose="020F0502020204030204" pitchFamily="34" charset="-122"/>
                 <a:cs typeface="Calibri" panose="020F0502020204030204" pitchFamily="34" charset="-120"/>
-              </a:rPr>
-              <a:t>Actionable insights into top churn drivers for strategy</a:t>
-            </a:r>
-            <a:endParaRPr lang="en-US" sz="1150" dirty="0"/>
-          </a:p>
-        </p:txBody>
-      </p:sp>
+              </a:endParaRPr>
+            </a:p>
+          </p:txBody>
+        </p:sp>
+      </p:grpSp>
       <p:sp>
         <p:nvSpPr>
           <p:cNvPr id="33" name="Text 31"/>
@@ -9439,7 +9973,7 @@
         </p:nvSpPr>
         <p:spPr>
           <a:xfrm>
-            <a:off x="0" y="0"/>
+            <a:off x="0" y="7620"/>
             <a:ext cx="9144000" cy="777240"/>
           </a:xfrm>
           <a:prstGeom prst="rect">
@@ -9464,7 +9998,7 @@
         </p:nvSpPr>
         <p:spPr>
           <a:xfrm>
-            <a:off x="0" y="777240"/>
+            <a:off x="0" y="792480"/>
             <a:ext cx="9144000" cy="54864"/>
           </a:xfrm>
           <a:prstGeom prst="rect">
@@ -9489,7 +10023,7 @@
         </p:nvSpPr>
         <p:spPr>
           <a:xfrm>
-            <a:off x="449580" y="94488"/>
+            <a:off x="449580" y="71628"/>
             <a:ext cx="6400800" cy="502920"/>
           </a:xfrm>
           <a:prstGeom prst="rect">
@@ -9616,7 +10150,14 @@
               </a:rPr>
               <a:t>🎯  Goal: Predict binary customer churn (0/1) on 2,026 test customers — maximising PR-AUC and minimising total business cost</a:t>
             </a:r>
-            <a:endParaRPr lang="en-US" sz="1200" dirty="0"/>
+            <a:endParaRPr lang="en-US" sz="1200" dirty="0">
+              <a:solidFill>
+                <a:srgbClr val="0F1B2D"/>
+              </a:solidFill>
+              <a:latin typeface="Calibri" panose="020F0502020204030204" pitchFamily="34" charset="0"/>
+              <a:ea typeface="Calibri" panose="020F0502020204030204" pitchFamily="34" charset="-122"/>
+              <a:cs typeface="Calibri" panose="020F0502020204030204" pitchFamily="34" charset="-120"/>
+            </a:endParaRPr>
           </a:p>
         </p:txBody>
       </p:sp>
@@ -9676,7 +10217,7 @@
               <a:buNone/>
             </a:pPr>
             <a:r>
-              <a:rPr lang="en-US" sz="1100" b="1" dirty="0">
+              <a:rPr lang="en-US" sz="1200" b="1" dirty="0">
                 <a:solidFill>
                   <a:srgbClr val="0D9488"/>
                 </a:solidFill>
@@ -9686,7 +10227,14 @@
               </a:rPr>
               <a:t>1</a:t>
             </a:r>
-            <a:endParaRPr lang="en-US" sz="1100" dirty="0"/>
+            <a:endParaRPr lang="en-US" sz="1200" b="1" dirty="0">
+              <a:solidFill>
+                <a:srgbClr val="0D9488"/>
+              </a:solidFill>
+              <a:latin typeface="Georgia" panose="02040502050405020303" pitchFamily="34" charset="0"/>
+              <a:ea typeface="Georgia" panose="02040502050405020303" pitchFamily="34" charset="-122"/>
+              <a:cs typeface="Georgia" panose="02040502050405020303" pitchFamily="34" charset="-120"/>
+            </a:endParaRPr>
           </a:p>
         </p:txBody>
       </p:sp>
@@ -9717,7 +10265,7 @@
               <a:buNone/>
             </a:pPr>
             <a:r>
-              <a:rPr lang="en-US" sz="1050" dirty="0">
+              <a:rPr lang="en-US" sz="1200" dirty="0">
                 <a:solidFill>
                   <a:srgbClr val="FFFFFF"/>
                 </a:solidFill>
@@ -9727,7 +10275,7 @@
               </a:rPr>
               <a:t>Data Audit</a:t>
             </a:r>
-            <a:endParaRPr lang="en-US" sz="1050" dirty="0"/>
+            <a:endParaRPr lang="en-US" sz="1200" dirty="0"/>
           </a:p>
           <a:p>
             <a:pPr marL="0" indent="0" algn="ctr">
@@ -9737,7 +10285,7 @@
               <a:buNone/>
             </a:pPr>
             <a:r>
-              <a:rPr lang="en-US" sz="1050" dirty="0">
+              <a:rPr lang="en-US" sz="1200" dirty="0">
                 <a:solidFill>
                   <a:srgbClr val="FFFFFF"/>
                 </a:solidFill>
@@ -9747,7 +10295,7 @@
               </a:rPr>
               <a:t>&amp; Leakage</a:t>
             </a:r>
-            <a:endParaRPr lang="en-US" sz="1050" dirty="0"/>
+            <a:endParaRPr lang="en-US" sz="1200" dirty="0"/>
           </a:p>
           <a:p>
             <a:pPr marL="0" indent="0" algn="ctr">
@@ -9757,7 +10305,7 @@
               <a:buNone/>
             </a:pPr>
             <a:r>
-              <a:rPr lang="en-US" sz="1050" dirty="0">
+              <a:rPr lang="en-US" sz="1200" dirty="0">
                 <a:solidFill>
                   <a:srgbClr val="FFFFFF"/>
                 </a:solidFill>
@@ -9767,7 +10315,14 @@
               </a:rPr>
               <a:t>Removal</a:t>
             </a:r>
-            <a:endParaRPr lang="en-US" sz="1050" dirty="0"/>
+            <a:endParaRPr lang="en-US" sz="1200" dirty="0">
+              <a:solidFill>
+                <a:srgbClr val="FFFFFF"/>
+              </a:solidFill>
+              <a:latin typeface="Calibri" panose="020F0502020204030204" pitchFamily="34" charset="0"/>
+              <a:ea typeface="Calibri" panose="020F0502020204030204" pitchFamily="34" charset="-122"/>
+              <a:cs typeface="Calibri" panose="020F0502020204030204" pitchFamily="34" charset="-120"/>
+            </a:endParaRPr>
           </a:p>
         </p:txBody>
       </p:sp>
@@ -9852,7 +10407,7 @@
               <a:buNone/>
             </a:pPr>
             <a:r>
-              <a:rPr lang="en-US" sz="1100" b="1" dirty="0">
+              <a:rPr lang="en-US" sz="1200" b="1" dirty="0">
                 <a:solidFill>
                   <a:srgbClr val="0D9488"/>
                 </a:solidFill>
@@ -9862,7 +10417,14 @@
               </a:rPr>
               <a:t>2</a:t>
             </a:r>
-            <a:endParaRPr lang="en-US" sz="1100" dirty="0"/>
+            <a:endParaRPr lang="en-US" sz="1200" b="1" dirty="0">
+              <a:solidFill>
+                <a:srgbClr val="0D9488"/>
+              </a:solidFill>
+              <a:latin typeface="Georgia" panose="02040502050405020303" pitchFamily="34" charset="0"/>
+              <a:ea typeface="Georgia" panose="02040502050405020303" pitchFamily="34" charset="-122"/>
+              <a:cs typeface="Georgia" panose="02040502050405020303" pitchFamily="34" charset="-120"/>
+            </a:endParaRPr>
           </a:p>
         </p:txBody>
       </p:sp>
@@ -9893,7 +10455,7 @@
               <a:buNone/>
             </a:pPr>
             <a:r>
-              <a:rPr lang="en-US" sz="1050" dirty="0">
+              <a:rPr lang="en-US" sz="1200" dirty="0">
                 <a:solidFill>
                   <a:srgbClr val="FFFFFF"/>
                 </a:solidFill>
@@ -9903,7 +10465,7 @@
               </a:rPr>
               <a:t>EDA &amp;</a:t>
             </a:r>
-            <a:endParaRPr lang="en-US" sz="1050" dirty="0"/>
+            <a:endParaRPr lang="en-US" sz="1200" dirty="0"/>
           </a:p>
           <a:p>
             <a:pPr marL="0" indent="0" algn="ctr">
@@ -9913,7 +10475,7 @@
               <a:buNone/>
             </a:pPr>
             <a:r>
-              <a:rPr lang="en-US" sz="1050" dirty="0">
+              <a:rPr lang="en-US" sz="1200" dirty="0">
                 <a:solidFill>
                   <a:srgbClr val="FFFFFF"/>
                 </a:solidFill>
@@ -9923,7 +10485,14 @@
               </a:rPr>
               <a:t>Preprocessing</a:t>
             </a:r>
-            <a:endParaRPr lang="en-US" sz="1050" dirty="0"/>
+            <a:endParaRPr lang="en-US" sz="1200" dirty="0">
+              <a:solidFill>
+                <a:srgbClr val="FFFFFF"/>
+              </a:solidFill>
+              <a:latin typeface="Calibri" panose="020F0502020204030204" pitchFamily="34" charset="0"/>
+              <a:ea typeface="Calibri" panose="020F0502020204030204" pitchFamily="34" charset="-122"/>
+              <a:cs typeface="Calibri" panose="020F0502020204030204" pitchFamily="34" charset="-120"/>
+            </a:endParaRPr>
           </a:p>
         </p:txBody>
       </p:sp>
@@ -10008,7 +10577,7 @@
               <a:buNone/>
             </a:pPr>
             <a:r>
-              <a:rPr lang="en-US" sz="1100" b="1" dirty="0">
+              <a:rPr lang="en-US" sz="1200" b="1" dirty="0">
                 <a:solidFill>
                   <a:srgbClr val="0D9488"/>
                 </a:solidFill>
@@ -10018,7 +10587,14 @@
               </a:rPr>
               <a:t>3</a:t>
             </a:r>
-            <a:endParaRPr lang="en-US" sz="1100" dirty="0"/>
+            <a:endParaRPr lang="en-US" sz="1200" b="1" dirty="0">
+              <a:solidFill>
+                <a:srgbClr val="0D9488"/>
+              </a:solidFill>
+              <a:latin typeface="Georgia" panose="02040502050405020303" pitchFamily="34" charset="0"/>
+              <a:ea typeface="Georgia" panose="02040502050405020303" pitchFamily="34" charset="-122"/>
+              <a:cs typeface="Georgia" panose="02040502050405020303" pitchFamily="34" charset="-120"/>
+            </a:endParaRPr>
           </a:p>
         </p:txBody>
       </p:sp>
@@ -10049,7 +10625,7 @@
               <a:buNone/>
             </a:pPr>
             <a:r>
-              <a:rPr lang="en-US" sz="1050" dirty="0">
+              <a:rPr lang="en-US" sz="1200" dirty="0">
                 <a:solidFill>
                   <a:srgbClr val="FFFFFF"/>
                 </a:solidFill>
@@ -10059,7 +10635,7 @@
               </a:rPr>
               <a:t>SMOTE</a:t>
             </a:r>
-            <a:endParaRPr lang="en-US" sz="1050" dirty="0"/>
+            <a:endParaRPr lang="en-US" sz="1200" dirty="0"/>
           </a:p>
           <a:p>
             <a:pPr marL="0" indent="0" algn="ctr">
@@ -10069,7 +10645,7 @@
               <a:buNone/>
             </a:pPr>
             <a:r>
-              <a:rPr lang="en-US" sz="1050" dirty="0">
+              <a:rPr lang="en-US" sz="1200" dirty="0">
                 <a:solidFill>
                   <a:srgbClr val="FFFFFF"/>
                 </a:solidFill>
@@ -10079,7 +10655,7 @@
               </a:rPr>
               <a:t>Imbalance</a:t>
             </a:r>
-            <a:endParaRPr lang="en-US" sz="1050" dirty="0"/>
+            <a:endParaRPr lang="en-US" sz="1200" dirty="0"/>
           </a:p>
           <a:p>
             <a:pPr marL="0" indent="0" algn="ctr">
@@ -10089,7 +10665,7 @@
               <a:buNone/>
             </a:pPr>
             <a:r>
-              <a:rPr lang="en-US" sz="1050" dirty="0">
+              <a:rPr lang="en-US" sz="1200" dirty="0">
                 <a:solidFill>
                   <a:srgbClr val="FFFFFF"/>
                 </a:solidFill>
@@ -10099,7 +10675,14 @@
               </a:rPr>
               <a:t>Handling</a:t>
             </a:r>
-            <a:endParaRPr lang="en-US" sz="1050" dirty="0"/>
+            <a:endParaRPr lang="en-US" sz="1200" dirty="0">
+              <a:solidFill>
+                <a:srgbClr val="FFFFFF"/>
+              </a:solidFill>
+              <a:latin typeface="Calibri" panose="020F0502020204030204" pitchFamily="34" charset="0"/>
+              <a:ea typeface="Calibri" panose="020F0502020204030204" pitchFamily="34" charset="-122"/>
+              <a:cs typeface="Calibri" panose="020F0502020204030204" pitchFamily="34" charset="-120"/>
+            </a:endParaRPr>
           </a:p>
         </p:txBody>
       </p:sp>
@@ -10184,7 +10767,7 @@
               <a:buNone/>
             </a:pPr>
             <a:r>
-              <a:rPr lang="en-US" sz="1100" b="1" dirty="0">
+              <a:rPr lang="en-US" sz="1200" b="1" dirty="0">
                 <a:solidFill>
                   <a:srgbClr val="0F1B2D"/>
                 </a:solidFill>
@@ -10194,7 +10777,14 @@
               </a:rPr>
               <a:t>4</a:t>
             </a:r>
-            <a:endParaRPr lang="en-US" sz="1100" dirty="0"/>
+            <a:endParaRPr lang="en-US" sz="1200" b="1" dirty="0">
+              <a:solidFill>
+                <a:srgbClr val="0F1B2D"/>
+              </a:solidFill>
+              <a:latin typeface="Georgia" panose="02040502050405020303" pitchFamily="34" charset="0"/>
+              <a:ea typeface="Georgia" panose="02040502050405020303" pitchFamily="34" charset="-122"/>
+              <a:cs typeface="Georgia" panose="02040502050405020303" pitchFamily="34" charset="-120"/>
+            </a:endParaRPr>
           </a:p>
         </p:txBody>
       </p:sp>
@@ -10225,7 +10815,7 @@
               <a:buNone/>
             </a:pPr>
             <a:r>
-              <a:rPr lang="en-US" sz="1050" dirty="0">
+              <a:rPr lang="en-US" sz="1200" dirty="0">
                 <a:solidFill>
                   <a:srgbClr val="FFFFFF"/>
                 </a:solidFill>
@@ -10235,7 +10825,7 @@
               </a:rPr>
               <a:t>Model</a:t>
             </a:r>
-            <a:endParaRPr lang="en-US" sz="1050" dirty="0"/>
+            <a:endParaRPr lang="en-US" sz="1200" dirty="0"/>
           </a:p>
           <a:p>
             <a:pPr marL="0" indent="0" algn="ctr">
@@ -10245,7 +10835,7 @@
               <a:buNone/>
             </a:pPr>
             <a:r>
-              <a:rPr lang="en-US" sz="1050" dirty="0">
+              <a:rPr lang="en-US" sz="1200" dirty="0">
                 <a:solidFill>
                   <a:srgbClr val="FFFFFF"/>
                 </a:solidFill>
@@ -10255,7 +10845,7 @@
               </a:rPr>
               <a:t>Training</a:t>
             </a:r>
-            <a:endParaRPr lang="en-US" sz="1050" dirty="0"/>
+            <a:endParaRPr lang="en-US" sz="1200" dirty="0"/>
           </a:p>
           <a:p>
             <a:pPr marL="0" indent="0" algn="ctr">
@@ -10265,7 +10855,7 @@
               <a:buNone/>
             </a:pPr>
             <a:r>
-              <a:rPr lang="en-US" sz="1050" dirty="0">
+              <a:rPr lang="en-US" sz="1200" dirty="0">
                 <a:solidFill>
                   <a:srgbClr val="FFFFFF"/>
                 </a:solidFill>
@@ -10275,7 +10865,14 @@
               </a:rPr>
               <a:t>(XGBoost)</a:t>
             </a:r>
-            <a:endParaRPr lang="en-US" sz="1050" dirty="0"/>
+            <a:endParaRPr lang="en-US" sz="1200" dirty="0">
+              <a:solidFill>
+                <a:srgbClr val="FFFFFF"/>
+              </a:solidFill>
+              <a:latin typeface="Calibri" panose="020F0502020204030204" pitchFamily="34" charset="0"/>
+              <a:ea typeface="Calibri" panose="020F0502020204030204" pitchFamily="34" charset="-122"/>
+              <a:cs typeface="Calibri" panose="020F0502020204030204" pitchFamily="34" charset="-120"/>
+            </a:endParaRPr>
           </a:p>
         </p:txBody>
       </p:sp>
@@ -10360,7 +10957,7 @@
               <a:buNone/>
             </a:pPr>
             <a:r>
-              <a:rPr lang="en-US" sz="1100" b="1" dirty="0">
+              <a:rPr lang="en-US" sz="1200" b="1" dirty="0">
                 <a:solidFill>
                   <a:srgbClr val="0D9488"/>
                 </a:solidFill>
@@ -10370,7 +10967,14 @@
               </a:rPr>
               <a:t>5</a:t>
             </a:r>
-            <a:endParaRPr lang="en-US" sz="1100" dirty="0"/>
+            <a:endParaRPr lang="en-US" sz="1200" b="1" dirty="0">
+              <a:solidFill>
+                <a:srgbClr val="0D9488"/>
+              </a:solidFill>
+              <a:latin typeface="Georgia" panose="02040502050405020303" pitchFamily="34" charset="0"/>
+              <a:ea typeface="Georgia" panose="02040502050405020303" pitchFamily="34" charset="-122"/>
+              <a:cs typeface="Georgia" panose="02040502050405020303" pitchFamily="34" charset="-120"/>
+            </a:endParaRPr>
           </a:p>
         </p:txBody>
       </p:sp>
@@ -10401,7 +11005,7 @@
               <a:buNone/>
             </a:pPr>
             <a:r>
-              <a:rPr lang="en-US" sz="1050" dirty="0">
+              <a:rPr lang="en-US" sz="1200" dirty="0">
                 <a:solidFill>
                   <a:srgbClr val="FFFFFF"/>
                 </a:solidFill>
@@ -10411,7 +11015,7 @@
               </a:rPr>
               <a:t>Threshold</a:t>
             </a:r>
-            <a:endParaRPr lang="en-US" sz="1050" dirty="0"/>
+            <a:endParaRPr lang="en-US" sz="1200" dirty="0"/>
           </a:p>
           <a:p>
             <a:pPr marL="0" indent="0" algn="ctr">
@@ -10421,7 +11025,7 @@
               <a:buNone/>
             </a:pPr>
             <a:r>
-              <a:rPr lang="en-US" sz="1050" dirty="0">
+              <a:rPr lang="en-US" sz="1200" dirty="0">
                 <a:solidFill>
                   <a:srgbClr val="FFFFFF"/>
                 </a:solidFill>
@@ -10431,7 +11035,14 @@
               </a:rPr>
               <a:t>Optimization</a:t>
             </a:r>
-            <a:endParaRPr lang="en-US" sz="1050" dirty="0"/>
+            <a:endParaRPr lang="en-US" sz="1200" dirty="0">
+              <a:solidFill>
+                <a:srgbClr val="FFFFFF"/>
+              </a:solidFill>
+              <a:latin typeface="Calibri" panose="020F0502020204030204" pitchFamily="34" charset="0"/>
+              <a:ea typeface="Calibri" panose="020F0502020204030204" pitchFamily="34" charset="-122"/>
+              <a:cs typeface="Calibri" panose="020F0502020204030204" pitchFamily="34" charset="-120"/>
+            </a:endParaRPr>
           </a:p>
         </p:txBody>
       </p:sp>
@@ -10516,7 +11127,7 @@
               <a:buNone/>
             </a:pPr>
             <a:r>
-              <a:rPr lang="en-US" sz="1100" b="1" dirty="0">
+              <a:rPr lang="en-US" sz="1200" b="1" dirty="0">
                 <a:solidFill>
                   <a:srgbClr val="0D9488"/>
                 </a:solidFill>
@@ -10526,7 +11137,14 @@
               </a:rPr>
               <a:t>6</a:t>
             </a:r>
-            <a:endParaRPr lang="en-US" sz="1100" dirty="0"/>
+            <a:endParaRPr lang="en-US" sz="1200" b="1" dirty="0">
+              <a:solidFill>
+                <a:srgbClr val="0D9488"/>
+              </a:solidFill>
+              <a:latin typeface="Georgia" panose="02040502050405020303" pitchFamily="34" charset="0"/>
+              <a:ea typeface="Georgia" panose="02040502050405020303" pitchFamily="34" charset="-122"/>
+              <a:cs typeface="Georgia" panose="02040502050405020303" pitchFamily="34" charset="-120"/>
+            </a:endParaRPr>
           </a:p>
         </p:txBody>
       </p:sp>
@@ -10557,7 +11175,7 @@
               <a:buNone/>
             </a:pPr>
             <a:r>
-              <a:rPr lang="en-US" sz="1050" dirty="0">
+              <a:rPr lang="en-US" sz="1200" dirty="0">
                 <a:solidFill>
                   <a:srgbClr val="FFFFFF"/>
                 </a:solidFill>
@@ -10567,7 +11185,7 @@
               </a:rPr>
               <a:t>Predictions</a:t>
             </a:r>
-            <a:endParaRPr lang="en-US" sz="1050" dirty="0"/>
+            <a:endParaRPr lang="en-US" sz="1200" dirty="0"/>
           </a:p>
           <a:p>
             <a:pPr marL="0" indent="0" algn="ctr">
@@ -10577,7 +11195,7 @@
               <a:buNone/>
             </a:pPr>
             <a:r>
-              <a:rPr lang="en-US" sz="1050" dirty="0">
+              <a:rPr lang="en-US" sz="1200" dirty="0">
                 <a:solidFill>
                   <a:srgbClr val="FFFFFF"/>
                 </a:solidFill>
@@ -10587,7 +11205,14 @@
               </a:rPr>
               <a:t>&amp; Insights</a:t>
             </a:r>
-            <a:endParaRPr lang="en-US" sz="1050" dirty="0"/>
+            <a:endParaRPr lang="en-US" sz="1200" dirty="0">
+              <a:solidFill>
+                <a:srgbClr val="FFFFFF"/>
+              </a:solidFill>
+              <a:latin typeface="Calibri" panose="020F0502020204030204" pitchFamily="34" charset="0"/>
+              <a:ea typeface="Calibri" panose="020F0502020204030204" pitchFamily="34" charset="-122"/>
+              <a:cs typeface="Calibri" panose="020F0502020204030204" pitchFamily="34" charset="-120"/>
+            </a:endParaRPr>
           </a:p>
         </p:txBody>
       </p:sp>
@@ -10672,7 +11297,7 @@
               <a:buNone/>
             </a:pPr>
             <a:r>
-              <a:rPr lang="en-US" sz="1100" b="1" dirty="0">
+              <a:rPr lang="en-US" sz="1400" b="1" dirty="0">
                 <a:solidFill>
                   <a:srgbClr val="0F1B2D"/>
                 </a:solidFill>
@@ -10682,7 +11307,14 @@
               </a:rPr>
               <a:t>KEY PRINCIPLES</a:t>
             </a:r>
-            <a:endParaRPr lang="en-US" sz="1100" dirty="0"/>
+            <a:endParaRPr lang="en-US" sz="1400" b="1" dirty="0">
+              <a:solidFill>
+                <a:srgbClr val="0F1B2D"/>
+              </a:solidFill>
+              <a:latin typeface="Calibri" panose="020F0502020204030204" pitchFamily="34" charset="0"/>
+              <a:ea typeface="Calibri" panose="020F0502020204030204" pitchFamily="34" charset="-122"/>
+              <a:cs typeface="Calibri" panose="020F0502020204030204" pitchFamily="34" charset="-120"/>
+            </a:endParaRPr>
           </a:p>
         </p:txBody>
       </p:sp>
@@ -10710,7 +11342,7 @@
               <a:buNone/>
             </a:pPr>
             <a:r>
-              <a:rPr lang="en-US" sz="1100" dirty="0">
+              <a:rPr lang="en-US" sz="1200" dirty="0">
                 <a:solidFill>
                   <a:srgbClr val="334155"/>
                 </a:solidFill>
@@ -10720,7 +11352,14 @@
               </a:rPr>
               <a:t>✓  No Data Leakage</a:t>
             </a:r>
-            <a:endParaRPr lang="en-US" sz="1100" dirty="0"/>
+            <a:endParaRPr lang="en-US" sz="1200" dirty="0">
+              <a:solidFill>
+                <a:srgbClr val="334155"/>
+              </a:solidFill>
+              <a:latin typeface="Calibri" panose="020F0502020204030204" pitchFamily="34" charset="0"/>
+              <a:ea typeface="Calibri" panose="020F0502020204030204" pitchFamily="34" charset="-122"/>
+              <a:cs typeface="Calibri" panose="020F0502020204030204" pitchFamily="34" charset="-120"/>
+            </a:endParaRPr>
           </a:p>
         </p:txBody>
       </p:sp>
@@ -10748,7 +11387,7 @@
               <a:buNone/>
             </a:pPr>
             <a:r>
-              <a:rPr lang="en-US" sz="1100" dirty="0">
+              <a:rPr lang="en-US" sz="1200" dirty="0">
                 <a:solidFill>
                   <a:srgbClr val="334155"/>
                 </a:solidFill>
@@ -10758,7 +11397,14 @@
               </a:rPr>
               <a:t>✓  Cost-Sensitive Threshold Tuning</a:t>
             </a:r>
-            <a:endParaRPr lang="en-US" sz="1100" dirty="0"/>
+            <a:endParaRPr lang="en-US" sz="1200" dirty="0">
+              <a:solidFill>
+                <a:srgbClr val="334155"/>
+              </a:solidFill>
+              <a:latin typeface="Calibri" panose="020F0502020204030204" pitchFamily="34" charset="0"/>
+              <a:ea typeface="Calibri" panose="020F0502020204030204" pitchFamily="34" charset="-122"/>
+              <a:cs typeface="Calibri" panose="020F0502020204030204" pitchFamily="34" charset="-120"/>
+            </a:endParaRPr>
           </a:p>
         </p:txBody>
       </p:sp>
@@ -10786,7 +11432,7 @@
               <a:buNone/>
             </a:pPr>
             <a:r>
-              <a:rPr lang="en-US" sz="1100" dirty="0">
+              <a:rPr lang="en-US" sz="1200" dirty="0">
                 <a:solidFill>
                   <a:srgbClr val="334155"/>
                 </a:solidFill>
@@ -10796,7 +11442,14 @@
               </a:rPr>
               <a:t>✓  Reproducible Pipeline</a:t>
             </a:r>
-            <a:endParaRPr lang="en-US" sz="1100" dirty="0"/>
+            <a:endParaRPr lang="en-US" sz="1200" dirty="0">
+              <a:solidFill>
+                <a:srgbClr val="334155"/>
+              </a:solidFill>
+              <a:latin typeface="Calibri" panose="020F0502020204030204" pitchFamily="34" charset="0"/>
+              <a:ea typeface="Calibri" panose="020F0502020204030204" pitchFamily="34" charset="-122"/>
+              <a:cs typeface="Calibri" panose="020F0502020204030204" pitchFamily="34" charset="-120"/>
+            </a:endParaRPr>
           </a:p>
         </p:txBody>
       </p:sp>
@@ -10824,7 +11477,7 @@
               <a:buNone/>
             </a:pPr>
             <a:r>
-              <a:rPr lang="en-US" sz="1100" dirty="0">
+              <a:rPr lang="en-US" sz="1200" dirty="0">
                 <a:solidFill>
                   <a:srgbClr val="334155"/>
                 </a:solidFill>
@@ -10834,7 +11487,14 @@
               </a:rPr>
               <a:t>✓  Business-First Framing</a:t>
             </a:r>
-            <a:endParaRPr lang="en-US" sz="1100" dirty="0"/>
+            <a:endParaRPr lang="en-US" sz="1200" dirty="0">
+              <a:solidFill>
+                <a:srgbClr val="334155"/>
+              </a:solidFill>
+              <a:latin typeface="Calibri" panose="020F0502020204030204" pitchFamily="34" charset="0"/>
+              <a:ea typeface="Calibri" panose="020F0502020204030204" pitchFamily="34" charset="-122"/>
+              <a:cs typeface="Calibri" panose="020F0502020204030204" pitchFamily="34" charset="-120"/>
+            </a:endParaRPr>
           </a:p>
         </p:txBody>
       </p:sp>
@@ -10919,7 +11579,7 @@
               <a:buNone/>
             </a:pPr>
             <a:r>
-              <a:rPr lang="en-US" sz="1100" b="1" dirty="0">
+              <a:rPr lang="en-US" sz="1400" b="1" dirty="0">
                 <a:solidFill>
                   <a:srgbClr val="0F1B2D"/>
                 </a:solidFill>
@@ -10929,7 +11589,14 @@
               </a:rPr>
               <a:t>EVALUATION FORMULA</a:t>
             </a:r>
-            <a:endParaRPr lang="en-US" sz="1100" dirty="0"/>
+            <a:endParaRPr lang="en-US" sz="1400" b="1" dirty="0">
+              <a:solidFill>
+                <a:srgbClr val="0F1B2D"/>
+              </a:solidFill>
+              <a:latin typeface="Calibri" panose="020F0502020204030204" pitchFamily="34" charset="0"/>
+              <a:ea typeface="Calibri" panose="020F0502020204030204" pitchFamily="34" charset="-122"/>
+              <a:cs typeface="Calibri" panose="020F0502020204030204" pitchFamily="34" charset="-120"/>
+            </a:endParaRPr>
           </a:p>
         </p:txBody>
       </p:sp>
@@ -10957,7 +11624,7 @@
               <a:buNone/>
             </a:pPr>
             <a:r>
-              <a:rPr lang="en-US" sz="1100" dirty="0">
+              <a:rPr lang="en-US" sz="1200" dirty="0">
                 <a:solidFill>
                   <a:srgbClr val="334155"/>
                 </a:solidFill>
@@ -10967,7 +11634,14 @@
               </a:rPr>
               <a:t>PR-AUC (primary)  ·  F1-Score (secondary)</a:t>
             </a:r>
-            <a:endParaRPr lang="en-US" sz="1100" dirty="0"/>
+            <a:endParaRPr lang="en-US" sz="1200" dirty="0">
+              <a:solidFill>
+                <a:srgbClr val="334155"/>
+              </a:solidFill>
+              <a:latin typeface="Calibri" panose="020F0502020204030204" pitchFamily="34" charset="0"/>
+              <a:ea typeface="Calibri" panose="020F0502020204030204" pitchFamily="34" charset="-122"/>
+              <a:cs typeface="Calibri" panose="020F0502020204030204" pitchFamily="34" charset="-120"/>
+            </a:endParaRPr>
           </a:p>
         </p:txBody>
       </p:sp>
@@ -11020,7 +11694,7 @@
               <a:buNone/>
             </a:pPr>
             <a:r>
-              <a:rPr lang="en-US" sz="1200" b="1" dirty="0">
+              <a:rPr lang="en-US" sz="1400" b="1" dirty="0">
                 <a:solidFill>
                   <a:srgbClr val="0F1B2D"/>
                 </a:solidFill>
@@ -11028,9 +11702,27 @@
                 <a:ea typeface="Calibri" panose="020F0502020204030204" pitchFamily="34" charset="-122"/>
                 <a:cs typeface="Calibri" panose="020F0502020204030204" pitchFamily="34" charset="-120"/>
               </a:rPr>
-              <a:t>Business Cost = FP × ₹500 + FN × ₹40,000</a:t>
-            </a:r>
-            <a:endParaRPr lang="en-US" sz="1200" dirty="0"/>
+              <a:t>Business Cost = FP × ₹500 + </a:t>
+            </a:r>
+            <a:r>
+              <a:rPr lang="en-US" sz="1400" b="1" dirty="0">
+                <a:solidFill>
+                  <a:srgbClr val="0F1B2D"/>
+                </a:solidFill>
+                <a:latin typeface="Calibri" panose="020F0502020204030204" pitchFamily="34" charset="0"/>
+                <a:ea typeface="Calibri" panose="020F0502020204030204" pitchFamily="34" charset="-122"/>
+                <a:cs typeface="Calibri" panose="020F0502020204030204" pitchFamily="34" charset="-120"/>
+              </a:rPr>
+              <a:t>FN × ₹40,000</a:t>
+            </a:r>
+            <a:endParaRPr lang="en-US" sz="1400" b="1" dirty="0">
+              <a:solidFill>
+                <a:srgbClr val="0F1B2D"/>
+              </a:solidFill>
+              <a:latin typeface="Calibri" panose="020F0502020204030204" pitchFamily="34" charset="0"/>
+              <a:ea typeface="Calibri" panose="020F0502020204030204" pitchFamily="34" charset="-122"/>
+              <a:cs typeface="Calibri" panose="020F0502020204030204" pitchFamily="34" charset="-120"/>
+            </a:endParaRPr>
           </a:p>
         </p:txBody>
       </p:sp>
@@ -11058,7 +11750,7 @@
               <a:buNone/>
             </a:pPr>
             <a:r>
-              <a:rPr lang="en-US" sz="1000" dirty="0">
+              <a:rPr lang="en-US" sz="1200" dirty="0">
                 <a:solidFill>
                   <a:srgbClr val="94A3B8"/>
                 </a:solidFill>
@@ -11068,7 +11760,14 @@
               </a:rPr>
               <a:t>Threshold tuned to minimise total business cost</a:t>
             </a:r>
-            <a:endParaRPr lang="en-US" sz="1000" dirty="0"/>
+            <a:endParaRPr lang="en-US" sz="1200" dirty="0">
+              <a:solidFill>
+                <a:srgbClr val="94A3B8"/>
+              </a:solidFill>
+              <a:latin typeface="Calibri" panose="020F0502020204030204" pitchFamily="34" charset="0"/>
+              <a:ea typeface="Calibri" panose="020F0502020204030204" pitchFamily="34" charset="-122"/>
+              <a:cs typeface="Calibri" panose="020F0502020204030204" pitchFamily="34" charset="-120"/>
+            </a:endParaRPr>
           </a:p>
         </p:txBody>
       </p:sp>
@@ -11201,7 +11900,7 @@
         </p:nvSpPr>
         <p:spPr>
           <a:xfrm>
-            <a:off x="457200" y="64008"/>
+            <a:off x="457200" y="33528"/>
             <a:ext cx="6400800" cy="502920"/>
           </a:xfrm>
           <a:prstGeom prst="rect">
@@ -11239,7 +11938,7 @@
         </p:nvSpPr>
         <p:spPr>
           <a:xfrm>
-            <a:off x="449580" y="481584"/>
+            <a:off x="449580" y="458724"/>
             <a:ext cx="6400800" cy="292608"/>
           </a:xfrm>
           <a:prstGeom prst="rect">
@@ -11363,7 +12062,7 @@
               <a:buNone/>
             </a:pPr>
             <a:r>
-              <a:rPr lang="en-US" sz="1050" dirty="0">
+              <a:rPr lang="en-US" sz="1200" dirty="0">
                 <a:solidFill>
                   <a:srgbClr val="D0F0EC"/>
                 </a:solidFill>
@@ -11373,7 +12072,14 @@
               </a:rPr>
               <a:t>Training Rows</a:t>
             </a:r>
-            <a:endParaRPr lang="en-US" sz="1050" dirty="0"/>
+            <a:endParaRPr lang="en-US" sz="1200" dirty="0">
+              <a:solidFill>
+                <a:srgbClr val="D0F0EC"/>
+              </a:solidFill>
+              <a:latin typeface="Calibri" panose="020F0502020204030204" pitchFamily="34" charset="0"/>
+              <a:ea typeface="Calibri" panose="020F0502020204030204" pitchFamily="34" charset="-122"/>
+              <a:cs typeface="Calibri" panose="020F0502020204030204" pitchFamily="34" charset="-120"/>
+            </a:endParaRPr>
           </a:p>
         </p:txBody>
       </p:sp>
@@ -11471,7 +12177,7 @@
               <a:buNone/>
             </a:pPr>
             <a:r>
-              <a:rPr lang="en-US" sz="1050" dirty="0">
+              <a:rPr lang="en-US" sz="1200" dirty="0">
                 <a:solidFill>
                   <a:srgbClr val="D0F0EC"/>
                 </a:solidFill>
@@ -11481,7 +12187,14 @@
               </a:rPr>
               <a:t>Test Rows</a:t>
             </a:r>
-            <a:endParaRPr lang="en-US" sz="1050" dirty="0"/>
+            <a:endParaRPr lang="en-US" sz="1200" dirty="0">
+              <a:solidFill>
+                <a:srgbClr val="D0F0EC"/>
+              </a:solidFill>
+              <a:latin typeface="Calibri" panose="020F0502020204030204" pitchFamily="34" charset="0"/>
+              <a:ea typeface="Calibri" panose="020F0502020204030204" pitchFamily="34" charset="-122"/>
+              <a:cs typeface="Calibri" panose="020F0502020204030204" pitchFamily="34" charset="-120"/>
+            </a:endParaRPr>
           </a:p>
         </p:txBody>
       </p:sp>
@@ -11579,7 +12292,7 @@
               <a:buNone/>
             </a:pPr>
             <a:r>
-              <a:rPr lang="en-US" sz="1050" dirty="0">
+              <a:rPr lang="en-US" sz="1200" dirty="0">
                 <a:solidFill>
                   <a:srgbClr val="D0F0EC"/>
                 </a:solidFill>
@@ -11589,7 +12302,14 @@
               </a:rPr>
               <a:t>Total Features</a:t>
             </a:r>
-            <a:endParaRPr lang="en-US" sz="1050" dirty="0"/>
+            <a:endParaRPr lang="en-US" sz="1200" dirty="0">
+              <a:solidFill>
+                <a:srgbClr val="D0F0EC"/>
+              </a:solidFill>
+              <a:latin typeface="Calibri" panose="020F0502020204030204" pitchFamily="34" charset="0"/>
+              <a:ea typeface="Calibri" panose="020F0502020204030204" pitchFamily="34" charset="-122"/>
+              <a:cs typeface="Calibri" panose="020F0502020204030204" pitchFamily="34" charset="-120"/>
+            </a:endParaRPr>
           </a:p>
         </p:txBody>
       </p:sp>
@@ -11687,7 +12407,7 @@
               <a:buNone/>
             </a:pPr>
             <a:r>
-              <a:rPr lang="en-US" sz="1050" dirty="0">
+              <a:rPr lang="en-US" sz="1200" dirty="0">
                 <a:solidFill>
                   <a:srgbClr val="D0F0EC"/>
                 </a:solidFill>
@@ -11697,7 +12417,14 @@
               </a:rPr>
               <a:t>Churn Rate</a:t>
             </a:r>
-            <a:endParaRPr lang="en-US" sz="1050" dirty="0"/>
+            <a:endParaRPr lang="en-US" sz="1200" dirty="0">
+              <a:solidFill>
+                <a:srgbClr val="D0F0EC"/>
+              </a:solidFill>
+              <a:latin typeface="Calibri" panose="020F0502020204030204" pitchFamily="34" charset="0"/>
+              <a:ea typeface="Calibri" panose="020F0502020204030204" pitchFamily="34" charset="-122"/>
+              <a:cs typeface="Calibri" panose="020F0502020204030204" pitchFamily="34" charset="-120"/>
+            </a:endParaRPr>
           </a:p>
         </p:txBody>
       </p:sp>
@@ -11750,7 +12477,7 @@
               <a:buNone/>
             </a:pPr>
             <a:r>
-              <a:rPr lang="en-US" sz="1100" b="1" dirty="0">
+              <a:rPr lang="en-US" sz="1200" b="1" dirty="0">
                 <a:solidFill>
                   <a:srgbClr val="FFFFFF"/>
                 </a:solidFill>
@@ -11760,7 +12487,14 @@
               </a:rPr>
               <a:t>Category</a:t>
             </a:r>
-            <a:endParaRPr lang="en-US" sz="1100" dirty="0"/>
+            <a:endParaRPr lang="en-US" sz="1200" b="1" dirty="0">
+              <a:solidFill>
+                <a:srgbClr val="FFFFFF"/>
+              </a:solidFill>
+              <a:latin typeface="Calibri" panose="020F0502020204030204" pitchFamily="34" charset="0"/>
+              <a:ea typeface="Calibri" panose="020F0502020204030204" pitchFamily="34" charset="-122"/>
+              <a:cs typeface="Calibri" panose="020F0502020204030204" pitchFamily="34" charset="-120"/>
+            </a:endParaRPr>
           </a:p>
         </p:txBody>
       </p:sp>
@@ -11788,7 +12522,7 @@
               <a:buNone/>
             </a:pPr>
             <a:r>
-              <a:rPr lang="en-US" sz="1100" b="1" dirty="0">
+              <a:rPr lang="en-US" sz="1200" b="1" dirty="0">
                 <a:solidFill>
                   <a:srgbClr val="FFFFFF"/>
                 </a:solidFill>
@@ -11798,7 +12532,14 @@
               </a:rPr>
               <a:t>Features</a:t>
             </a:r>
-            <a:endParaRPr lang="en-US" sz="1100" dirty="0"/>
+            <a:endParaRPr lang="en-US" sz="1200" b="1" dirty="0">
+              <a:solidFill>
+                <a:srgbClr val="FFFFFF"/>
+              </a:solidFill>
+              <a:latin typeface="Calibri" panose="020F0502020204030204" pitchFamily="34" charset="0"/>
+              <a:ea typeface="Calibri" panose="020F0502020204030204" pitchFamily="34" charset="-122"/>
+              <a:cs typeface="Calibri" panose="020F0502020204030204" pitchFamily="34" charset="-120"/>
+            </a:endParaRPr>
           </a:p>
         </p:txBody>
       </p:sp>
@@ -11826,7 +12567,7 @@
               <a:buNone/>
             </a:pPr>
             <a:r>
-              <a:rPr lang="en-US" sz="1100" b="1" dirty="0">
+              <a:rPr lang="en-US" sz="1200" b="1" dirty="0">
                 <a:solidFill>
                   <a:srgbClr val="FFFFFF"/>
                 </a:solidFill>
@@ -11836,7 +12577,14 @@
               </a:rPr>
               <a:t>Example Features</a:t>
             </a:r>
-            <a:endParaRPr lang="en-US" sz="1100" dirty="0"/>
+            <a:endParaRPr lang="en-US" sz="1200" b="1" dirty="0">
+              <a:solidFill>
+                <a:srgbClr val="FFFFFF"/>
+              </a:solidFill>
+              <a:latin typeface="Calibri" panose="020F0502020204030204" pitchFamily="34" charset="0"/>
+              <a:ea typeface="Calibri" panose="020F0502020204030204" pitchFamily="34" charset="-122"/>
+              <a:cs typeface="Calibri" panose="020F0502020204030204" pitchFamily="34" charset="-120"/>
+            </a:endParaRPr>
           </a:p>
         </p:txBody>
       </p:sp>
@@ -11889,7 +12637,7 @@
               <a:buNone/>
             </a:pPr>
             <a:r>
-              <a:rPr lang="en-US" sz="1050" dirty="0">
+              <a:rPr lang="en-US" sz="1200" dirty="0">
                 <a:solidFill>
                   <a:srgbClr val="334155"/>
                 </a:solidFill>
@@ -11899,7 +12647,14 @@
               </a:rPr>
               <a:t>Customer Profile</a:t>
             </a:r>
-            <a:endParaRPr lang="en-US" sz="1050" dirty="0"/>
+            <a:endParaRPr lang="en-US" sz="1200" dirty="0">
+              <a:solidFill>
+                <a:srgbClr val="334155"/>
+              </a:solidFill>
+              <a:latin typeface="Calibri" panose="020F0502020204030204" pitchFamily="34" charset="0"/>
+              <a:ea typeface="Calibri" panose="020F0502020204030204" pitchFamily="34" charset="-122"/>
+              <a:cs typeface="Calibri" panose="020F0502020204030204" pitchFamily="34" charset="-120"/>
+            </a:endParaRPr>
           </a:p>
         </p:txBody>
       </p:sp>
@@ -11952,7 +12707,7 @@
               <a:buNone/>
             </a:pPr>
             <a:r>
-              <a:rPr lang="en-US" sz="950" b="1" dirty="0">
+              <a:rPr lang="en-US" sz="1050" b="1" dirty="0">
                 <a:solidFill>
                   <a:srgbClr val="FFFFFF"/>
                 </a:solidFill>
@@ -11962,7 +12717,14 @@
               </a:rPr>
               <a:t>12</a:t>
             </a:r>
-            <a:endParaRPr lang="en-US" sz="950" dirty="0"/>
+            <a:endParaRPr lang="en-US" sz="1050" b="1" dirty="0">
+              <a:solidFill>
+                <a:srgbClr val="FFFFFF"/>
+              </a:solidFill>
+              <a:latin typeface="Calibri" panose="020F0502020204030204" pitchFamily="34" charset="0"/>
+              <a:ea typeface="Calibri" panose="020F0502020204030204" pitchFamily="34" charset="-122"/>
+              <a:cs typeface="Calibri" panose="020F0502020204030204" pitchFamily="34" charset="-120"/>
+            </a:endParaRPr>
           </a:p>
         </p:txBody>
       </p:sp>
@@ -11990,9 +12752,11 @@
               <a:buNone/>
             </a:pPr>
             <a:r>
-              <a:rPr lang="en-US" sz="1000" i="1" dirty="0">
-                <a:solidFill>
-                  <a:srgbClr val="94A3B8"/>
+              <a:rPr lang="en-US" sz="1200" i="1" dirty="0">
+                <a:solidFill>
+                  <a:schemeClr val="bg1">
+                    <a:lumMod val="50000"/>
+                  </a:schemeClr>
                 </a:solidFill>
                 <a:latin typeface="Calibri" panose="020F0502020204030204" pitchFamily="34" charset="0"/>
                 <a:ea typeface="Calibri" panose="020F0502020204030204" pitchFamily="34" charset="-122"/>
@@ -12000,7 +12764,16 @@
               </a:rPr>
               <a:t>age, gender, annual_income, city_tier</a:t>
             </a:r>
-            <a:endParaRPr lang="en-US" sz="1000" dirty="0"/>
+            <a:endParaRPr lang="en-US" sz="1200" i="1" dirty="0">
+              <a:solidFill>
+                <a:schemeClr val="bg1">
+                  <a:lumMod val="50000"/>
+                </a:schemeClr>
+              </a:solidFill>
+              <a:latin typeface="Calibri" panose="020F0502020204030204" pitchFamily="34" charset="0"/>
+              <a:ea typeface="Calibri" panose="020F0502020204030204" pitchFamily="34" charset="-122"/>
+              <a:cs typeface="Calibri" panose="020F0502020204030204" pitchFamily="34" charset="-120"/>
+            </a:endParaRPr>
           </a:p>
         </p:txBody>
       </p:sp>
@@ -12053,7 +12826,7 @@
               <a:buNone/>
             </a:pPr>
             <a:r>
-              <a:rPr lang="en-US" sz="1050" dirty="0">
+              <a:rPr lang="en-US" sz="1200" dirty="0">
                 <a:solidFill>
                   <a:srgbClr val="334155"/>
                 </a:solidFill>
@@ -12063,7 +12836,14 @@
               </a:rPr>
               <a:t>Relationship &amp; Tenure</a:t>
             </a:r>
-            <a:endParaRPr lang="en-US" sz="1050" dirty="0"/>
+            <a:endParaRPr lang="en-US" sz="1200" dirty="0">
+              <a:solidFill>
+                <a:srgbClr val="334155"/>
+              </a:solidFill>
+              <a:latin typeface="Calibri" panose="020F0502020204030204" pitchFamily="34" charset="0"/>
+              <a:ea typeface="Calibri" panose="020F0502020204030204" pitchFamily="34" charset="-122"/>
+              <a:cs typeface="Calibri" panose="020F0502020204030204" pitchFamily="34" charset="-120"/>
+            </a:endParaRPr>
           </a:p>
         </p:txBody>
       </p:sp>
@@ -12116,7 +12896,7 @@
               <a:buNone/>
             </a:pPr>
             <a:r>
-              <a:rPr lang="en-US" sz="950" b="1" dirty="0">
+              <a:rPr lang="en-US" sz="1050" b="1" dirty="0">
                 <a:solidFill>
                   <a:srgbClr val="FFFFFF"/>
                 </a:solidFill>
@@ -12126,7 +12906,14 @@
               </a:rPr>
               <a:t>10</a:t>
             </a:r>
-            <a:endParaRPr lang="en-US" sz="950" dirty="0"/>
+            <a:endParaRPr lang="en-US" sz="1050" b="1" dirty="0">
+              <a:solidFill>
+                <a:srgbClr val="FFFFFF"/>
+              </a:solidFill>
+              <a:latin typeface="Calibri" panose="020F0502020204030204" pitchFamily="34" charset="0"/>
+              <a:ea typeface="Calibri" panose="020F0502020204030204" pitchFamily="34" charset="-122"/>
+              <a:cs typeface="Calibri" panose="020F0502020204030204" pitchFamily="34" charset="-120"/>
+            </a:endParaRPr>
           </a:p>
         </p:txBody>
       </p:sp>
@@ -12154,9 +12941,11 @@
               <a:buNone/>
             </a:pPr>
             <a:r>
-              <a:rPr lang="en-US" sz="1000" i="1" dirty="0">
-                <a:solidFill>
-                  <a:srgbClr val="94A3B8"/>
+              <a:rPr lang="en-US" sz="1200" i="1" dirty="0">
+                <a:solidFill>
+                  <a:schemeClr val="bg1">
+                    <a:lumMod val="50000"/>
+                  </a:schemeClr>
                 </a:solidFill>
                 <a:latin typeface="Calibri" panose="020F0502020204030204" pitchFamily="34" charset="0"/>
                 <a:ea typeface="Calibri" panose="020F0502020204030204" pitchFamily="34" charset="-122"/>
@@ -12164,7 +12953,16 @@
               </a:rPr>
               <a:t>tenure_months, customer_lifetime_value</a:t>
             </a:r>
-            <a:endParaRPr lang="en-US" sz="1000" dirty="0"/>
+            <a:endParaRPr lang="en-US" sz="1200" i="1" dirty="0">
+              <a:solidFill>
+                <a:schemeClr val="bg1">
+                  <a:lumMod val="50000"/>
+                </a:schemeClr>
+              </a:solidFill>
+              <a:latin typeface="Calibri" panose="020F0502020204030204" pitchFamily="34" charset="0"/>
+              <a:ea typeface="Calibri" panose="020F0502020204030204" pitchFamily="34" charset="-122"/>
+              <a:cs typeface="Calibri" panose="020F0502020204030204" pitchFamily="34" charset="-120"/>
+            </a:endParaRPr>
           </a:p>
         </p:txBody>
       </p:sp>
@@ -12217,7 +13015,7 @@
               <a:buNone/>
             </a:pPr>
             <a:r>
-              <a:rPr lang="en-US" sz="1050" dirty="0">
+              <a:rPr lang="en-US" sz="1200" dirty="0">
                 <a:solidFill>
                   <a:srgbClr val="334155"/>
                 </a:solidFill>
@@ -12227,7 +13025,14 @@
               </a:rPr>
               <a:t>Account &amp; Transaction</a:t>
             </a:r>
-            <a:endParaRPr lang="en-US" sz="1050" dirty="0"/>
+            <a:endParaRPr lang="en-US" sz="1200" dirty="0">
+              <a:solidFill>
+                <a:srgbClr val="334155"/>
+              </a:solidFill>
+              <a:latin typeface="Calibri" panose="020F0502020204030204" pitchFamily="34" charset="0"/>
+              <a:ea typeface="Calibri" panose="020F0502020204030204" pitchFamily="34" charset="-122"/>
+              <a:cs typeface="Calibri" panose="020F0502020204030204" pitchFamily="34" charset="-120"/>
+            </a:endParaRPr>
           </a:p>
         </p:txBody>
       </p:sp>
@@ -12318,9 +13123,11 @@
               <a:buNone/>
             </a:pPr>
             <a:r>
-              <a:rPr lang="en-US" sz="1000" i="1" dirty="0">
-                <a:solidFill>
-                  <a:srgbClr val="94A3B8"/>
+              <a:rPr lang="en-US" sz="1200" i="1" dirty="0">
+                <a:solidFill>
+                  <a:schemeClr val="bg1">
+                    <a:lumMod val="50000"/>
+                  </a:schemeClr>
                 </a:solidFill>
                 <a:latin typeface="Calibri" panose="020F0502020204030204" pitchFamily="34" charset="0"/>
                 <a:ea typeface="Calibri" panose="020F0502020204030204" pitchFamily="34" charset="-122"/>
@@ -12328,7 +13135,16 @@
               </a:rPr>
               <a:t>avg_monthly_balance, balance_decline_%</a:t>
             </a:r>
-            <a:endParaRPr lang="en-US" sz="1000" dirty="0"/>
+            <a:endParaRPr lang="en-US" sz="1200" i="1" dirty="0">
+              <a:solidFill>
+                <a:schemeClr val="bg1">
+                  <a:lumMod val="50000"/>
+                </a:schemeClr>
+              </a:solidFill>
+              <a:latin typeface="Calibri" panose="020F0502020204030204" pitchFamily="34" charset="0"/>
+              <a:ea typeface="Calibri" panose="020F0502020204030204" pitchFamily="34" charset="-122"/>
+              <a:cs typeface="Calibri" panose="020F0502020204030204" pitchFamily="34" charset="-120"/>
+            </a:endParaRPr>
           </a:p>
         </p:txBody>
       </p:sp>
@@ -12381,7 +13197,7 @@
               <a:buNone/>
             </a:pPr>
             <a:r>
-              <a:rPr lang="en-US" sz="1050" dirty="0">
+              <a:rPr lang="en-US" sz="1200" dirty="0">
                 <a:solidFill>
                   <a:srgbClr val="334155"/>
                 </a:solidFill>
@@ -12391,7 +13207,14 @@
               </a:rPr>
               <a:t>Product Holding</a:t>
             </a:r>
-            <a:endParaRPr lang="en-US" sz="1050" dirty="0"/>
+            <a:endParaRPr lang="en-US" sz="1200" dirty="0">
+              <a:solidFill>
+                <a:srgbClr val="334155"/>
+              </a:solidFill>
+              <a:latin typeface="Calibri" panose="020F0502020204030204" pitchFamily="34" charset="0"/>
+              <a:ea typeface="Calibri" panose="020F0502020204030204" pitchFamily="34" charset="-122"/>
+              <a:cs typeface="Calibri" panose="020F0502020204030204" pitchFamily="34" charset="-120"/>
+            </a:endParaRPr>
           </a:p>
         </p:txBody>
       </p:sp>
@@ -12444,7 +13267,7 @@
               <a:buNone/>
             </a:pPr>
             <a:r>
-              <a:rPr lang="en-US" sz="950" b="1" dirty="0">
+              <a:rPr lang="en-US" sz="1050" b="1" dirty="0">
                 <a:solidFill>
                   <a:srgbClr val="FFFFFF"/>
                 </a:solidFill>
@@ -12454,7 +13277,14 @@
               </a:rPr>
               <a:t>10</a:t>
             </a:r>
-            <a:endParaRPr lang="en-US" sz="950" dirty="0"/>
+            <a:endParaRPr lang="en-US" sz="1050" b="1" dirty="0">
+              <a:solidFill>
+                <a:srgbClr val="FFFFFF"/>
+              </a:solidFill>
+              <a:latin typeface="Calibri" panose="020F0502020204030204" pitchFamily="34" charset="0"/>
+              <a:ea typeface="Calibri" panose="020F0502020204030204" pitchFamily="34" charset="-122"/>
+              <a:cs typeface="Calibri" panose="020F0502020204030204" pitchFamily="34" charset="-120"/>
+            </a:endParaRPr>
           </a:p>
         </p:txBody>
       </p:sp>
@@ -12482,9 +13312,11 @@
               <a:buNone/>
             </a:pPr>
             <a:r>
-              <a:rPr lang="en-US" sz="1000" i="1" dirty="0">
-                <a:solidFill>
-                  <a:srgbClr val="94A3B8"/>
+              <a:rPr lang="en-US" sz="1200" i="1" dirty="0">
+                <a:solidFill>
+                  <a:schemeClr val="bg1">
+                    <a:lumMod val="50000"/>
+                  </a:schemeClr>
                 </a:solidFill>
                 <a:latin typeface="Calibri" panose="020F0502020204030204" pitchFamily="34" charset="0"/>
                 <a:ea typeface="Calibri" panose="020F0502020204030204" pitchFamily="34" charset="-122"/>
@@ -12492,7 +13324,16 @@
               </a:rPr>
               <a:t>credit_card_flag, home_loan_flag</a:t>
             </a:r>
-            <a:endParaRPr lang="en-US" sz="1000" dirty="0"/>
+            <a:endParaRPr lang="en-US" sz="1200" i="1" dirty="0">
+              <a:solidFill>
+                <a:schemeClr val="bg1">
+                  <a:lumMod val="50000"/>
+                </a:schemeClr>
+              </a:solidFill>
+              <a:latin typeface="Calibri" panose="020F0502020204030204" pitchFamily="34" charset="0"/>
+              <a:ea typeface="Calibri" panose="020F0502020204030204" pitchFamily="34" charset="-122"/>
+              <a:cs typeface="Calibri" panose="020F0502020204030204" pitchFamily="34" charset="-120"/>
+            </a:endParaRPr>
           </a:p>
         </p:txBody>
       </p:sp>
@@ -12545,7 +13386,7 @@
               <a:buNone/>
             </a:pPr>
             <a:r>
-              <a:rPr lang="en-US" sz="1050" dirty="0">
+              <a:rPr lang="en-US" sz="1200" dirty="0">
                 <a:solidFill>
                   <a:srgbClr val="334155"/>
                 </a:solidFill>
@@ -12555,7 +13396,14 @@
               </a:rPr>
               <a:t>Credit Card &amp; Loan</a:t>
             </a:r>
-            <a:endParaRPr lang="en-US" sz="1050" dirty="0"/>
+            <a:endParaRPr lang="en-US" sz="1200" dirty="0">
+              <a:solidFill>
+                <a:srgbClr val="334155"/>
+              </a:solidFill>
+              <a:latin typeface="Calibri" panose="020F0502020204030204" pitchFamily="34" charset="0"/>
+              <a:ea typeface="Calibri" panose="020F0502020204030204" pitchFamily="34" charset="-122"/>
+              <a:cs typeface="Calibri" panose="020F0502020204030204" pitchFamily="34" charset="-120"/>
+            </a:endParaRPr>
           </a:p>
         </p:txBody>
       </p:sp>
@@ -12608,7 +13456,7 @@
               <a:buNone/>
             </a:pPr>
             <a:r>
-              <a:rPr lang="en-US" sz="950" b="1" dirty="0">
+              <a:rPr lang="en-US" sz="1050" b="1" dirty="0">
                 <a:solidFill>
                   <a:srgbClr val="FFFFFF"/>
                 </a:solidFill>
@@ -12618,7 +13466,14 @@
               </a:rPr>
               <a:t>10</a:t>
             </a:r>
-            <a:endParaRPr lang="en-US" sz="950" dirty="0"/>
+            <a:endParaRPr lang="en-US" sz="1050" b="1" dirty="0">
+              <a:solidFill>
+                <a:srgbClr val="FFFFFF"/>
+              </a:solidFill>
+              <a:latin typeface="Calibri" panose="020F0502020204030204" pitchFamily="34" charset="0"/>
+              <a:ea typeface="Calibri" panose="020F0502020204030204" pitchFamily="34" charset="-122"/>
+              <a:cs typeface="Calibri" panose="020F0502020204030204" pitchFamily="34" charset="-120"/>
+            </a:endParaRPr>
           </a:p>
         </p:txBody>
       </p:sp>
@@ -12646,9 +13501,11 @@
               <a:buNone/>
             </a:pPr>
             <a:r>
-              <a:rPr lang="en-US" sz="1000" i="1" dirty="0">
-                <a:solidFill>
-                  <a:srgbClr val="94A3B8"/>
+              <a:rPr lang="en-US" sz="1200" i="1" dirty="0">
+                <a:solidFill>
+                  <a:schemeClr val="bg1">
+                    <a:lumMod val="50000"/>
+                  </a:schemeClr>
                 </a:solidFill>
                 <a:latin typeface="Calibri" panose="020F0502020204030204" pitchFamily="34" charset="0"/>
                 <a:ea typeface="Calibri" panose="020F0502020204030204" pitchFamily="34" charset="-122"/>
@@ -12656,7 +13513,16 @@
               </a:rPr>
               <a:t>credit_utilization_ratio, loan_default_risk</a:t>
             </a:r>
-            <a:endParaRPr lang="en-US" sz="1000" dirty="0"/>
+            <a:endParaRPr lang="en-US" sz="1200" i="1" dirty="0">
+              <a:solidFill>
+                <a:schemeClr val="bg1">
+                  <a:lumMod val="50000"/>
+                </a:schemeClr>
+              </a:solidFill>
+              <a:latin typeface="Calibri" panose="020F0502020204030204" pitchFamily="34" charset="0"/>
+              <a:ea typeface="Calibri" panose="020F0502020204030204" pitchFamily="34" charset="-122"/>
+              <a:cs typeface="Calibri" panose="020F0502020204030204" pitchFamily="34" charset="-120"/>
+            </a:endParaRPr>
           </a:p>
         </p:txBody>
       </p:sp>
@@ -12709,7 +13575,7 @@
               <a:buNone/>
             </a:pPr>
             <a:r>
-              <a:rPr lang="en-US" sz="1050" dirty="0">
+              <a:rPr lang="en-US" sz="1200" dirty="0">
                 <a:solidFill>
                   <a:srgbClr val="334155"/>
                 </a:solidFill>
@@ -12719,7 +13585,14 @@
               </a:rPr>
               <a:t>Digital Banking</a:t>
             </a:r>
-            <a:endParaRPr lang="en-US" sz="1050" dirty="0"/>
+            <a:endParaRPr lang="en-US" sz="1200" dirty="0">
+              <a:solidFill>
+                <a:srgbClr val="334155"/>
+              </a:solidFill>
+              <a:latin typeface="Calibri" panose="020F0502020204030204" pitchFamily="34" charset="0"/>
+              <a:ea typeface="Calibri" panose="020F0502020204030204" pitchFamily="34" charset="-122"/>
+              <a:cs typeface="Calibri" panose="020F0502020204030204" pitchFamily="34" charset="-120"/>
+            </a:endParaRPr>
           </a:p>
         </p:txBody>
       </p:sp>
@@ -12772,7 +13645,7 @@
               <a:buNone/>
             </a:pPr>
             <a:r>
-              <a:rPr lang="en-US" sz="950" b="1" dirty="0">
+              <a:rPr lang="en-US" sz="1050" b="1" dirty="0">
                 <a:solidFill>
                   <a:srgbClr val="FFFFFF"/>
                 </a:solidFill>
@@ -12810,9 +13683,11 @@
               <a:buNone/>
             </a:pPr>
             <a:r>
-              <a:rPr lang="en-US" sz="1000" i="1" dirty="0">
-                <a:solidFill>
-                  <a:srgbClr val="94A3B8"/>
+              <a:rPr lang="en-US" sz="1200" i="1" dirty="0">
+                <a:solidFill>
+                  <a:schemeClr val="bg1">
+                    <a:lumMod val="50000"/>
+                  </a:schemeClr>
                 </a:solidFill>
                 <a:latin typeface="Calibri" panose="020F0502020204030204" pitchFamily="34" charset="0"/>
                 <a:ea typeface="Calibri" panose="020F0502020204030204" pitchFamily="34" charset="-122"/>
@@ -12820,7 +13695,16 @@
               </a:rPr>
               <a:t>mobile_app_logins, digital_txn_ratio</a:t>
             </a:r>
-            <a:endParaRPr lang="en-US" sz="1000" dirty="0"/>
+            <a:endParaRPr lang="en-US" sz="1200" i="1" dirty="0">
+              <a:solidFill>
+                <a:schemeClr val="bg1">
+                  <a:lumMod val="50000"/>
+                </a:schemeClr>
+              </a:solidFill>
+              <a:latin typeface="Calibri" panose="020F0502020204030204" pitchFamily="34" charset="0"/>
+              <a:ea typeface="Calibri" panose="020F0502020204030204" pitchFamily="34" charset="-122"/>
+              <a:cs typeface="Calibri" panose="020F0502020204030204" pitchFamily="34" charset="-120"/>
+            </a:endParaRPr>
           </a:p>
         </p:txBody>
       </p:sp>
@@ -12873,7 +13757,7 @@
               <a:buNone/>
             </a:pPr>
             <a:r>
-              <a:rPr lang="en-US" sz="1050" dirty="0">
+              <a:rPr lang="en-US" sz="1200" dirty="0">
                 <a:solidFill>
                   <a:srgbClr val="334155"/>
                 </a:solidFill>
@@ -12883,7 +13767,14 @@
               </a:rPr>
               <a:t>Service &amp; Complaints</a:t>
             </a:r>
-            <a:endParaRPr lang="en-US" sz="1050" dirty="0"/>
+            <a:endParaRPr lang="en-US" sz="1200" dirty="0">
+              <a:solidFill>
+                <a:srgbClr val="334155"/>
+              </a:solidFill>
+              <a:latin typeface="Calibri" panose="020F0502020204030204" pitchFamily="34" charset="0"/>
+              <a:ea typeface="Calibri" panose="020F0502020204030204" pitchFamily="34" charset="-122"/>
+              <a:cs typeface="Calibri" panose="020F0502020204030204" pitchFamily="34" charset="-120"/>
+            </a:endParaRPr>
           </a:p>
         </p:txBody>
       </p:sp>
@@ -12936,7 +13827,7 @@
               <a:buNone/>
             </a:pPr>
             <a:r>
-              <a:rPr lang="en-US" sz="950" b="1" dirty="0">
+              <a:rPr lang="en-US" sz="1050" b="1" dirty="0">
                 <a:solidFill>
                   <a:srgbClr val="FFFFFF"/>
                 </a:solidFill>
@@ -12946,7 +13837,14 @@
               </a:rPr>
               <a:t>10</a:t>
             </a:r>
-            <a:endParaRPr lang="en-US" sz="950" dirty="0"/>
+            <a:endParaRPr lang="en-US" sz="1050" b="1" dirty="0">
+              <a:solidFill>
+                <a:srgbClr val="FFFFFF"/>
+              </a:solidFill>
+              <a:latin typeface="Calibri" panose="020F0502020204030204" pitchFamily="34" charset="0"/>
+              <a:ea typeface="Calibri" panose="020F0502020204030204" pitchFamily="34" charset="-122"/>
+              <a:cs typeface="Calibri" panose="020F0502020204030204" pitchFamily="34" charset="-120"/>
+            </a:endParaRPr>
           </a:p>
         </p:txBody>
       </p:sp>
@@ -12974,9 +13872,11 @@
               <a:buNone/>
             </a:pPr>
             <a:r>
-              <a:rPr lang="en-US" sz="1000" i="1" dirty="0">
-                <a:solidFill>
-                  <a:srgbClr val="94A3B8"/>
+              <a:rPr lang="en-US" sz="1200" i="1" dirty="0">
+                <a:solidFill>
+                  <a:schemeClr val="bg1">
+                    <a:lumMod val="50000"/>
+                  </a:schemeClr>
                 </a:solidFill>
                 <a:latin typeface="Calibri" panose="020F0502020204030204" pitchFamily="34" charset="0"/>
                 <a:ea typeface="Calibri" panose="020F0502020204030204" pitchFamily="34" charset="-122"/>
@@ -12984,7 +13884,16 @@
               </a:rPr>
               <a:t>total_complaints, satisfaction_score</a:t>
             </a:r>
-            <a:endParaRPr lang="en-US" sz="1000" dirty="0"/>
+            <a:endParaRPr lang="en-US" sz="1200" i="1" dirty="0">
+              <a:solidFill>
+                <a:schemeClr val="bg1">
+                  <a:lumMod val="50000"/>
+                </a:schemeClr>
+              </a:solidFill>
+              <a:latin typeface="Calibri" panose="020F0502020204030204" pitchFamily="34" charset="0"/>
+              <a:ea typeface="Calibri" panose="020F0502020204030204" pitchFamily="34" charset="-122"/>
+              <a:cs typeface="Calibri" panose="020F0502020204030204" pitchFamily="34" charset="-120"/>
+            </a:endParaRPr>
           </a:p>
         </p:txBody>
       </p:sp>
@@ -13037,7 +13946,7 @@
               <a:buNone/>
             </a:pPr>
             <a:r>
-              <a:rPr lang="en-US" sz="1050" dirty="0">
+              <a:rPr lang="en-US" sz="1200" dirty="0">
                 <a:solidFill>
                   <a:srgbClr val="334155"/>
                 </a:solidFill>
@@ -13047,7 +13956,14 @@
               </a:rPr>
               <a:t>Marketing &amp; Retention</a:t>
             </a:r>
-            <a:endParaRPr lang="en-US" sz="1050" dirty="0"/>
+            <a:endParaRPr lang="en-US" sz="1200" dirty="0">
+              <a:solidFill>
+                <a:srgbClr val="334155"/>
+              </a:solidFill>
+              <a:latin typeface="Calibri" panose="020F0502020204030204" pitchFamily="34" charset="0"/>
+              <a:ea typeface="Calibri" panose="020F0502020204030204" pitchFamily="34" charset="-122"/>
+              <a:cs typeface="Calibri" panose="020F0502020204030204" pitchFamily="34" charset="-120"/>
+            </a:endParaRPr>
           </a:p>
         </p:txBody>
       </p:sp>
@@ -13100,7 +14016,7 @@
               <a:buNone/>
             </a:pPr>
             <a:r>
-              <a:rPr lang="en-US" sz="950" b="1" dirty="0">
+              <a:rPr lang="en-US" sz="1050" b="1" dirty="0">
                 <a:solidFill>
                   <a:srgbClr val="FFFFFF"/>
                 </a:solidFill>
@@ -13110,7 +14026,14 @@
               </a:rPr>
               <a:t>10</a:t>
             </a:r>
-            <a:endParaRPr lang="en-US" sz="950" dirty="0"/>
+            <a:endParaRPr lang="en-US" sz="1050" b="1" dirty="0">
+              <a:solidFill>
+                <a:srgbClr val="FFFFFF"/>
+              </a:solidFill>
+              <a:latin typeface="Calibri" panose="020F0502020204030204" pitchFamily="34" charset="0"/>
+              <a:ea typeface="Calibri" panose="020F0502020204030204" pitchFamily="34" charset="-122"/>
+              <a:cs typeface="Calibri" panose="020F0502020204030204" pitchFamily="34" charset="-120"/>
+            </a:endParaRPr>
           </a:p>
         </p:txBody>
       </p:sp>
@@ -13138,9 +14061,11 @@
               <a:buNone/>
             </a:pPr>
             <a:r>
-              <a:rPr lang="en-US" sz="1000" i="1" dirty="0">
-                <a:solidFill>
-                  <a:srgbClr val="94A3B8"/>
+              <a:rPr lang="en-US" sz="1200" i="1" dirty="0">
+                <a:solidFill>
+                  <a:schemeClr val="bg1">
+                    <a:lumMod val="50000"/>
+                  </a:schemeClr>
                 </a:solidFill>
                 <a:latin typeface="Calibri" panose="020F0502020204030204" pitchFamily="34" charset="0"/>
                 <a:ea typeface="Calibri" panose="020F0502020204030204" pitchFamily="34" charset="-122"/>
@@ -13148,7 +14073,16 @@
               </a:rPr>
               <a:t>campaign_received, retention_offer_accepted</a:t>
             </a:r>
-            <a:endParaRPr lang="en-US" sz="1000" dirty="0"/>
+            <a:endParaRPr lang="en-US" sz="1200" i="1" dirty="0">
+              <a:solidFill>
+                <a:schemeClr val="bg1">
+                  <a:lumMod val="50000"/>
+                </a:schemeClr>
+              </a:solidFill>
+              <a:latin typeface="Calibri" panose="020F0502020204030204" pitchFamily="34" charset="0"/>
+              <a:ea typeface="Calibri" panose="020F0502020204030204" pitchFamily="34" charset="-122"/>
+              <a:cs typeface="Calibri" panose="020F0502020204030204" pitchFamily="34" charset="-120"/>
+            </a:endParaRPr>
           </a:p>
         </p:txBody>
       </p:sp>
@@ -13256,7 +14190,7 @@
         </p:nvSpPr>
         <p:spPr>
           <a:xfrm>
-            <a:off x="0" y="777240"/>
+            <a:off x="-7620" y="792480"/>
             <a:ext cx="9144000" cy="54864"/>
           </a:xfrm>
           <a:prstGeom prst="rect">
@@ -13281,7 +14215,7 @@
         </p:nvSpPr>
         <p:spPr>
           <a:xfrm>
-            <a:off x="441960" y="86868"/>
+            <a:off x="441960" y="48768"/>
             <a:ext cx="7315200" cy="502920"/>
           </a:xfrm>
           <a:prstGeom prst="rect">
@@ -13319,7 +14253,7 @@
         </p:nvSpPr>
         <p:spPr>
           <a:xfrm>
-            <a:off x="457200" y="489204"/>
+            <a:off x="464820" y="458724"/>
             <a:ext cx="7315200" cy="292608"/>
           </a:xfrm>
           <a:prstGeom prst="rect">
@@ -13430,7 +14364,7 @@
               <a:buNone/>
             </a:pPr>
             <a:r>
-              <a:rPr lang="en-US" sz="1300" b="1" dirty="0">
+              <a:rPr lang="en-US" sz="1600" b="1" dirty="0">
                 <a:solidFill>
                   <a:srgbClr val="0F1B2D"/>
                 </a:solidFill>
@@ -13440,7 +14374,14 @@
               </a:rPr>
               <a:t>Class Imbalance</a:t>
             </a:r>
-            <a:endParaRPr lang="en-US" sz="1300" dirty="0"/>
+            <a:endParaRPr lang="en-US" sz="1600" b="1" dirty="0">
+              <a:solidFill>
+                <a:srgbClr val="0F1B2D"/>
+              </a:solidFill>
+              <a:latin typeface="Calibri" panose="020F0502020204030204" pitchFamily="34" charset="0"/>
+              <a:ea typeface="Calibri" panose="020F0502020204030204" pitchFamily="34" charset="-122"/>
+              <a:cs typeface="Calibri" panose="020F0502020204030204" pitchFamily="34" charset="-120"/>
+            </a:endParaRPr>
           </a:p>
         </p:txBody>
       </p:sp>
@@ -13471,7 +14412,7 @@
               <a:buNone/>
             </a:pPr>
             <a:r>
-              <a:rPr lang="en-US" sz="1150" dirty="0">
+              <a:rPr lang="en-US" sz="1400" dirty="0">
                 <a:solidFill>
                   <a:srgbClr val="334155"/>
                 </a:solidFill>
@@ -13481,7 +14422,14 @@
               </a:rPr>
               <a:t>~20% churn rate — heavily imbalanced dataset. PR-AUC used as primary metric (robust to imbalance vs accuracy).</a:t>
             </a:r>
-            <a:endParaRPr lang="en-US" sz="1150" dirty="0"/>
+            <a:endParaRPr lang="en-US" sz="1400" dirty="0">
+              <a:solidFill>
+                <a:srgbClr val="334155"/>
+              </a:solidFill>
+              <a:latin typeface="Calibri" panose="020F0502020204030204" pitchFamily="34" charset="0"/>
+              <a:ea typeface="Calibri" panose="020F0502020204030204" pitchFamily="34" charset="-122"/>
+              <a:cs typeface="Calibri" panose="020F0502020204030204" pitchFamily="34" charset="-120"/>
+            </a:endParaRPr>
           </a:p>
         </p:txBody>
       </p:sp>
@@ -13566,7 +14514,7 @@
               <a:buNone/>
             </a:pPr>
             <a:r>
-              <a:rPr lang="en-US" sz="1300" b="1" dirty="0">
+              <a:rPr lang="en-US" sz="1600" b="1" dirty="0">
                 <a:solidFill>
                   <a:srgbClr val="0F1B2D"/>
                 </a:solidFill>
@@ -13576,7 +14524,14 @@
               </a:rPr>
               <a:t>Transaction Activity (Imp: 0.212)</a:t>
             </a:r>
-            <a:endParaRPr lang="en-US" sz="1300" dirty="0"/>
+            <a:endParaRPr lang="en-US" sz="1600" b="1" dirty="0">
+              <a:solidFill>
+                <a:srgbClr val="0F1B2D"/>
+              </a:solidFill>
+              <a:latin typeface="Calibri" panose="020F0502020204030204" pitchFamily="34" charset="0"/>
+              <a:ea typeface="Calibri" panose="020F0502020204030204" pitchFamily="34" charset="-122"/>
+              <a:cs typeface="Calibri" panose="020F0502020204030204" pitchFamily="34" charset="-120"/>
+            </a:endParaRPr>
           </a:p>
         </p:txBody>
       </p:sp>
@@ -13588,7 +14543,7 @@
         </p:nvSpPr>
         <p:spPr>
           <a:xfrm>
-            <a:off x="4937760" y="1405128"/>
+            <a:off x="4937760" y="1519428"/>
             <a:ext cx="3794760" cy="1143000"/>
           </a:xfrm>
           <a:prstGeom prst="rect">
@@ -13607,7 +14562,7 @@
               <a:buNone/>
             </a:pPr>
             <a:r>
-              <a:rPr lang="en-US" sz="1150" dirty="0">
+              <a:rPr lang="en-US" sz="1400" dirty="0">
                 <a:solidFill>
                   <a:srgbClr val="334155"/>
                 </a:solidFill>
@@ -13617,7 +14572,14 @@
               </a:rPr>
               <a:t>monthly_transaction_count and total_digital_logins (0.202) are the top two predictors. Low activity strongly signals churn intent.</a:t>
             </a:r>
-            <a:endParaRPr lang="en-US" sz="1150" dirty="0"/>
+            <a:endParaRPr lang="en-US" sz="1400" dirty="0">
+              <a:solidFill>
+                <a:srgbClr val="334155"/>
+              </a:solidFill>
+              <a:latin typeface="Calibri" panose="020F0502020204030204" pitchFamily="34" charset="0"/>
+              <a:ea typeface="Calibri" panose="020F0502020204030204" pitchFamily="34" charset="-122"/>
+              <a:cs typeface="Calibri" panose="020F0502020204030204" pitchFamily="34" charset="-120"/>
+            </a:endParaRPr>
           </a:p>
         </p:txBody>
       </p:sp>
@@ -13702,7 +14664,7 @@
               <a:buNone/>
             </a:pPr>
             <a:r>
-              <a:rPr lang="en-US" sz="1300" b="1" dirty="0">
+              <a:rPr lang="en-US" sz="1600" b="1" dirty="0">
                 <a:solidFill>
                   <a:srgbClr val="0F1B2D"/>
                 </a:solidFill>
@@ -13712,7 +14674,14 @@
               </a:rPr>
               <a:t>Tenure &amp; Products</a:t>
             </a:r>
-            <a:endParaRPr lang="en-US" sz="1300" dirty="0"/>
+            <a:endParaRPr lang="en-US" sz="1600" b="1" dirty="0">
+              <a:solidFill>
+                <a:srgbClr val="0F1B2D"/>
+              </a:solidFill>
+              <a:latin typeface="Calibri" panose="020F0502020204030204" pitchFamily="34" charset="0"/>
+              <a:ea typeface="Calibri" panose="020F0502020204030204" pitchFamily="34" charset="-122"/>
+              <a:cs typeface="Calibri" panose="020F0502020204030204" pitchFamily="34" charset="-120"/>
+            </a:endParaRPr>
           </a:p>
         </p:txBody>
       </p:sp>
@@ -13743,7 +14712,7 @@
               <a:buNone/>
             </a:pPr>
             <a:r>
-              <a:rPr lang="en-US" sz="1150" dirty="0">
+              <a:rPr lang="en-US" sz="1400" dirty="0">
                 <a:solidFill>
                   <a:srgbClr val="334155"/>
                 </a:solidFill>
@@ -13753,7 +14722,14 @@
               </a:rPr>
               <a:t>Customers with shorter tenure (&lt;12 months) and single-product holding show significantly higher churn rates.</a:t>
             </a:r>
-            <a:endParaRPr lang="en-US" sz="1150" dirty="0"/>
+            <a:endParaRPr lang="en-US" sz="1400" dirty="0">
+              <a:solidFill>
+                <a:srgbClr val="334155"/>
+              </a:solidFill>
+              <a:latin typeface="Calibri" panose="020F0502020204030204" pitchFamily="34" charset="0"/>
+              <a:ea typeface="Calibri" panose="020F0502020204030204" pitchFamily="34" charset="-122"/>
+              <a:cs typeface="Calibri" panose="020F0502020204030204" pitchFamily="34" charset="-120"/>
+            </a:endParaRPr>
           </a:p>
         </p:txBody>
       </p:sp>
@@ -13838,7 +14814,7 @@
               <a:buNone/>
             </a:pPr>
             <a:r>
-              <a:rPr lang="en-US" sz="1300" b="1" dirty="0">
+              <a:rPr lang="en-US" sz="1600" b="1" dirty="0">
                 <a:solidFill>
                   <a:srgbClr val="0F1B2D"/>
                 </a:solidFill>
@@ -13848,7 +14824,14 @@
               </a:rPr>
               <a:t>RM Interaction &amp; Referrals</a:t>
             </a:r>
-            <a:endParaRPr lang="en-US" sz="1300" dirty="0"/>
+            <a:endParaRPr lang="en-US" sz="1600" b="1" dirty="0">
+              <a:solidFill>
+                <a:srgbClr val="0F1B2D"/>
+              </a:solidFill>
+              <a:latin typeface="Calibri" panose="020F0502020204030204" pitchFamily="34" charset="0"/>
+              <a:ea typeface="Calibri" panose="020F0502020204030204" pitchFamily="34" charset="-122"/>
+              <a:cs typeface="Calibri" panose="020F0502020204030204" pitchFamily="34" charset="-120"/>
+            </a:endParaRPr>
           </a:p>
         </p:txBody>
       </p:sp>
@@ -13879,7 +14862,7 @@
               <a:buNone/>
             </a:pPr>
             <a:r>
-              <a:rPr lang="en-US" sz="1150" dirty="0">
+              <a:rPr lang="en-US" sz="1400" dirty="0">
                 <a:solidFill>
                   <a:srgbClr val="334155"/>
                 </a:solidFill>
@@ -13889,7 +14872,14 @@
               </a:rPr>
               <a:t>relationship_manager_interaction_count (0.075) and referral_count (0.057) round out top 5. Low engagement flags low loyalty.</a:t>
             </a:r>
-            <a:endParaRPr lang="en-US" sz="1150" dirty="0"/>
+            <a:endParaRPr lang="en-US" sz="1400" dirty="0">
+              <a:solidFill>
+                <a:srgbClr val="334155"/>
+              </a:solidFill>
+              <a:latin typeface="Calibri" panose="020F0502020204030204" pitchFamily="34" charset="0"/>
+              <a:ea typeface="Calibri" panose="020F0502020204030204" pitchFamily="34" charset="-122"/>
+              <a:cs typeface="Calibri" panose="020F0502020204030204" pitchFamily="34" charset="-120"/>
+            </a:endParaRPr>
           </a:p>
         </p:txBody>
       </p:sp>
@@ -13997,7 +14987,7 @@
         </p:nvSpPr>
         <p:spPr>
           <a:xfrm>
-            <a:off x="0" y="777240"/>
+            <a:off x="0" y="792480"/>
             <a:ext cx="9144000" cy="54864"/>
           </a:xfrm>
           <a:prstGeom prst="rect">
@@ -14022,7 +15012,7 @@
         </p:nvSpPr>
         <p:spPr>
           <a:xfrm>
-            <a:off x="457200" y="79248"/>
+            <a:off x="449580" y="56388"/>
             <a:ext cx="6400800" cy="502920"/>
           </a:xfrm>
           <a:prstGeom prst="rect">
@@ -14060,7 +15050,7 @@
         </p:nvSpPr>
         <p:spPr>
           <a:xfrm>
-            <a:off x="464820" y="473964"/>
+            <a:off x="480060" y="458724"/>
             <a:ext cx="6400800" cy="292608"/>
           </a:xfrm>
           <a:prstGeom prst="rect">
@@ -14155,7 +15145,7 @@
         </p:nvSpPr>
         <p:spPr>
           <a:xfrm>
-            <a:off x="384048" y="1069848"/>
+            <a:off x="384048" y="1046988"/>
             <a:ext cx="384048" cy="274320"/>
           </a:xfrm>
           <a:prstGeom prst="rect">
@@ -14171,7 +15161,7 @@
               <a:buNone/>
             </a:pPr>
             <a:r>
-              <a:rPr lang="en-US" sz="1600" b="1" dirty="0">
+              <a:rPr lang="en-US" b="1" dirty="0">
                 <a:solidFill>
                   <a:srgbClr val="0D9488"/>
                 </a:solidFill>
@@ -14179,9 +15169,16 @@
                 <a:ea typeface="Georgia" panose="02040502050405020303" pitchFamily="34" charset="-122"/>
                 <a:cs typeface="Georgia" panose="02040502050405020303" pitchFamily="34" charset="-120"/>
               </a:rPr>
-              <a:t>01</a:t>
-            </a:r>
-            <a:endParaRPr lang="en-US" sz="1600" dirty="0"/>
+              <a:t>1</a:t>
+            </a:r>
+            <a:endParaRPr lang="en-US" b="1" dirty="0">
+              <a:solidFill>
+                <a:srgbClr val="0D9488"/>
+              </a:solidFill>
+              <a:latin typeface="Georgia" panose="02040502050405020303" pitchFamily="34" charset="0"/>
+              <a:ea typeface="Georgia" panose="02040502050405020303" pitchFamily="34" charset="-122"/>
+              <a:cs typeface="Georgia" panose="02040502050405020303" pitchFamily="34" charset="-120"/>
+            </a:endParaRPr>
           </a:p>
         </p:txBody>
       </p:sp>
@@ -14209,7 +15206,7 @@
               <a:buNone/>
             </a:pPr>
             <a:r>
-              <a:rPr lang="en-US" sz="1200" b="1" dirty="0">
+              <a:rPr lang="en-US" sz="1400" b="1" dirty="0">
                 <a:solidFill>
                   <a:srgbClr val="FFFFFF"/>
                 </a:solidFill>
@@ -14219,7 +15216,14 @@
               </a:rPr>
               <a:t>Leakage Audit &amp; Column Removal</a:t>
             </a:r>
-            <a:endParaRPr lang="en-US" sz="1200" dirty="0"/>
+            <a:endParaRPr lang="en-US" sz="1400" b="1" dirty="0">
+              <a:solidFill>
+                <a:srgbClr val="FFFFFF"/>
+              </a:solidFill>
+              <a:latin typeface="Calibri" panose="020F0502020204030204" pitchFamily="34" charset="0"/>
+              <a:ea typeface="Calibri" panose="020F0502020204030204" pitchFamily="34" charset="-122"/>
+              <a:cs typeface="Calibri" panose="020F0502020204030204" pitchFamily="34" charset="-120"/>
+            </a:endParaRPr>
           </a:p>
         </p:txBody>
       </p:sp>
@@ -14247,7 +15251,7 @@
               <a:buNone/>
             </a:pPr>
             <a:r>
-              <a:rPr lang="en-US" sz="1050" b="1" dirty="0">
+              <a:rPr lang="en-US" sz="1200" b="1" dirty="0">
                 <a:solidFill>
                   <a:srgbClr val="0D9488"/>
                 </a:solidFill>
@@ -14258,7 +15262,7 @@
               <a:t>· </a:t>
             </a:r>
             <a:r>
-              <a:rPr lang="en-US" sz="1050" dirty="0">
+              <a:rPr lang="en-US" sz="1200" dirty="0">
                 <a:solidFill>
                   <a:srgbClr val="334155"/>
                 </a:solidFill>
@@ -14268,7 +15272,14 @@
               </a:rPr>
               <a:t>Dropped columns with correlation &gt;0.7 to churn target</a:t>
             </a:r>
-            <a:endParaRPr lang="en-US" sz="1050" dirty="0"/>
+            <a:endParaRPr lang="en-US" sz="1200" dirty="0">
+              <a:solidFill>
+                <a:srgbClr val="334155"/>
+              </a:solidFill>
+              <a:latin typeface="Calibri" panose="020F0502020204030204" pitchFamily="34" charset="0"/>
+              <a:ea typeface="Calibri" panose="020F0502020204030204" pitchFamily="34" charset="-122"/>
+              <a:cs typeface="Calibri" panose="020F0502020204030204" pitchFamily="34" charset="-120"/>
+            </a:endParaRPr>
           </a:p>
         </p:txBody>
       </p:sp>
@@ -14280,7 +15291,7 @@
         </p:nvSpPr>
         <p:spPr>
           <a:xfrm>
-            <a:off x="411480" y="1865376"/>
+            <a:off x="411480" y="1827276"/>
             <a:ext cx="3840480" cy="365760"/>
           </a:xfrm>
           <a:prstGeom prst="rect">
@@ -14296,7 +15307,7 @@
               <a:buNone/>
             </a:pPr>
             <a:r>
-              <a:rPr lang="en-US" sz="1050" b="1" dirty="0">
+              <a:rPr lang="en-US" sz="1200" b="1" dirty="0">
                 <a:solidFill>
                   <a:srgbClr val="0D9488"/>
                 </a:solidFill>
@@ -14307,7 +15318,7 @@
               <a:t>· </a:t>
             </a:r>
             <a:r>
-              <a:rPr lang="en-US" sz="1050" dirty="0">
+              <a:rPr lang="en-US" sz="1200" dirty="0">
                 <a:solidFill>
                   <a:srgbClr val="334155"/>
                 </a:solidFill>
@@ -14317,7 +15328,14 @@
               </a:rPr>
               <a:t>Removed post-event keyword columns: satisfaction, nps, resolution, escalation</a:t>
             </a:r>
-            <a:endParaRPr lang="en-US" sz="1050" dirty="0"/>
+            <a:endParaRPr lang="en-US" sz="1200" dirty="0">
+              <a:solidFill>
+                <a:srgbClr val="334155"/>
+              </a:solidFill>
+              <a:latin typeface="Calibri" panose="020F0502020204030204" pitchFamily="34" charset="0"/>
+              <a:ea typeface="Calibri" panose="020F0502020204030204" pitchFamily="34" charset="-122"/>
+              <a:cs typeface="Calibri" panose="020F0502020204030204" pitchFamily="34" charset="-120"/>
+            </a:endParaRPr>
           </a:p>
         </p:txBody>
       </p:sp>
@@ -14345,7 +15363,7 @@
               <a:buNone/>
             </a:pPr>
             <a:r>
-              <a:rPr lang="en-US" sz="1050" b="1" dirty="0">
+              <a:rPr lang="en-US" sz="1200" b="1" dirty="0">
                 <a:solidFill>
                   <a:srgbClr val="0D9488"/>
                 </a:solidFill>
@@ -14356,7 +15374,7 @@
               <a:t>· </a:t>
             </a:r>
             <a:r>
-              <a:rPr lang="en-US" sz="1050" dirty="0">
+              <a:rPr lang="en-US" sz="1200" dirty="0">
                 <a:solidFill>
                   <a:srgbClr val="334155"/>
                 </a:solidFill>
@@ -14366,7 +15384,14 @@
               </a:rPr>
               <a:t>Explicitly excluded: unresolved_complaint_count, campaign_response_count</a:t>
             </a:r>
-            <a:endParaRPr lang="en-US" sz="1050" dirty="0"/>
+            <a:endParaRPr lang="en-US" sz="1200" dirty="0">
+              <a:solidFill>
+                <a:srgbClr val="334155"/>
+              </a:solidFill>
+              <a:latin typeface="Calibri" panose="020F0502020204030204" pitchFamily="34" charset="0"/>
+              <a:ea typeface="Calibri" panose="020F0502020204030204" pitchFamily="34" charset="-122"/>
+              <a:cs typeface="Calibri" panose="020F0502020204030204" pitchFamily="34" charset="-120"/>
+            </a:endParaRPr>
           </a:p>
         </p:txBody>
       </p:sp>
@@ -14435,7 +15460,7 @@
         </p:nvSpPr>
         <p:spPr>
           <a:xfrm>
-            <a:off x="4864608" y="1069848"/>
+            <a:off x="4864608" y="1054608"/>
             <a:ext cx="384048" cy="274320"/>
           </a:xfrm>
           <a:prstGeom prst="rect">
@@ -14451,7 +15476,7 @@
               <a:buNone/>
             </a:pPr>
             <a:r>
-              <a:rPr lang="en-US" sz="1600" b="1" dirty="0">
+              <a:rPr lang="en-US" b="1" dirty="0">
                 <a:solidFill>
                   <a:srgbClr val="0D9488"/>
                 </a:solidFill>
@@ -14459,9 +15484,16 @@
                 <a:ea typeface="Georgia" panose="02040502050405020303" pitchFamily="34" charset="-122"/>
                 <a:cs typeface="Georgia" panose="02040502050405020303" pitchFamily="34" charset="-120"/>
               </a:rPr>
-              <a:t>02</a:t>
-            </a:r>
-            <a:endParaRPr lang="en-US" sz="1600" dirty="0"/>
+              <a:t>2</a:t>
+            </a:r>
+            <a:endParaRPr lang="en-US" b="1" dirty="0">
+              <a:solidFill>
+                <a:srgbClr val="0D9488"/>
+              </a:solidFill>
+              <a:latin typeface="Georgia" panose="02040502050405020303" pitchFamily="34" charset="0"/>
+              <a:ea typeface="Georgia" panose="02040502050405020303" pitchFamily="34" charset="-122"/>
+              <a:cs typeface="Georgia" panose="02040502050405020303" pitchFamily="34" charset="-120"/>
+            </a:endParaRPr>
           </a:p>
         </p:txBody>
       </p:sp>
@@ -14489,7 +15521,7 @@
               <a:buNone/>
             </a:pPr>
             <a:r>
-              <a:rPr lang="en-US" sz="1200" b="1" dirty="0">
+              <a:rPr lang="en-US" sz="1400" b="1" dirty="0">
                 <a:solidFill>
                   <a:srgbClr val="FFFFFF"/>
                 </a:solidFill>
@@ -14499,7 +15531,14 @@
               </a:rPr>
               <a:t>Missing Value Imputation</a:t>
             </a:r>
-            <a:endParaRPr lang="en-US" sz="1200" dirty="0"/>
+            <a:endParaRPr lang="en-US" sz="1400" b="1" dirty="0">
+              <a:solidFill>
+                <a:srgbClr val="FFFFFF"/>
+              </a:solidFill>
+              <a:latin typeface="Calibri" panose="020F0502020204030204" pitchFamily="34" charset="0"/>
+              <a:ea typeface="Calibri" panose="020F0502020204030204" pitchFamily="34" charset="-122"/>
+              <a:cs typeface="Calibri" panose="020F0502020204030204" pitchFamily="34" charset="-120"/>
+            </a:endParaRPr>
           </a:p>
         </p:txBody>
       </p:sp>
@@ -14527,7 +15566,7 @@
               <a:buNone/>
             </a:pPr>
             <a:r>
-              <a:rPr lang="en-US" sz="1050" b="1" dirty="0">
+              <a:rPr lang="en-US" sz="1200" b="1" dirty="0">
                 <a:solidFill>
                   <a:srgbClr val="0D9488"/>
                 </a:solidFill>
@@ -14538,7 +15577,7 @@
               <a:t>· </a:t>
             </a:r>
             <a:r>
-              <a:rPr lang="en-US" sz="1050" dirty="0">
+              <a:rPr lang="en-US" sz="1200" dirty="0">
                 <a:solidFill>
                   <a:srgbClr val="334155"/>
                 </a:solidFill>
@@ -14548,7 +15587,14 @@
               </a:rPr>
               <a:t>Numeric columns → filled with training-set median (no test leakage)</a:t>
             </a:r>
-            <a:endParaRPr lang="en-US" sz="1050" dirty="0"/>
+            <a:endParaRPr lang="en-US" sz="1200" dirty="0">
+              <a:solidFill>
+                <a:srgbClr val="334155"/>
+              </a:solidFill>
+              <a:latin typeface="Calibri" panose="020F0502020204030204" pitchFamily="34" charset="0"/>
+              <a:ea typeface="Calibri" panose="020F0502020204030204" pitchFamily="34" charset="-122"/>
+              <a:cs typeface="Calibri" panose="020F0502020204030204" pitchFamily="34" charset="-120"/>
+            </a:endParaRPr>
           </a:p>
         </p:txBody>
       </p:sp>
@@ -14576,7 +15622,7 @@
               <a:buNone/>
             </a:pPr>
             <a:r>
-              <a:rPr lang="en-US" sz="1050" b="1" dirty="0">
+              <a:rPr lang="en-US" sz="1200" b="1" dirty="0">
                 <a:solidFill>
                   <a:srgbClr val="0D9488"/>
                 </a:solidFill>
@@ -14587,7 +15633,7 @@
               <a:t>· </a:t>
             </a:r>
             <a:r>
-              <a:rPr lang="en-US" sz="1050" dirty="0">
+              <a:rPr lang="en-US" sz="1200" dirty="0">
                 <a:solidFill>
                   <a:srgbClr val="334155"/>
                 </a:solidFill>
@@ -14597,7 +15643,14 @@
               </a:rPr>
               <a:t>Categorical columns → filled with training-set mode</a:t>
             </a:r>
-            <a:endParaRPr lang="en-US" sz="1050" dirty="0"/>
+            <a:endParaRPr lang="en-US" sz="1200" dirty="0">
+              <a:solidFill>
+                <a:srgbClr val="334155"/>
+              </a:solidFill>
+              <a:latin typeface="Calibri" panose="020F0502020204030204" pitchFamily="34" charset="0"/>
+              <a:ea typeface="Calibri" panose="020F0502020204030204" pitchFamily="34" charset="-122"/>
+              <a:cs typeface="Calibri" panose="020F0502020204030204" pitchFamily="34" charset="-120"/>
+            </a:endParaRPr>
           </a:p>
         </p:txBody>
       </p:sp>
@@ -14625,7 +15678,7 @@
               <a:buNone/>
             </a:pPr>
             <a:r>
-              <a:rPr lang="en-US" sz="1050" b="1" dirty="0">
+              <a:rPr lang="en-US" sz="1200" b="1" dirty="0">
                 <a:solidFill>
                   <a:srgbClr val="0D9488"/>
                 </a:solidFill>
@@ -14636,7 +15689,7 @@
               <a:t>· </a:t>
             </a:r>
             <a:r>
-              <a:rPr lang="en-US" sz="1050" dirty="0">
+              <a:rPr lang="en-US" sz="1200" dirty="0">
                 <a:solidFill>
                   <a:srgbClr val="334155"/>
                 </a:solidFill>
@@ -14646,7 +15699,14 @@
               </a:rPr>
               <a:t>Imputation computed on train only, then applied to both train &amp; test</a:t>
             </a:r>
-            <a:endParaRPr lang="en-US" sz="1050" dirty="0"/>
+            <a:endParaRPr lang="en-US" sz="1200" dirty="0">
+              <a:solidFill>
+                <a:srgbClr val="334155"/>
+              </a:solidFill>
+              <a:latin typeface="Calibri" panose="020F0502020204030204" pitchFamily="34" charset="0"/>
+              <a:ea typeface="Calibri" panose="020F0502020204030204" pitchFamily="34" charset="-122"/>
+              <a:cs typeface="Calibri" panose="020F0502020204030204" pitchFamily="34" charset="-120"/>
+            </a:endParaRPr>
           </a:p>
         </p:txBody>
       </p:sp>
@@ -14715,7 +15775,7 @@
         </p:nvSpPr>
         <p:spPr>
           <a:xfrm>
-            <a:off x="384048" y="2990088"/>
+            <a:off x="384048" y="2959608"/>
             <a:ext cx="384048" cy="274320"/>
           </a:xfrm>
           <a:prstGeom prst="rect">
@@ -14731,7 +15791,7 @@
               <a:buNone/>
             </a:pPr>
             <a:r>
-              <a:rPr lang="en-US" sz="1600" b="1" dirty="0">
+              <a:rPr lang="en-US" b="1" dirty="0">
                 <a:solidFill>
                   <a:srgbClr val="0D9488"/>
                 </a:solidFill>
@@ -14739,9 +15799,16 @@
                 <a:ea typeface="Georgia" panose="02040502050405020303" pitchFamily="34" charset="-122"/>
                 <a:cs typeface="Georgia" panose="02040502050405020303" pitchFamily="34" charset="-120"/>
               </a:rPr>
-              <a:t>03</a:t>
-            </a:r>
-            <a:endParaRPr lang="en-US" sz="1600" dirty="0"/>
+              <a:t>3</a:t>
+            </a:r>
+            <a:endParaRPr lang="en-US" b="1" dirty="0">
+              <a:solidFill>
+                <a:srgbClr val="0D9488"/>
+              </a:solidFill>
+              <a:latin typeface="Georgia" panose="02040502050405020303" pitchFamily="34" charset="0"/>
+              <a:ea typeface="Georgia" panose="02040502050405020303" pitchFamily="34" charset="-122"/>
+              <a:cs typeface="Georgia" panose="02040502050405020303" pitchFamily="34" charset="-120"/>
+            </a:endParaRPr>
           </a:p>
         </p:txBody>
       </p:sp>
@@ -14769,7 +15836,7 @@
               <a:buNone/>
             </a:pPr>
             <a:r>
-              <a:rPr lang="en-US" sz="1200" b="1" dirty="0">
+              <a:rPr lang="en-US" sz="1400" b="1" dirty="0">
                 <a:solidFill>
                   <a:srgbClr val="FFFFFF"/>
                 </a:solidFill>
@@ -14779,7 +15846,14 @@
               </a:rPr>
               <a:t>Encoding &amp; Scaling</a:t>
             </a:r>
-            <a:endParaRPr lang="en-US" sz="1200" dirty="0"/>
+            <a:endParaRPr lang="en-US" sz="1400" b="1" dirty="0">
+              <a:solidFill>
+                <a:srgbClr val="FFFFFF"/>
+              </a:solidFill>
+              <a:latin typeface="Calibri" panose="020F0502020204030204" pitchFamily="34" charset="0"/>
+              <a:ea typeface="Calibri" panose="020F0502020204030204" pitchFamily="34" charset="-122"/>
+              <a:cs typeface="Calibri" panose="020F0502020204030204" pitchFamily="34" charset="-120"/>
+            </a:endParaRPr>
           </a:p>
         </p:txBody>
       </p:sp>
@@ -14807,7 +15881,7 @@
               <a:buNone/>
             </a:pPr>
             <a:r>
-              <a:rPr lang="en-US" sz="1050" b="1" dirty="0">
+              <a:rPr lang="en-US" sz="1200" b="1" dirty="0">
                 <a:solidFill>
                   <a:srgbClr val="0D9488"/>
                 </a:solidFill>
@@ -14818,7 +15892,7 @@
               <a:t>· </a:t>
             </a:r>
             <a:r>
-              <a:rPr lang="en-US" sz="1050" dirty="0">
+              <a:rPr lang="en-US" sz="1200" dirty="0">
                 <a:solidFill>
                   <a:srgbClr val="334155"/>
                 </a:solidFill>
@@ -14828,7 +15902,14 @@
               </a:rPr>
               <a:t>One-hot encoding for all categorical features (drop_first=True)</a:t>
             </a:r>
-            <a:endParaRPr lang="en-US" sz="1050" dirty="0"/>
+            <a:endParaRPr lang="en-US" sz="1200" dirty="0">
+              <a:solidFill>
+                <a:srgbClr val="334155"/>
+              </a:solidFill>
+              <a:latin typeface="Calibri" panose="020F0502020204030204" pitchFamily="34" charset="0"/>
+              <a:ea typeface="Calibri" panose="020F0502020204030204" pitchFamily="34" charset="-122"/>
+              <a:cs typeface="Calibri" panose="020F0502020204030204" pitchFamily="34" charset="-120"/>
+            </a:endParaRPr>
           </a:p>
         </p:txBody>
       </p:sp>
@@ -14856,7 +15937,7 @@
               <a:buNone/>
             </a:pPr>
             <a:r>
-              <a:rPr lang="en-US" sz="1050" b="1" dirty="0">
+              <a:rPr lang="en-US" sz="1200" b="1" dirty="0">
                 <a:solidFill>
                   <a:srgbClr val="0D9488"/>
                 </a:solidFill>
@@ -14867,7 +15948,7 @@
               <a:t>· </a:t>
             </a:r>
             <a:r>
-              <a:rPr lang="en-US" sz="1050" dirty="0">
+              <a:rPr lang="en-US" sz="1200" dirty="0">
                 <a:solidFill>
                   <a:srgbClr val="334155"/>
                 </a:solidFill>
@@ -14877,7 +15958,14 @@
               </a:rPr>
               <a:t>Column alignment: test set synced to training feature set</a:t>
             </a:r>
-            <a:endParaRPr lang="en-US" sz="1050" dirty="0"/>
+            <a:endParaRPr lang="en-US" sz="1200" dirty="0">
+              <a:solidFill>
+                <a:srgbClr val="334155"/>
+              </a:solidFill>
+              <a:latin typeface="Calibri" panose="020F0502020204030204" pitchFamily="34" charset="0"/>
+              <a:ea typeface="Calibri" panose="020F0502020204030204" pitchFamily="34" charset="-122"/>
+              <a:cs typeface="Calibri" panose="020F0502020204030204" pitchFamily="34" charset="-120"/>
+            </a:endParaRPr>
           </a:p>
         </p:txBody>
       </p:sp>
@@ -14905,7 +15993,7 @@
               <a:buNone/>
             </a:pPr>
             <a:r>
-              <a:rPr lang="en-US" sz="1050" b="1" dirty="0">
+              <a:rPr lang="en-US" sz="1200" b="1" dirty="0">
                 <a:solidFill>
                   <a:srgbClr val="0D9488"/>
                 </a:solidFill>
@@ -14916,7 +16004,7 @@
               <a:t>· </a:t>
             </a:r>
             <a:r>
-              <a:rPr lang="en-US" sz="1050" dirty="0">
+              <a:rPr lang="en-US" sz="1200" dirty="0">
                 <a:solidFill>
                   <a:srgbClr val="334155"/>
                 </a:solidFill>
@@ -14926,7 +16014,14 @@
               </a:rPr>
               <a:t>StandardScaler fit on train only, transformed on both sets</a:t>
             </a:r>
-            <a:endParaRPr lang="en-US" sz="1050" dirty="0"/>
+            <a:endParaRPr lang="en-US" sz="1200" dirty="0">
+              <a:solidFill>
+                <a:srgbClr val="334155"/>
+              </a:solidFill>
+              <a:latin typeface="Calibri" panose="020F0502020204030204" pitchFamily="34" charset="0"/>
+              <a:ea typeface="Calibri" panose="020F0502020204030204" pitchFamily="34" charset="-122"/>
+              <a:cs typeface="Calibri" panose="020F0502020204030204" pitchFamily="34" charset="-120"/>
+            </a:endParaRPr>
           </a:p>
         </p:txBody>
       </p:sp>
@@ -14995,7 +16090,7 @@
         </p:nvSpPr>
         <p:spPr>
           <a:xfrm>
-            <a:off x="4864608" y="2990088"/>
+            <a:off x="4864608" y="2974848"/>
             <a:ext cx="384048" cy="274320"/>
           </a:xfrm>
           <a:prstGeom prst="rect">
@@ -15011,7 +16106,7 @@
               <a:buNone/>
             </a:pPr>
             <a:r>
-              <a:rPr lang="en-US" sz="1600" b="1" dirty="0">
+              <a:rPr lang="en-US" b="1" dirty="0">
                 <a:solidFill>
                   <a:srgbClr val="0D9488"/>
                 </a:solidFill>
@@ -15019,9 +16114,16 @@
                 <a:ea typeface="Georgia" panose="02040502050405020303" pitchFamily="34" charset="-122"/>
                 <a:cs typeface="Georgia" panose="02040502050405020303" pitchFamily="34" charset="-120"/>
               </a:rPr>
-              <a:t>04</a:t>
-            </a:r>
-            <a:endParaRPr lang="en-US" sz="1600" dirty="0"/>
+              <a:t>4</a:t>
+            </a:r>
+            <a:endParaRPr lang="en-US" b="1" dirty="0">
+              <a:solidFill>
+                <a:srgbClr val="0D9488"/>
+              </a:solidFill>
+              <a:latin typeface="Georgia" panose="02040502050405020303" pitchFamily="34" charset="0"/>
+              <a:ea typeface="Georgia" panose="02040502050405020303" pitchFamily="34" charset="-122"/>
+              <a:cs typeface="Georgia" panose="02040502050405020303" pitchFamily="34" charset="-120"/>
+            </a:endParaRPr>
           </a:p>
         </p:txBody>
       </p:sp>
@@ -15049,7 +16151,7 @@
               <a:buNone/>
             </a:pPr>
             <a:r>
-              <a:rPr lang="en-US" sz="1200" b="1" dirty="0">
+              <a:rPr lang="en-US" sz="1400" b="1" dirty="0">
                 <a:solidFill>
                   <a:srgbClr val="FFFFFF"/>
                 </a:solidFill>
@@ -15059,7 +16161,14 @@
               </a:rPr>
               <a:t>Train-Validation Split</a:t>
             </a:r>
-            <a:endParaRPr lang="en-US" sz="1200" dirty="0"/>
+            <a:endParaRPr lang="en-US" sz="1400" b="1" dirty="0">
+              <a:solidFill>
+                <a:srgbClr val="FFFFFF"/>
+              </a:solidFill>
+              <a:latin typeface="Calibri" panose="020F0502020204030204" pitchFamily="34" charset="0"/>
+              <a:ea typeface="Calibri" panose="020F0502020204030204" pitchFamily="34" charset="-122"/>
+              <a:cs typeface="Calibri" panose="020F0502020204030204" pitchFamily="34" charset="-120"/>
+            </a:endParaRPr>
           </a:p>
         </p:txBody>
       </p:sp>
@@ -15087,7 +16196,7 @@
               <a:buNone/>
             </a:pPr>
             <a:r>
-              <a:rPr lang="en-US" sz="1050" b="1" dirty="0">
+              <a:rPr lang="en-US" sz="1200" b="1" dirty="0">
                 <a:solidFill>
                   <a:srgbClr val="0D9488"/>
                 </a:solidFill>
@@ -15098,7 +16207,7 @@
               <a:t>· </a:t>
             </a:r>
             <a:r>
-              <a:rPr lang="en-US" sz="1050" dirty="0">
+              <a:rPr lang="en-US" sz="1200" dirty="0">
                 <a:solidFill>
                   <a:srgbClr val="334155"/>
                 </a:solidFill>
@@ -15108,7 +16217,14 @@
               </a:rPr>
               <a:t>80/20 stratified split (stratify=y) to preserve churn ratio</a:t>
             </a:r>
-            <a:endParaRPr lang="en-US" sz="1050" dirty="0"/>
+            <a:endParaRPr lang="en-US" sz="1200" dirty="0">
+              <a:solidFill>
+                <a:srgbClr val="334155"/>
+              </a:solidFill>
+              <a:latin typeface="Calibri" panose="020F0502020204030204" pitchFamily="34" charset="0"/>
+              <a:ea typeface="Calibri" panose="020F0502020204030204" pitchFamily="34" charset="-122"/>
+              <a:cs typeface="Calibri" panose="020F0502020204030204" pitchFamily="34" charset="-120"/>
+            </a:endParaRPr>
           </a:p>
         </p:txBody>
       </p:sp>
@@ -15136,7 +16252,7 @@
               <a:buNone/>
             </a:pPr>
             <a:r>
-              <a:rPr lang="en-US" sz="1050" b="1" dirty="0">
+              <a:rPr lang="en-US" sz="1200" b="1" dirty="0">
                 <a:solidFill>
                   <a:srgbClr val="0D9488"/>
                 </a:solidFill>
@@ -15147,7 +16263,7 @@
               <a:t>· </a:t>
             </a:r>
             <a:r>
-              <a:rPr lang="en-US" sz="1050" dirty="0">
+              <a:rPr lang="en-US" sz="1200" dirty="0">
                 <a:solidFill>
                   <a:srgbClr val="334155"/>
                 </a:solidFill>
@@ -15157,7 +16273,14 @@
               </a:rPr>
               <a:t>Random seed 42 for full reproducibility</a:t>
             </a:r>
-            <a:endParaRPr lang="en-US" sz="1050" dirty="0"/>
+            <a:endParaRPr lang="en-US" sz="1200" dirty="0">
+              <a:solidFill>
+                <a:srgbClr val="334155"/>
+              </a:solidFill>
+              <a:latin typeface="Calibri" panose="020F0502020204030204" pitchFamily="34" charset="0"/>
+              <a:ea typeface="Calibri" panose="020F0502020204030204" pitchFamily="34" charset="-122"/>
+              <a:cs typeface="Calibri" panose="020F0502020204030204" pitchFamily="34" charset="-120"/>
+            </a:endParaRPr>
           </a:p>
         </p:txBody>
       </p:sp>
@@ -15185,7 +16308,7 @@
               <a:buNone/>
             </a:pPr>
             <a:r>
-              <a:rPr lang="en-US" sz="1050" b="1" dirty="0">
+              <a:rPr lang="en-US" sz="1200" b="1" dirty="0">
                 <a:solidFill>
                   <a:srgbClr val="0D9488"/>
                 </a:solidFill>
@@ -15196,7 +16319,7 @@
               <a:t>· </a:t>
             </a:r>
             <a:r>
-              <a:rPr lang="en-US" sz="1050" dirty="0">
+              <a:rPr lang="en-US" sz="1200" dirty="0">
                 <a:solidFill>
                   <a:srgbClr val="334155"/>
                 </a:solidFill>
@@ -15206,7 +16329,14 @@
               </a:rPr>
               <a:t>Final model retrained on full training set after threshold selection</a:t>
             </a:r>
-            <a:endParaRPr lang="en-US" sz="1050" dirty="0"/>
+            <a:endParaRPr lang="en-US" sz="1200" dirty="0">
+              <a:solidFill>
+                <a:srgbClr val="334155"/>
+              </a:solidFill>
+              <a:latin typeface="Calibri" panose="020F0502020204030204" pitchFamily="34" charset="0"/>
+              <a:ea typeface="Calibri" panose="020F0502020204030204" pitchFamily="34" charset="-122"/>
+              <a:cs typeface="Calibri" panose="020F0502020204030204" pitchFamily="34" charset="-120"/>
+            </a:endParaRPr>
           </a:p>
         </p:txBody>
       </p:sp>
@@ -15339,7 +16469,7 @@
         </p:nvSpPr>
         <p:spPr>
           <a:xfrm>
-            <a:off x="457200" y="79248"/>
+            <a:off x="457200" y="18288"/>
             <a:ext cx="6400800" cy="502920"/>
           </a:xfrm>
           <a:prstGeom prst="rect">
@@ -15377,7 +16507,7 @@
         </p:nvSpPr>
         <p:spPr>
           <a:xfrm>
-            <a:off x="464820" y="473964"/>
+            <a:off x="464820" y="451104"/>
             <a:ext cx="7315200" cy="292608"/>
           </a:xfrm>
           <a:prstGeom prst="rect">
@@ -15488,7 +16618,7 @@
               <a:buNone/>
             </a:pPr>
             <a:r>
-              <a:rPr lang="en-US" sz="900" b="1" dirty="0">
+              <a:rPr lang="en-US" sz="1000" b="1" dirty="0">
                 <a:solidFill>
                   <a:srgbClr val="94A3B8"/>
                 </a:solidFill>
@@ -15498,7 +16628,14 @@
               </a:rPr>
               <a:t>BASELINE</a:t>
             </a:r>
-            <a:endParaRPr lang="en-US" sz="900" dirty="0"/>
+            <a:endParaRPr lang="en-US" sz="1000" b="1" dirty="0">
+              <a:solidFill>
+                <a:srgbClr val="94A3B8"/>
+              </a:solidFill>
+              <a:latin typeface="Calibri" panose="020F0502020204030204" pitchFamily="34" charset="0"/>
+              <a:ea typeface="Calibri" panose="020F0502020204030204" pitchFamily="34" charset="-122"/>
+              <a:cs typeface="Calibri" panose="020F0502020204030204" pitchFamily="34" charset="-120"/>
+            </a:endParaRPr>
           </a:p>
         </p:txBody>
       </p:sp>
@@ -15564,7 +16701,7 @@
               <a:buNone/>
             </a:pPr>
             <a:r>
-              <a:rPr lang="en-US" sz="1100" b="1" dirty="0">
+              <a:rPr lang="en-US" sz="1200" b="1" dirty="0">
                 <a:solidFill>
                   <a:srgbClr val="94A3B8"/>
                 </a:solidFill>
@@ -15575,7 +16712,7 @@
               <a:t>→ </a:t>
             </a:r>
             <a:r>
-              <a:rPr lang="en-US" sz="1100" dirty="0">
+              <a:rPr lang="en-US" sz="1200" dirty="0">
                 <a:solidFill>
                   <a:srgbClr val="334155"/>
                 </a:solidFill>
@@ -15585,7 +16722,14 @@
               </a:rPr>
               <a:t>class_weight='balanced' — no SMOTE applied</a:t>
             </a:r>
-            <a:endParaRPr lang="en-US" sz="1100" dirty="0"/>
+            <a:endParaRPr lang="en-US" sz="1200" dirty="0">
+              <a:solidFill>
+                <a:srgbClr val="334155"/>
+              </a:solidFill>
+              <a:latin typeface="Calibri" panose="020F0502020204030204" pitchFamily="34" charset="0"/>
+              <a:ea typeface="Calibri" panose="020F0502020204030204" pitchFamily="34" charset="-122"/>
+              <a:cs typeface="Calibri" panose="020F0502020204030204" pitchFamily="34" charset="-120"/>
+            </a:endParaRPr>
           </a:p>
         </p:txBody>
       </p:sp>
@@ -15613,7 +16757,7 @@
               <a:buNone/>
             </a:pPr>
             <a:r>
-              <a:rPr lang="en-US" sz="1100" b="1" dirty="0">
+              <a:rPr lang="en-US" sz="1200" b="1" dirty="0">
                 <a:solidFill>
                   <a:srgbClr val="94A3B8"/>
                 </a:solidFill>
@@ -15624,7 +16768,7 @@
               <a:t>→ </a:t>
             </a:r>
             <a:r>
-              <a:rPr lang="en-US" sz="1100" dirty="0">
+              <a:rPr lang="en-US" sz="1200" dirty="0">
                 <a:solidFill>
                   <a:srgbClr val="334155"/>
                 </a:solidFill>
@@ -15634,7 +16778,14 @@
               </a:rPr>
               <a:t>Quick, interpretable benchmark model</a:t>
             </a:r>
-            <a:endParaRPr lang="en-US" sz="1100" dirty="0"/>
+            <a:endParaRPr lang="en-US" sz="1200" dirty="0">
+              <a:solidFill>
+                <a:srgbClr val="334155"/>
+              </a:solidFill>
+              <a:latin typeface="Calibri" panose="020F0502020204030204" pitchFamily="34" charset="0"/>
+              <a:ea typeface="Calibri" panose="020F0502020204030204" pitchFamily="34" charset="-122"/>
+              <a:cs typeface="Calibri" panose="020F0502020204030204" pitchFamily="34" charset="-120"/>
+            </a:endParaRPr>
           </a:p>
         </p:txBody>
       </p:sp>
@@ -15662,7 +16813,7 @@
               <a:buNone/>
             </a:pPr>
             <a:r>
-              <a:rPr lang="en-US" sz="1100" b="1" dirty="0">
+              <a:rPr lang="en-US" sz="1200" b="1" dirty="0">
                 <a:solidFill>
                   <a:srgbClr val="94A3B8"/>
                 </a:solidFill>
@@ -15673,7 +16824,7 @@
               <a:t>→ </a:t>
             </a:r>
             <a:r>
-              <a:rPr lang="en-US" sz="1100" dirty="0">
+              <a:rPr lang="en-US" sz="1200" dirty="0">
                 <a:solidFill>
                   <a:srgbClr val="334155"/>
                 </a:solidFill>
@@ -15683,7 +16834,14 @@
               </a:rPr>
               <a:t>Establishes minimum PR-AUC floor for comparison</a:t>
             </a:r>
-            <a:endParaRPr lang="en-US" sz="1100" dirty="0"/>
+            <a:endParaRPr lang="en-US" sz="1200" dirty="0">
+              <a:solidFill>
+                <a:srgbClr val="334155"/>
+              </a:solidFill>
+              <a:latin typeface="Calibri" panose="020F0502020204030204" pitchFamily="34" charset="0"/>
+              <a:ea typeface="Calibri" panose="020F0502020204030204" pitchFamily="34" charset="-122"/>
+              <a:cs typeface="Calibri" panose="020F0502020204030204" pitchFamily="34" charset="-120"/>
+            </a:endParaRPr>
           </a:p>
         </p:txBody>
       </p:sp>
@@ -15743,7 +16901,7 @@
               <a:buNone/>
             </a:pPr>
             <a:r>
-              <a:rPr lang="en-US" sz="900" b="1" dirty="0">
+              <a:rPr lang="en-US" sz="1000" b="1" dirty="0">
                 <a:solidFill>
                   <a:srgbClr val="CCFBF1"/>
                 </a:solidFill>
@@ -15753,7 +16911,14 @@
               </a:rPr>
               <a:t>FINAL MODEL</a:t>
             </a:r>
-            <a:endParaRPr lang="en-US" sz="900" dirty="0"/>
+            <a:endParaRPr lang="en-US" sz="1000" b="1" dirty="0">
+              <a:solidFill>
+                <a:srgbClr val="CCFBF1"/>
+              </a:solidFill>
+              <a:latin typeface="Calibri" panose="020F0502020204030204" pitchFamily="34" charset="0"/>
+              <a:ea typeface="Calibri" panose="020F0502020204030204" pitchFamily="34" charset="-122"/>
+              <a:cs typeface="Calibri" panose="020F0502020204030204" pitchFamily="34" charset="-120"/>
+            </a:endParaRPr>
           </a:p>
         </p:txBody>
       </p:sp>
@@ -15819,7 +16984,7 @@
               <a:buNone/>
             </a:pPr>
             <a:r>
-              <a:rPr lang="en-US" sz="1100" b="1" dirty="0">
+              <a:rPr lang="en-US" sz="1200" b="1" dirty="0">
                 <a:solidFill>
                   <a:srgbClr val="CCFBF1"/>
                 </a:solidFill>
@@ -15830,7 +16995,7 @@
               <a:t>→ </a:t>
             </a:r>
             <a:r>
-              <a:rPr lang="en-US" sz="1100" dirty="0">
+              <a:rPr lang="en-US" sz="1200" dirty="0">
                 <a:solidFill>
                   <a:srgbClr val="FFFFFF"/>
                 </a:solidFill>
@@ -15840,7 +17005,14 @@
               </a:rPr>
               <a:t>n_estimators=200, max_depth=6, learning_rate=0.05</a:t>
             </a:r>
-            <a:endParaRPr lang="en-US" sz="1100" dirty="0"/>
+            <a:endParaRPr lang="en-US" sz="1200" dirty="0">
+              <a:solidFill>
+                <a:srgbClr val="FFFFFF"/>
+              </a:solidFill>
+              <a:latin typeface="Calibri" panose="020F0502020204030204" pitchFamily="34" charset="0"/>
+              <a:ea typeface="Calibri" panose="020F0502020204030204" pitchFamily="34" charset="-122"/>
+              <a:cs typeface="Calibri" panose="020F0502020204030204" pitchFamily="34" charset="-120"/>
+            </a:endParaRPr>
           </a:p>
         </p:txBody>
       </p:sp>
@@ -15868,7 +17040,7 @@
               <a:buNone/>
             </a:pPr>
             <a:r>
-              <a:rPr lang="en-US" sz="1100" b="1" dirty="0">
+              <a:rPr lang="en-US" sz="1200" b="1" dirty="0">
                 <a:solidFill>
                   <a:srgbClr val="CCFBF1"/>
                 </a:solidFill>
@@ -15879,7 +17051,7 @@
               <a:t>→ </a:t>
             </a:r>
             <a:r>
-              <a:rPr lang="en-US" sz="1100" dirty="0">
+              <a:rPr lang="en-US" sz="1200" dirty="0">
                 <a:solidFill>
                   <a:srgbClr val="FFFFFF"/>
                 </a:solidFill>
@@ -15889,7 +17061,14 @@
               </a:rPr>
               <a:t>scale_pos_weight from resampled class ratio</a:t>
             </a:r>
-            <a:endParaRPr lang="en-US" sz="1100" dirty="0"/>
+            <a:endParaRPr lang="en-US" sz="1200" dirty="0">
+              <a:solidFill>
+                <a:srgbClr val="FFFFFF"/>
+              </a:solidFill>
+              <a:latin typeface="Calibri" panose="020F0502020204030204" pitchFamily="34" charset="0"/>
+              <a:ea typeface="Calibri" panose="020F0502020204030204" pitchFamily="34" charset="-122"/>
+              <a:cs typeface="Calibri" panose="020F0502020204030204" pitchFamily="34" charset="-120"/>
+            </a:endParaRPr>
           </a:p>
         </p:txBody>
       </p:sp>
@@ -15917,7 +17096,7 @@
               <a:buNone/>
             </a:pPr>
             <a:r>
-              <a:rPr lang="en-US" sz="1100" b="1" dirty="0">
+              <a:rPr lang="en-US" sz="1200" b="1" dirty="0">
                 <a:solidFill>
                   <a:srgbClr val="CCFBF1"/>
                 </a:solidFill>
@@ -15928,7 +17107,7 @@
               <a:t>→ </a:t>
             </a:r>
             <a:r>
-              <a:rPr lang="en-US" sz="1100" dirty="0">
+              <a:rPr lang="en-US" sz="1200" dirty="0">
                 <a:solidFill>
                   <a:srgbClr val="FFFFFF"/>
                 </a:solidFill>
@@ -15938,7 +17117,14 @@
               </a:rPr>
               <a:t>Handles non-linearity and feature interactions natively</a:t>
             </a:r>
-            <a:endParaRPr lang="en-US" sz="1100" dirty="0"/>
+            <a:endParaRPr lang="en-US" sz="1200" dirty="0">
+              <a:solidFill>
+                <a:srgbClr val="FFFFFF"/>
+              </a:solidFill>
+              <a:latin typeface="Calibri" panose="020F0502020204030204" pitchFamily="34" charset="0"/>
+              <a:ea typeface="Calibri" panose="020F0502020204030204" pitchFamily="34" charset="-122"/>
+              <a:cs typeface="Calibri" panose="020F0502020204030204" pitchFamily="34" charset="-120"/>
+            </a:endParaRPr>
           </a:p>
         </p:txBody>
       </p:sp>
@@ -16064,7 +17250,7 @@
               <a:buNone/>
             </a:pPr>
             <a:r>
-              <a:rPr lang="en-US" sz="1150" dirty="0">
+              <a:rPr lang="en-US" sz="1200" dirty="0">
                 <a:solidFill>
                   <a:srgbClr val="334155"/>
                 </a:solidFill>
@@ -16074,7 +17260,14 @@
               </a:rPr>
               <a:t>Synthetic Minority Oversampling creates new churn examples to balance training data — prevents model bias toward majority class.</a:t>
             </a:r>
-            <a:endParaRPr lang="en-US" sz="1150" dirty="0"/>
+            <a:endParaRPr lang="en-US" sz="1200" dirty="0">
+              <a:solidFill>
+                <a:srgbClr val="334155"/>
+              </a:solidFill>
+              <a:latin typeface="Calibri" panose="020F0502020204030204" pitchFamily="34" charset="0"/>
+              <a:ea typeface="Calibri" panose="020F0502020204030204" pitchFamily="34" charset="-122"/>
+              <a:cs typeface="Calibri" panose="020F0502020204030204" pitchFamily="34" charset="-120"/>
+            </a:endParaRPr>
           </a:p>
         </p:txBody>
       </p:sp>
@@ -16127,7 +17320,7 @@
               <a:buNone/>
             </a:pPr>
             <a:r>
-              <a:rPr lang="en-US" sz="1100" b="1" dirty="0">
+              <a:rPr lang="en-US" sz="1200" b="1" dirty="0">
                 <a:solidFill>
                   <a:srgbClr val="0F1B2D"/>
                 </a:solidFill>
@@ -16137,7 +17330,14 @@
               </a:rPr>
               <a:t>Applied ONLY to training data — validation and test sets remain untouched for honest, realistic evaluation</a:t>
             </a:r>
-            <a:endParaRPr lang="en-US" sz="1100" dirty="0"/>
+            <a:endParaRPr lang="en-US" sz="1200" b="1" dirty="0">
+              <a:solidFill>
+                <a:srgbClr val="0F1B2D"/>
+              </a:solidFill>
+              <a:latin typeface="Calibri" panose="020F0502020204030204" pitchFamily="34" charset="0"/>
+              <a:ea typeface="Calibri" panose="020F0502020204030204" pitchFamily="34" charset="-122"/>
+              <a:cs typeface="Calibri" panose="020F0502020204030204" pitchFamily="34" charset="-120"/>
+            </a:endParaRPr>
           </a:p>
         </p:txBody>
       </p:sp>
@@ -16149,7 +17349,7 @@
         </p:nvSpPr>
         <p:spPr>
           <a:xfrm>
-            <a:off x="457200" y="4114800"/>
+            <a:off x="457200" y="4290060"/>
             <a:ext cx="8229600" cy="292608"/>
           </a:xfrm>
           <a:prstGeom prst="rect">
@@ -16165,7 +17365,7 @@
               <a:buNone/>
             </a:pPr>
             <a:r>
-              <a:rPr lang="en-US" sz="1050" b="1" dirty="0">
+              <a:rPr lang="en-US" sz="1200" b="1" dirty="0">
                 <a:solidFill>
                   <a:srgbClr val="0D9488"/>
                 </a:solidFill>
@@ -16173,9 +17373,16 @@
                 <a:ea typeface="Calibri" panose="020F0502020204030204" pitchFamily="34" charset="-122"/>
                 <a:cs typeface="Calibri" panose="020F0502020204030204" pitchFamily="34" charset="-120"/>
               </a:rPr>
-              <a:t>Why XGBoost: robust to feature scale  ·  built-in L1/L2 regularization  ·  superior performance on tabular imbalanced data</a:t>
-            </a:r>
-            <a:endParaRPr lang="en-US" sz="1050" dirty="0"/>
+              <a:t>Why XGBoost:  robust to feature scale  ·  built-in L1/L2 regularization  ·  superior performance on tabular imbalanced data</a:t>
+            </a:r>
+            <a:endParaRPr lang="en-US" sz="1200" b="1" dirty="0">
+              <a:solidFill>
+                <a:srgbClr val="0D9488"/>
+              </a:solidFill>
+              <a:latin typeface="Calibri" panose="020F0502020204030204" pitchFamily="34" charset="0"/>
+              <a:ea typeface="Calibri" panose="020F0502020204030204" pitchFamily="34" charset="-122"/>
+              <a:cs typeface="Calibri" panose="020F0502020204030204" pitchFamily="34" charset="-120"/>
+            </a:endParaRPr>
           </a:p>
         </p:txBody>
       </p:sp>
@@ -16308,7 +17515,7 @@
         </p:nvSpPr>
         <p:spPr>
           <a:xfrm>
-            <a:off x="457200" y="64008"/>
+            <a:off x="457200" y="10668"/>
             <a:ext cx="6400800" cy="502920"/>
           </a:xfrm>
           <a:prstGeom prst="rect">
@@ -16346,7 +17553,7 @@
         </p:nvSpPr>
         <p:spPr>
           <a:xfrm>
-            <a:off x="457200" y="458724"/>
+            <a:off x="457200" y="435864"/>
             <a:ext cx="6400800" cy="292608"/>
           </a:xfrm>
           <a:prstGeom prst="rect">
@@ -16522,7 +17729,7 @@
               <a:buNone/>
             </a:pPr>
             <a:r>
-              <a:rPr lang="en-US" sz="850" b="1" dirty="0">
+              <a:rPr lang="en-US" sz="1050" b="1" dirty="0">
                 <a:solidFill>
                   <a:srgbClr val="FFFFFF"/>
                 </a:solidFill>
@@ -16532,7 +17739,14 @@
               </a:rPr>
               <a:t>Primary Metric</a:t>
             </a:r>
-            <a:endParaRPr lang="en-US" sz="850" dirty="0"/>
+            <a:endParaRPr lang="en-US" sz="1050" b="1" dirty="0">
+              <a:solidFill>
+                <a:srgbClr val="FFFFFF"/>
+              </a:solidFill>
+              <a:latin typeface="Calibri" panose="020F0502020204030204" pitchFamily="34" charset="0"/>
+              <a:ea typeface="Calibri" panose="020F0502020204030204" pitchFamily="34" charset="-122"/>
+              <a:cs typeface="Calibri" panose="020F0502020204030204" pitchFamily="34" charset="-120"/>
+            </a:endParaRPr>
           </a:p>
         </p:txBody>
       </p:sp>
@@ -16563,7 +17777,7 @@
               <a:buNone/>
             </a:pPr>
             <a:r>
-              <a:rPr lang="en-US" sz="1150" dirty="0">
+              <a:rPr lang="en-US" sz="1400" dirty="0">
                 <a:solidFill>
                   <a:srgbClr val="334155"/>
                 </a:solidFill>
@@ -16573,7 +17787,14 @@
               </a:rPr>
               <a:t>Precision-Recall AUC. Robust to class imbalance. Rewards models that find true churners without excessive false alarms.</a:t>
             </a:r>
-            <a:endParaRPr lang="en-US" sz="1150" dirty="0"/>
+            <a:endParaRPr lang="en-US" sz="1400" dirty="0">
+              <a:solidFill>
+                <a:srgbClr val="334155"/>
+              </a:solidFill>
+              <a:latin typeface="Calibri" panose="020F0502020204030204" pitchFamily="34" charset="0"/>
+              <a:ea typeface="Calibri" panose="020F0502020204030204" pitchFamily="34" charset="-122"/>
+              <a:cs typeface="Calibri" panose="020F0502020204030204" pitchFamily="34" charset="-120"/>
+            </a:endParaRPr>
           </a:p>
         </p:txBody>
       </p:sp>
@@ -16723,7 +17944,7 @@
               <a:buNone/>
             </a:pPr>
             <a:r>
-              <a:rPr lang="en-US" sz="850" b="1" dirty="0">
+              <a:rPr lang="en-US" sz="950" b="1" dirty="0">
                 <a:solidFill>
                   <a:srgbClr val="FFFFFF"/>
                 </a:solidFill>
@@ -16733,7 +17954,14 @@
               </a:rPr>
               <a:t>Secondary Metric</a:t>
             </a:r>
-            <a:endParaRPr lang="en-US" sz="850" dirty="0"/>
+            <a:endParaRPr lang="en-US" sz="950" b="1" dirty="0">
+              <a:solidFill>
+                <a:srgbClr val="FFFFFF"/>
+              </a:solidFill>
+              <a:latin typeface="Calibri" panose="020F0502020204030204" pitchFamily="34" charset="0"/>
+              <a:ea typeface="Calibri" panose="020F0502020204030204" pitchFamily="34" charset="-122"/>
+              <a:cs typeface="Calibri" panose="020F0502020204030204" pitchFamily="34" charset="-120"/>
+            </a:endParaRPr>
           </a:p>
         </p:txBody>
       </p:sp>
@@ -16764,7 +17992,7 @@
               <a:buNone/>
             </a:pPr>
             <a:r>
-              <a:rPr lang="en-US" sz="1150" dirty="0">
+              <a:rPr lang="en-US" sz="1400" dirty="0">
                 <a:solidFill>
                   <a:srgbClr val="334155"/>
                 </a:solidFill>
@@ -16774,7 +18002,14 @@
               </a:rPr>
               <a:t>Harmonic mean of Precision &amp; Recall on the positive class. Balances both aspects of churn detection quality.</a:t>
             </a:r>
-            <a:endParaRPr lang="en-US" sz="1150" dirty="0"/>
+            <a:endParaRPr lang="en-US" sz="1400" dirty="0">
+              <a:solidFill>
+                <a:srgbClr val="334155"/>
+              </a:solidFill>
+              <a:latin typeface="Calibri" panose="020F0502020204030204" pitchFamily="34" charset="0"/>
+              <a:ea typeface="Calibri" panose="020F0502020204030204" pitchFamily="34" charset="-122"/>
+              <a:cs typeface="Calibri" panose="020F0502020204030204" pitchFamily="34" charset="-120"/>
+            </a:endParaRPr>
           </a:p>
         </p:txBody>
       </p:sp>
@@ -16924,7 +18159,7 @@
               <a:buNone/>
             </a:pPr>
             <a:r>
-              <a:rPr lang="en-US" sz="850" b="1" dirty="0">
+              <a:rPr lang="en-US" sz="950" b="1" dirty="0">
                 <a:solidFill>
                   <a:srgbClr val="FFFFFF"/>
                 </a:solidFill>
@@ -16934,7 +18169,14 @@
               </a:rPr>
               <a:t>Business Priority</a:t>
             </a:r>
-            <a:endParaRPr lang="en-US" sz="850" dirty="0"/>
+            <a:endParaRPr lang="en-US" sz="950" b="1" dirty="0">
+              <a:solidFill>
+                <a:srgbClr val="FFFFFF"/>
+              </a:solidFill>
+              <a:latin typeface="Calibri" panose="020F0502020204030204" pitchFamily="34" charset="0"/>
+              <a:ea typeface="Calibri" panose="020F0502020204030204" pitchFamily="34" charset="-122"/>
+              <a:cs typeface="Calibri" panose="020F0502020204030204" pitchFamily="34" charset="-120"/>
+            </a:endParaRPr>
           </a:p>
         </p:txBody>
       </p:sp>
@@ -16965,7 +18207,7 @@
               <a:buNone/>
             </a:pPr>
             <a:r>
-              <a:rPr lang="en-US" sz="1150" dirty="0">
+              <a:rPr lang="en-US" sz="1400" dirty="0">
                 <a:solidFill>
                   <a:srgbClr val="334155"/>
                 </a:solidFill>
@@ -16975,7 +18217,14 @@
               </a:rPr>
               <a:t>% of actual churners correctly flagged. Critical: a missed churner (FN) costs ₹40,000 — recall is maximised within cost budget.</a:t>
             </a:r>
-            <a:endParaRPr lang="en-US" sz="1150" dirty="0"/>
+            <a:endParaRPr lang="en-US" sz="1400" dirty="0">
+              <a:solidFill>
+                <a:srgbClr val="334155"/>
+              </a:solidFill>
+              <a:latin typeface="Calibri" panose="020F0502020204030204" pitchFamily="34" charset="0"/>
+              <a:ea typeface="Calibri" panose="020F0502020204030204" pitchFamily="34" charset="-122"/>
+              <a:cs typeface="Calibri" panose="020F0502020204030204" pitchFamily="34" charset="-120"/>
+            </a:endParaRPr>
           </a:p>
         </p:txBody>
       </p:sp>
@@ -17125,7 +18374,7 @@
               <a:buNone/>
             </a:pPr>
             <a:r>
-              <a:rPr lang="en-US" sz="850" b="1" dirty="0">
+              <a:rPr lang="en-US" sz="1050" b="1" dirty="0">
                 <a:solidFill>
                   <a:srgbClr val="FFFFFF"/>
                 </a:solidFill>
@@ -17135,7 +18384,14 @@
               </a:rPr>
               <a:t>Cost Control</a:t>
             </a:r>
-            <a:endParaRPr lang="en-US" sz="850" dirty="0"/>
+            <a:endParaRPr lang="en-US" sz="1050" b="1" dirty="0">
+              <a:solidFill>
+                <a:srgbClr val="FFFFFF"/>
+              </a:solidFill>
+              <a:latin typeface="Calibri" panose="020F0502020204030204" pitchFamily="34" charset="0"/>
+              <a:ea typeface="Calibri" panose="020F0502020204030204" pitchFamily="34" charset="-122"/>
+              <a:cs typeface="Calibri" panose="020F0502020204030204" pitchFamily="34" charset="-120"/>
+            </a:endParaRPr>
           </a:p>
         </p:txBody>
       </p:sp>
@@ -17166,7 +18422,7 @@
               <a:buNone/>
             </a:pPr>
             <a:r>
-              <a:rPr lang="en-US" sz="1150" dirty="0">
+              <a:rPr lang="en-US" sz="1400" dirty="0">
                 <a:solidFill>
                   <a:srgbClr val="334155"/>
                 </a:solidFill>
@@ -17176,7 +18432,14 @@
               </a:rPr>
               <a:t>% of flagged customers who actually churn. Controls over-spending retention budget on loyal customers.</a:t>
             </a:r>
-            <a:endParaRPr lang="en-US" sz="1150" dirty="0"/>
+            <a:endParaRPr lang="en-US" sz="1400" dirty="0">
+              <a:solidFill>
+                <a:srgbClr val="334155"/>
+              </a:solidFill>
+              <a:latin typeface="Calibri" panose="020F0502020204030204" pitchFamily="34" charset="0"/>
+              <a:ea typeface="Calibri" panose="020F0502020204030204" pitchFamily="34" charset="-122"/>
+              <a:cs typeface="Calibri" panose="020F0502020204030204" pitchFamily="34" charset="-120"/>
+            </a:endParaRPr>
           </a:p>
         </p:txBody>
       </p:sp>
@@ -17229,7 +18492,7 @@
               <a:buNone/>
             </a:pPr>
             <a:r>
-              <a:rPr lang="en-US" sz="1150" b="1" dirty="0">
+              <a:rPr lang="en-US" sz="1200" b="1" dirty="0">
                 <a:solidFill>
                   <a:srgbClr val="0D9488"/>
                 </a:solidFill>
@@ -17239,7 +18502,14 @@
               </a:rPr>
               <a:t>Business Cost Formula:   Total Cost  =  (FP × ₹500)  +  (FN × ₹40,000)   →   Threshold optimised to MINIMISE this value</a:t>
             </a:r>
-            <a:endParaRPr lang="en-US" sz="1150" dirty="0"/>
+            <a:endParaRPr lang="en-US" sz="1200" b="1" dirty="0">
+              <a:solidFill>
+                <a:srgbClr val="0D9488"/>
+              </a:solidFill>
+              <a:latin typeface="Calibri" panose="020F0502020204030204" pitchFamily="34" charset="0"/>
+              <a:ea typeface="Calibri" panose="020F0502020204030204" pitchFamily="34" charset="-122"/>
+              <a:cs typeface="Calibri" panose="020F0502020204030204" pitchFamily="34" charset="-120"/>
+            </a:endParaRPr>
           </a:p>
         </p:txBody>
       </p:sp>
@@ -17284,7 +18554,7 @@
         </p:nvSpPr>
         <p:spPr>
           <a:xfrm>
-            <a:off x="457200" y="160020"/>
+            <a:off x="457200" y="83820"/>
             <a:ext cx="7315200" cy="548640"/>
           </a:xfrm>
           <a:prstGeom prst="rect">
@@ -17322,7 +18592,7 @@
         </p:nvSpPr>
         <p:spPr>
           <a:xfrm>
-            <a:off x="457200" y="647700"/>
+            <a:off x="457200" y="579120"/>
             <a:ext cx="7315200" cy="274320"/>
           </a:xfrm>
           <a:prstGeom prst="rect">
@@ -17360,7 +18630,7 @@
         </p:nvSpPr>
         <p:spPr>
           <a:xfrm>
-            <a:off x="457200" y="960120"/>
+            <a:off x="457200" y="929640"/>
             <a:ext cx="8229600" cy="36576"/>
           </a:xfrm>
           <a:prstGeom prst="rect">
@@ -17471,7 +18741,7 @@
               <a:buNone/>
             </a:pPr>
             <a:r>
-              <a:rPr lang="en-US" sz="1200" b="1" dirty="0">
+              <a:rPr lang="en-US" sz="1400" b="1" dirty="0">
                 <a:solidFill>
                   <a:srgbClr val="FFFFFF"/>
                 </a:solidFill>
@@ -17481,7 +18751,14 @@
               </a:rPr>
               <a:t>PR-AUC</a:t>
             </a:r>
-            <a:endParaRPr lang="en-US" sz="1200" dirty="0"/>
+            <a:endParaRPr lang="en-US" sz="1400" b="1" dirty="0">
+              <a:solidFill>
+                <a:srgbClr val="FFFFFF"/>
+              </a:solidFill>
+              <a:latin typeface="Calibri" panose="020F0502020204030204" pitchFamily="34" charset="0"/>
+              <a:ea typeface="Calibri" panose="020F0502020204030204" pitchFamily="34" charset="-122"/>
+              <a:cs typeface="Calibri" panose="020F0502020204030204" pitchFamily="34" charset="-120"/>
+            </a:endParaRPr>
           </a:p>
         </p:txBody>
       </p:sp>
@@ -17509,7 +18786,7 @@
               <a:buNone/>
             </a:pPr>
             <a:r>
-              <a:rPr lang="en-US" sz="950" dirty="0">
+              <a:rPr lang="en-US" sz="1200" dirty="0">
                 <a:solidFill>
                   <a:srgbClr val="94A3B8"/>
                 </a:solidFill>
@@ -17519,7 +18796,14 @@
               </a:rPr>
               <a:t>near-perfect</a:t>
             </a:r>
-            <a:endParaRPr lang="en-US" sz="950" dirty="0"/>
+            <a:endParaRPr lang="en-US" sz="1200" dirty="0">
+              <a:solidFill>
+                <a:srgbClr val="94A3B8"/>
+              </a:solidFill>
+              <a:latin typeface="Calibri" panose="020F0502020204030204" pitchFamily="34" charset="0"/>
+              <a:ea typeface="Calibri" panose="020F0502020204030204" pitchFamily="34" charset="-122"/>
+              <a:cs typeface="Calibri" panose="020F0502020204030204" pitchFamily="34" charset="-120"/>
+            </a:endParaRPr>
           </a:p>
         </p:txBody>
       </p:sp>
@@ -17617,7 +18901,7 @@
               <a:buNone/>
             </a:pPr>
             <a:r>
-              <a:rPr lang="en-US" sz="1200" b="1" dirty="0">
+              <a:rPr lang="en-US" sz="1400" b="1" dirty="0">
                 <a:solidFill>
                   <a:srgbClr val="FFFFFF"/>
                 </a:solidFill>
@@ -17627,7 +18911,14 @@
               </a:rPr>
               <a:t>F1-Score</a:t>
             </a:r>
-            <a:endParaRPr lang="en-US" sz="1200" dirty="0"/>
+            <a:endParaRPr lang="en-US" sz="1400" b="1" dirty="0">
+              <a:solidFill>
+                <a:srgbClr val="FFFFFF"/>
+              </a:solidFill>
+              <a:latin typeface="Calibri" panose="020F0502020204030204" pitchFamily="34" charset="0"/>
+              <a:ea typeface="Calibri" panose="020F0502020204030204" pitchFamily="34" charset="-122"/>
+              <a:cs typeface="Calibri" panose="020F0502020204030204" pitchFamily="34" charset="-120"/>
+            </a:endParaRPr>
           </a:p>
         </p:txBody>
       </p:sp>
@@ -17655,7 +18946,7 @@
               <a:buNone/>
             </a:pPr>
             <a:r>
-              <a:rPr lang="en-US" sz="950" dirty="0">
+              <a:rPr lang="en-US" sz="1200" dirty="0">
                 <a:solidFill>
                   <a:srgbClr val="94A3B8"/>
                 </a:solidFill>
@@ -17665,7 +18956,14 @@
               </a:rPr>
               <a:t>at optimal threshold</a:t>
             </a:r>
-            <a:endParaRPr lang="en-US" sz="950" dirty="0"/>
+            <a:endParaRPr lang="en-US" sz="1200" dirty="0">
+              <a:solidFill>
+                <a:srgbClr val="94A3B8"/>
+              </a:solidFill>
+              <a:latin typeface="Calibri" panose="020F0502020204030204" pitchFamily="34" charset="0"/>
+              <a:ea typeface="Calibri" panose="020F0502020204030204" pitchFamily="34" charset="-122"/>
+              <a:cs typeface="Calibri" panose="020F0502020204030204" pitchFamily="34" charset="-120"/>
+            </a:endParaRPr>
           </a:p>
         </p:txBody>
       </p:sp>
@@ -17763,7 +19061,7 @@
               <a:buNone/>
             </a:pPr>
             <a:r>
-              <a:rPr lang="en-US" sz="1200" b="1" dirty="0">
+              <a:rPr lang="en-US" sz="1400" b="1" dirty="0">
                 <a:solidFill>
                   <a:srgbClr val="FFFFFF"/>
                 </a:solidFill>
@@ -17773,7 +19071,14 @@
               </a:rPr>
               <a:t>Recall</a:t>
             </a:r>
-            <a:endParaRPr lang="en-US" sz="1200" dirty="0"/>
+            <a:endParaRPr lang="en-US" sz="1400" b="1" dirty="0">
+              <a:solidFill>
+                <a:srgbClr val="FFFFFF"/>
+              </a:solidFill>
+              <a:latin typeface="Calibri" panose="020F0502020204030204" pitchFamily="34" charset="0"/>
+              <a:ea typeface="Calibri" panose="020F0502020204030204" pitchFamily="34" charset="-122"/>
+              <a:cs typeface="Calibri" panose="020F0502020204030204" pitchFamily="34" charset="-120"/>
+            </a:endParaRPr>
           </a:p>
         </p:txBody>
       </p:sp>
@@ -17801,7 +19106,7 @@
               <a:buNone/>
             </a:pPr>
             <a:r>
-              <a:rPr lang="en-US" sz="950" dirty="0">
+              <a:rPr lang="en-US" sz="1200" dirty="0">
                 <a:solidFill>
                   <a:srgbClr val="94A3B8"/>
                 </a:solidFill>
@@ -17811,7 +19116,14 @@
               </a:rPr>
               <a:t>all churners detected</a:t>
             </a:r>
-            <a:endParaRPr lang="en-US" sz="950" dirty="0"/>
+            <a:endParaRPr lang="en-US" sz="1200" dirty="0">
+              <a:solidFill>
+                <a:srgbClr val="94A3B8"/>
+              </a:solidFill>
+              <a:latin typeface="Calibri" panose="020F0502020204030204" pitchFamily="34" charset="0"/>
+              <a:ea typeface="Calibri" panose="020F0502020204030204" pitchFamily="34" charset="-122"/>
+              <a:cs typeface="Calibri" panose="020F0502020204030204" pitchFamily="34" charset="-120"/>
+            </a:endParaRPr>
           </a:p>
         </p:txBody>
       </p:sp>
@@ -17909,7 +19221,7 @@
               <a:buNone/>
             </a:pPr>
             <a:r>
-              <a:rPr lang="en-US" sz="1200" b="1" dirty="0">
+              <a:rPr lang="en-US" sz="1400" b="1" dirty="0">
                 <a:solidFill>
                   <a:srgbClr val="FFFFFF"/>
                 </a:solidFill>
@@ -17919,7 +19231,14 @@
               </a:rPr>
               <a:t>Precision</a:t>
             </a:r>
-            <a:endParaRPr lang="en-US" sz="1200" dirty="0"/>
+            <a:endParaRPr lang="en-US" sz="1400" b="1" dirty="0">
+              <a:solidFill>
+                <a:srgbClr val="FFFFFF"/>
+              </a:solidFill>
+              <a:latin typeface="Calibri" panose="020F0502020204030204" pitchFamily="34" charset="0"/>
+              <a:ea typeface="Calibri" panose="020F0502020204030204" pitchFamily="34" charset="-122"/>
+              <a:cs typeface="Calibri" panose="020F0502020204030204" pitchFamily="34" charset="-120"/>
+            </a:endParaRPr>
           </a:p>
         </p:txBody>
       </p:sp>
@@ -17947,7 +19266,7 @@
               <a:buNone/>
             </a:pPr>
             <a:r>
-              <a:rPr lang="en-US" sz="950" dirty="0">
+              <a:rPr lang="en-US" sz="1200" dirty="0">
                 <a:solidFill>
                   <a:srgbClr val="94A3B8"/>
                 </a:solidFill>
@@ -17957,7 +19276,14 @@
               </a:rPr>
               <a:t>low false alarm rate</a:t>
             </a:r>
-            <a:endParaRPr lang="en-US" sz="950" dirty="0"/>
+            <a:endParaRPr lang="en-US" sz="1200" dirty="0">
+              <a:solidFill>
+                <a:srgbClr val="94A3B8"/>
+              </a:solidFill>
+              <a:latin typeface="Calibri" panose="020F0502020204030204" pitchFamily="34" charset="0"/>
+              <a:ea typeface="Calibri" panose="020F0502020204030204" pitchFamily="34" charset="-122"/>
+              <a:cs typeface="Calibri" panose="020F0502020204030204" pitchFamily="34" charset="-120"/>
+            </a:endParaRPr>
           </a:p>
         </p:txBody>
       </p:sp>
@@ -17994,7 +19320,7 @@
         </p:nvSpPr>
         <p:spPr>
           <a:xfrm>
-            <a:off x="411480" y="2511552"/>
+            <a:off x="982980" y="2458212"/>
             <a:ext cx="4297680" cy="320040"/>
           </a:xfrm>
           <a:prstGeom prst="rect">
@@ -18024,368 +19350,397 @@
           </a:p>
         </p:txBody>
       </p:sp>
-      <p:sp>
-        <p:nvSpPr>
-          <p:cNvPr id="23" name="Shape 21"/>
-          <p:cNvSpPr/>
-          <p:nvPr/>
-        </p:nvSpPr>
-        <p:spPr>
-          <a:xfrm>
-            <a:off x="457200" y="2926080"/>
-            <a:ext cx="1783080" cy="777240"/>
-          </a:xfrm>
-          <a:prstGeom prst="rect">
-            <a:avLst/>
-          </a:prstGeom>
-          <a:solidFill>
-            <a:srgbClr val="0D9488"/>
-          </a:solidFill>
-          <a:ln w="12700">
+      <p:grpSp>
+        <p:nvGrpSpPr>
+          <p:cNvPr id="41" name="Group 40"/>
+          <p:cNvGrpSpPr/>
+          <p:nvPr/>
+        </p:nvGrpSpPr>
+        <p:grpSpPr>
+          <a:xfrm>
+            <a:off x="670560" y="2793365"/>
+            <a:ext cx="3749040" cy="1938655"/>
+            <a:chOff x="720" y="4291"/>
+            <a:chExt cx="5904" cy="3053"/>
+          </a:xfrm>
+        </p:grpSpPr>
+        <p:sp>
+          <p:nvSpPr>
+            <p:cNvPr id="23" name="Shape 21"/>
+            <p:cNvSpPr/>
+            <p:nvPr/>
+          </p:nvSpPr>
+          <p:spPr>
+            <a:xfrm>
+              <a:off x="720" y="4608"/>
+              <a:ext cx="2808" cy="1224"/>
+            </a:xfrm>
+            <a:prstGeom prst="rect">
+              <a:avLst/>
+            </a:prstGeom>
             <a:solidFill>
               <a:srgbClr val="0D9488"/>
             </a:solidFill>
-            <a:prstDash val="solid"/>
-          </a:ln>
-        </p:spPr>
-      </p:sp>
-      <p:sp>
-        <p:nvSpPr>
-          <p:cNvPr id="24" name="Text 22"/>
-          <p:cNvSpPr/>
-          <p:nvPr/>
-        </p:nvSpPr>
-        <p:spPr>
-          <a:xfrm>
-            <a:off x="457200" y="2926080"/>
-            <a:ext cx="1783080" cy="777240"/>
-          </a:xfrm>
-          <a:prstGeom prst="rect">
-            <a:avLst/>
-          </a:prstGeom>
-          <a:noFill/>
-        </p:spPr>
-        <p:txBody>
-          <a:bodyPr wrap="square" rtlCol="0" anchor="ctr"/>
-          <a:lstStyle/>
-          <a:p>
-            <a:pPr marL="0" indent="0" algn="ctr">
-              <a:buNone/>
-            </a:pPr>
-            <a:r>
-              <a:rPr lang="en-US" sz="1300" b="1" dirty="0">
-                <a:solidFill>
-                  <a:srgbClr val="FFFFFF"/>
-                </a:solidFill>
-                <a:latin typeface="Calibri" panose="020F0502020204030204" pitchFamily="34" charset="0"/>
-                <a:ea typeface="Calibri" panose="020F0502020204030204" pitchFamily="34" charset="-122"/>
-                <a:cs typeface="Calibri" panose="020F0502020204030204" pitchFamily="34" charset="-120"/>
-              </a:rPr>
-              <a:t>TN ✓</a:t>
-            </a:r>
-            <a:endParaRPr lang="en-US" sz="1300" dirty="0"/>
-          </a:p>
-        </p:txBody>
-      </p:sp>
-      <p:sp>
-        <p:nvSpPr>
-          <p:cNvPr id="25" name="Shape 23"/>
-          <p:cNvSpPr/>
-          <p:nvPr/>
-        </p:nvSpPr>
-        <p:spPr>
-          <a:xfrm>
-            <a:off x="2423160" y="2926080"/>
-            <a:ext cx="1783080" cy="777240"/>
-          </a:xfrm>
-          <a:prstGeom prst="rect">
-            <a:avLst/>
-          </a:prstGeom>
-          <a:solidFill>
-            <a:srgbClr val="EF4444"/>
-          </a:solidFill>
-          <a:ln w="12700">
+            <a:ln w="12700">
+              <a:solidFill>
+                <a:srgbClr val="0D9488"/>
+              </a:solidFill>
+              <a:prstDash val="solid"/>
+            </a:ln>
+          </p:spPr>
+        </p:sp>
+        <p:sp>
+          <p:nvSpPr>
+            <p:cNvPr id="24" name="Text 22"/>
+            <p:cNvSpPr/>
+            <p:nvPr/>
+          </p:nvSpPr>
+          <p:spPr>
+            <a:xfrm>
+              <a:off x="720" y="4608"/>
+              <a:ext cx="2808" cy="1224"/>
+            </a:xfrm>
+            <a:prstGeom prst="rect">
+              <a:avLst/>
+            </a:prstGeom>
+            <a:noFill/>
+          </p:spPr>
+          <p:txBody>
+            <a:bodyPr wrap="square" rtlCol="0" anchor="ctr"/>
+            <a:lstStyle/>
+            <a:p>
+              <a:pPr marL="0" indent="0" algn="ctr">
+                <a:buNone/>
+              </a:pPr>
+              <a:r>
+                <a:rPr lang="en-US" sz="1300" b="1" dirty="0">
+                  <a:solidFill>
+                    <a:srgbClr val="FFFFFF"/>
+                  </a:solidFill>
+                  <a:latin typeface="Calibri" panose="020F0502020204030204" pitchFamily="34" charset="0"/>
+                  <a:ea typeface="Calibri" panose="020F0502020204030204" pitchFamily="34" charset="-122"/>
+                  <a:cs typeface="Calibri" panose="020F0502020204030204" pitchFamily="34" charset="-120"/>
+                </a:rPr>
+                <a:t>TN ✓</a:t>
+              </a:r>
+              <a:endParaRPr lang="en-US" sz="1300" dirty="0"/>
+            </a:p>
+          </p:txBody>
+        </p:sp>
+        <p:sp>
+          <p:nvSpPr>
+            <p:cNvPr id="25" name="Shape 23"/>
+            <p:cNvSpPr/>
+            <p:nvPr/>
+          </p:nvSpPr>
+          <p:spPr>
+            <a:xfrm>
+              <a:off x="3816" y="4608"/>
+              <a:ext cx="2808" cy="1224"/>
+            </a:xfrm>
+            <a:prstGeom prst="rect">
+              <a:avLst/>
+            </a:prstGeom>
             <a:solidFill>
               <a:srgbClr val="EF4444"/>
             </a:solidFill>
-            <a:prstDash val="solid"/>
-          </a:ln>
-        </p:spPr>
-      </p:sp>
-      <p:sp>
-        <p:nvSpPr>
-          <p:cNvPr id="26" name="Text 24"/>
-          <p:cNvSpPr/>
-          <p:nvPr/>
-        </p:nvSpPr>
-        <p:spPr>
-          <a:xfrm>
-            <a:off x="2423160" y="2926080"/>
-            <a:ext cx="1783080" cy="777240"/>
-          </a:xfrm>
-          <a:prstGeom prst="rect">
-            <a:avLst/>
-          </a:prstGeom>
-          <a:noFill/>
-        </p:spPr>
-        <p:txBody>
-          <a:bodyPr wrap="square" rtlCol="0" anchor="ctr"/>
-          <a:lstStyle/>
-          <a:p>
-            <a:pPr marL="0" indent="0" algn="ctr">
-              <a:buNone/>
-            </a:pPr>
-            <a:r>
-              <a:rPr lang="en-US" sz="1300" b="1" dirty="0">
-                <a:solidFill>
-                  <a:srgbClr val="FFFFFF"/>
-                </a:solidFill>
-                <a:latin typeface="Calibri" panose="020F0502020204030204" pitchFamily="34" charset="0"/>
-                <a:ea typeface="Calibri" panose="020F0502020204030204" pitchFamily="34" charset="-122"/>
-                <a:cs typeface="Calibri" panose="020F0502020204030204" pitchFamily="34" charset="-120"/>
-              </a:rPr>
-              <a:t>FP</a:t>
-            </a:r>
-            <a:endParaRPr lang="en-US" sz="1300" dirty="0"/>
-          </a:p>
-          <a:p>
-            <a:pPr marL="0" indent="0" algn="ctr">
-              <a:buNone/>
-            </a:pPr>
-            <a:r>
-              <a:rPr lang="en-US" sz="1300" b="1" dirty="0">
-                <a:solidFill>
-                  <a:srgbClr val="FFFFFF"/>
-                </a:solidFill>
-                <a:latin typeface="Calibri" panose="020F0502020204030204" pitchFamily="34" charset="0"/>
-                <a:ea typeface="Calibri" panose="020F0502020204030204" pitchFamily="34" charset="-122"/>
-                <a:cs typeface="Calibri" panose="020F0502020204030204" pitchFamily="34" charset="-120"/>
-              </a:rPr>
-              <a:t>₹500/case</a:t>
-            </a:r>
-            <a:endParaRPr lang="en-US" sz="1300" dirty="0"/>
-          </a:p>
-        </p:txBody>
-      </p:sp>
-      <p:sp>
-        <p:nvSpPr>
-          <p:cNvPr id="27" name="Shape 25"/>
-          <p:cNvSpPr/>
-          <p:nvPr/>
-        </p:nvSpPr>
-        <p:spPr>
-          <a:xfrm>
-            <a:off x="457200" y="3886200"/>
-            <a:ext cx="1783080" cy="777240"/>
-          </a:xfrm>
-          <a:prstGeom prst="rect">
-            <a:avLst/>
-          </a:prstGeom>
-          <a:solidFill>
-            <a:srgbClr val="EF4444"/>
-          </a:solidFill>
-          <a:ln w="12700">
+            <a:ln w="12700">
+              <a:solidFill>
+                <a:srgbClr val="EF4444"/>
+              </a:solidFill>
+              <a:prstDash val="solid"/>
+            </a:ln>
+          </p:spPr>
+        </p:sp>
+        <p:sp>
+          <p:nvSpPr>
+            <p:cNvPr id="26" name="Text 24"/>
+            <p:cNvSpPr/>
+            <p:nvPr/>
+          </p:nvSpPr>
+          <p:spPr>
+            <a:xfrm>
+              <a:off x="3816" y="4608"/>
+              <a:ext cx="2808" cy="1224"/>
+            </a:xfrm>
+            <a:prstGeom prst="rect">
+              <a:avLst/>
+            </a:prstGeom>
+            <a:noFill/>
+          </p:spPr>
+          <p:txBody>
+            <a:bodyPr wrap="square" rtlCol="0" anchor="ctr"/>
+            <a:lstStyle/>
+            <a:p>
+              <a:pPr marL="0" indent="0" algn="ctr">
+                <a:buNone/>
+              </a:pPr>
+              <a:r>
+                <a:rPr lang="en-US" sz="1300" b="1" dirty="0">
+                  <a:solidFill>
+                    <a:srgbClr val="FFFFFF"/>
+                  </a:solidFill>
+                  <a:latin typeface="Calibri" panose="020F0502020204030204" pitchFamily="34" charset="0"/>
+                  <a:ea typeface="Calibri" panose="020F0502020204030204" pitchFamily="34" charset="-122"/>
+                  <a:cs typeface="Calibri" panose="020F0502020204030204" pitchFamily="34" charset="-120"/>
+                </a:rPr>
+                <a:t>FP</a:t>
+              </a:r>
+              <a:endParaRPr lang="en-US" sz="1300" dirty="0"/>
+            </a:p>
+            <a:p>
+              <a:pPr marL="0" indent="0" algn="ctr">
+                <a:buNone/>
+              </a:pPr>
+              <a:r>
+                <a:rPr lang="en-US" sz="1300" b="1" dirty="0">
+                  <a:solidFill>
+                    <a:srgbClr val="FFFFFF"/>
+                  </a:solidFill>
+                  <a:latin typeface="Calibri" panose="020F0502020204030204" pitchFamily="34" charset="0"/>
+                  <a:ea typeface="Calibri" panose="020F0502020204030204" pitchFamily="34" charset="-122"/>
+                  <a:cs typeface="Calibri" panose="020F0502020204030204" pitchFamily="34" charset="-120"/>
+                </a:rPr>
+                <a:t>₹500/case</a:t>
+              </a:r>
+              <a:endParaRPr lang="en-US" sz="1300" dirty="0"/>
+            </a:p>
+          </p:txBody>
+        </p:sp>
+        <p:sp>
+          <p:nvSpPr>
+            <p:cNvPr id="27" name="Shape 25"/>
+            <p:cNvSpPr/>
+            <p:nvPr/>
+          </p:nvSpPr>
+          <p:spPr>
+            <a:xfrm>
+              <a:off x="720" y="6120"/>
+              <a:ext cx="2808" cy="1224"/>
+            </a:xfrm>
+            <a:prstGeom prst="rect">
+              <a:avLst/>
+            </a:prstGeom>
             <a:solidFill>
               <a:srgbClr val="EF4444"/>
             </a:solidFill>
-            <a:prstDash val="solid"/>
-          </a:ln>
-        </p:spPr>
-      </p:sp>
-      <p:sp>
-        <p:nvSpPr>
-          <p:cNvPr id="28" name="Text 26"/>
-          <p:cNvSpPr/>
-          <p:nvPr/>
-        </p:nvSpPr>
-        <p:spPr>
-          <a:xfrm>
-            <a:off x="457200" y="3886200"/>
-            <a:ext cx="1783080" cy="777240"/>
-          </a:xfrm>
-          <a:prstGeom prst="rect">
-            <a:avLst/>
-          </a:prstGeom>
-          <a:noFill/>
-        </p:spPr>
-        <p:txBody>
-          <a:bodyPr wrap="square" rtlCol="0" anchor="ctr"/>
-          <a:lstStyle/>
-          <a:p>
-            <a:pPr marL="0" indent="0" algn="ctr">
-              <a:buNone/>
-            </a:pPr>
-            <a:r>
-              <a:rPr lang="en-US" sz="1300" b="1" dirty="0">
-                <a:solidFill>
-                  <a:srgbClr val="FFFFFF"/>
-                </a:solidFill>
-                <a:latin typeface="Calibri" panose="020F0502020204030204" pitchFamily="34" charset="0"/>
-                <a:ea typeface="Calibri" panose="020F0502020204030204" pitchFamily="34" charset="-122"/>
-                <a:cs typeface="Calibri" panose="020F0502020204030204" pitchFamily="34" charset="-120"/>
-              </a:rPr>
-              <a:t>FN</a:t>
-            </a:r>
-            <a:endParaRPr lang="en-US" sz="1300" dirty="0"/>
-          </a:p>
-          <a:p>
-            <a:pPr marL="0" indent="0" algn="ctr">
-              <a:buNone/>
-            </a:pPr>
-            <a:r>
-              <a:rPr lang="en-US" sz="1300" b="1" dirty="0">
-                <a:solidFill>
-                  <a:srgbClr val="FFFFFF"/>
-                </a:solidFill>
-                <a:latin typeface="Calibri" panose="020F0502020204030204" pitchFamily="34" charset="0"/>
-                <a:ea typeface="Calibri" panose="020F0502020204030204" pitchFamily="34" charset="-122"/>
-                <a:cs typeface="Calibri" panose="020F0502020204030204" pitchFamily="34" charset="-120"/>
-              </a:rPr>
-              <a:t>₹40,000/case</a:t>
-            </a:r>
-            <a:endParaRPr lang="en-US" sz="1300" dirty="0"/>
-          </a:p>
-        </p:txBody>
-      </p:sp>
-      <p:sp>
-        <p:nvSpPr>
-          <p:cNvPr id="29" name="Shape 27"/>
-          <p:cNvSpPr/>
-          <p:nvPr/>
-        </p:nvSpPr>
-        <p:spPr>
-          <a:xfrm>
-            <a:off x="2423160" y="3886200"/>
-            <a:ext cx="1783080" cy="777240"/>
-          </a:xfrm>
-          <a:prstGeom prst="rect">
-            <a:avLst/>
-          </a:prstGeom>
-          <a:solidFill>
-            <a:srgbClr val="22C55E"/>
-          </a:solidFill>
-          <a:ln w="12700">
+            <a:ln w="12700">
+              <a:solidFill>
+                <a:srgbClr val="EF4444"/>
+              </a:solidFill>
+              <a:prstDash val="solid"/>
+            </a:ln>
+          </p:spPr>
+        </p:sp>
+        <p:sp>
+          <p:nvSpPr>
+            <p:cNvPr id="28" name="Text 26"/>
+            <p:cNvSpPr/>
+            <p:nvPr/>
+          </p:nvSpPr>
+          <p:spPr>
+            <a:xfrm>
+              <a:off x="720" y="6120"/>
+              <a:ext cx="2808" cy="1224"/>
+            </a:xfrm>
+            <a:prstGeom prst="rect">
+              <a:avLst/>
+            </a:prstGeom>
+            <a:noFill/>
+          </p:spPr>
+          <p:txBody>
+            <a:bodyPr wrap="square" rtlCol="0" anchor="ctr"/>
+            <a:lstStyle/>
+            <a:p>
+              <a:pPr marL="0" indent="0" algn="ctr">
+                <a:buNone/>
+              </a:pPr>
+              <a:r>
+                <a:rPr lang="en-US" sz="1300" b="1" dirty="0">
+                  <a:solidFill>
+                    <a:srgbClr val="FFFFFF"/>
+                  </a:solidFill>
+                  <a:latin typeface="Calibri" panose="020F0502020204030204" pitchFamily="34" charset="0"/>
+                  <a:ea typeface="Calibri" panose="020F0502020204030204" pitchFamily="34" charset="-122"/>
+                  <a:cs typeface="Calibri" panose="020F0502020204030204" pitchFamily="34" charset="-120"/>
+                </a:rPr>
+                <a:t>FN</a:t>
+              </a:r>
+              <a:endParaRPr lang="en-US" sz="1300" dirty="0"/>
+            </a:p>
+            <a:p>
+              <a:pPr marL="0" indent="0" algn="ctr">
+                <a:buNone/>
+              </a:pPr>
+              <a:r>
+                <a:rPr lang="en-US" sz="1300" b="1" dirty="0">
+                  <a:solidFill>
+                    <a:srgbClr val="FFFFFF"/>
+                  </a:solidFill>
+                  <a:latin typeface="Calibri" panose="020F0502020204030204" pitchFamily="34" charset="0"/>
+                  <a:ea typeface="Calibri" panose="020F0502020204030204" pitchFamily="34" charset="-122"/>
+                  <a:cs typeface="Calibri" panose="020F0502020204030204" pitchFamily="34" charset="-120"/>
+                </a:rPr>
+                <a:t>₹40,000/case</a:t>
+              </a:r>
+              <a:endParaRPr lang="en-US" sz="1300" dirty="0"/>
+            </a:p>
+          </p:txBody>
+        </p:sp>
+        <p:sp>
+          <p:nvSpPr>
+            <p:cNvPr id="29" name="Shape 27"/>
+            <p:cNvSpPr/>
+            <p:nvPr/>
+          </p:nvSpPr>
+          <p:spPr>
+            <a:xfrm>
+              <a:off x="3816" y="6120"/>
+              <a:ext cx="2808" cy="1224"/>
+            </a:xfrm>
+            <a:prstGeom prst="rect">
+              <a:avLst/>
+            </a:prstGeom>
             <a:solidFill>
               <a:srgbClr val="22C55E"/>
             </a:solidFill>
-            <a:prstDash val="solid"/>
-          </a:ln>
-        </p:spPr>
-      </p:sp>
-      <p:sp>
-        <p:nvSpPr>
-          <p:cNvPr id="30" name="Text 28"/>
-          <p:cNvSpPr/>
-          <p:nvPr/>
-        </p:nvSpPr>
-        <p:spPr>
-          <a:xfrm>
-            <a:off x="2423160" y="3886200"/>
-            <a:ext cx="1783080" cy="777240"/>
-          </a:xfrm>
-          <a:prstGeom prst="rect">
-            <a:avLst/>
-          </a:prstGeom>
-          <a:noFill/>
-        </p:spPr>
-        <p:txBody>
-          <a:bodyPr wrap="square" rtlCol="0" anchor="ctr"/>
-          <a:lstStyle/>
-          <a:p>
-            <a:pPr marL="0" indent="0" algn="ctr">
-              <a:buNone/>
-            </a:pPr>
-            <a:r>
-              <a:rPr lang="en-US" sz="1300" b="1" dirty="0">
-                <a:solidFill>
-                  <a:srgbClr val="FFFFFF"/>
-                </a:solidFill>
-                <a:latin typeface="Calibri" panose="020F0502020204030204" pitchFamily="34" charset="0"/>
-                <a:ea typeface="Calibri" panose="020F0502020204030204" pitchFamily="34" charset="-122"/>
-                <a:cs typeface="Calibri" panose="020F0502020204030204" pitchFamily="34" charset="-120"/>
-              </a:rPr>
-              <a:t>TP ✓</a:t>
-            </a:r>
-            <a:endParaRPr lang="en-US" sz="1300" dirty="0"/>
-          </a:p>
-        </p:txBody>
-      </p:sp>
-      <p:sp>
-        <p:nvSpPr>
-          <p:cNvPr id="31" name="Text 29"/>
-          <p:cNvSpPr/>
-          <p:nvPr/>
-        </p:nvSpPr>
-        <p:spPr>
-          <a:xfrm>
-            <a:off x="457200" y="2770632"/>
-            <a:ext cx="1783080" cy="164592"/>
-          </a:xfrm>
-          <a:prstGeom prst="rect">
-            <a:avLst/>
-          </a:prstGeom>
-          <a:noFill/>
-        </p:spPr>
-        <p:txBody>
-          <a:bodyPr wrap="square" rtlCol="0" anchor="ctr"/>
-          <a:lstStyle/>
-          <a:p>
-            <a:pPr marL="0" indent="0" algn="ctr">
-              <a:buNone/>
-            </a:pPr>
-            <a:r>
-              <a:rPr lang="en-US" sz="850" dirty="0">
+            <a:ln w="12700">
+              <a:solidFill>
+                <a:srgbClr val="22C55E"/>
+              </a:solidFill>
+              <a:prstDash val="solid"/>
+            </a:ln>
+          </p:spPr>
+        </p:sp>
+        <p:sp>
+          <p:nvSpPr>
+            <p:cNvPr id="30" name="Text 28"/>
+            <p:cNvSpPr/>
+            <p:nvPr/>
+          </p:nvSpPr>
+          <p:spPr>
+            <a:xfrm>
+              <a:off x="3816" y="6120"/>
+              <a:ext cx="2808" cy="1224"/>
+            </a:xfrm>
+            <a:prstGeom prst="rect">
+              <a:avLst/>
+            </a:prstGeom>
+            <a:noFill/>
+          </p:spPr>
+          <p:txBody>
+            <a:bodyPr wrap="square" rtlCol="0" anchor="ctr"/>
+            <a:lstStyle/>
+            <a:p>
+              <a:pPr marL="0" indent="0" algn="ctr">
+                <a:buNone/>
+              </a:pPr>
+              <a:r>
+                <a:rPr lang="en-US" sz="1300" b="1" dirty="0">
+                  <a:solidFill>
+                    <a:srgbClr val="FFFFFF"/>
+                  </a:solidFill>
+                  <a:latin typeface="Calibri" panose="020F0502020204030204" pitchFamily="34" charset="0"/>
+                  <a:ea typeface="Calibri" panose="020F0502020204030204" pitchFamily="34" charset="-122"/>
+                  <a:cs typeface="Calibri" panose="020F0502020204030204" pitchFamily="34" charset="-120"/>
+                </a:rPr>
+                <a:t>TP ✓</a:t>
+              </a:r>
+              <a:endParaRPr lang="en-US" sz="1300" dirty="0"/>
+            </a:p>
+          </p:txBody>
+        </p:sp>
+        <p:sp>
+          <p:nvSpPr>
+            <p:cNvPr id="31" name="Text 29"/>
+            <p:cNvSpPr/>
+            <p:nvPr/>
+          </p:nvSpPr>
+          <p:spPr>
+            <a:xfrm>
+              <a:off x="720" y="4303"/>
+              <a:ext cx="2808" cy="259"/>
+            </a:xfrm>
+            <a:prstGeom prst="rect">
+              <a:avLst/>
+            </a:prstGeom>
+            <a:noFill/>
+          </p:spPr>
+          <p:txBody>
+            <a:bodyPr wrap="square" rtlCol="0" anchor="ctr"/>
+            <a:lstStyle/>
+            <a:p>
+              <a:pPr marL="0" indent="0" algn="ctr">
+                <a:buNone/>
+              </a:pPr>
+              <a:r>
+                <a:rPr lang="en-US" sz="1050" dirty="0">
+                  <a:solidFill>
+                    <a:srgbClr val="94A3B8"/>
+                  </a:solidFill>
+                  <a:latin typeface="Calibri" panose="020F0502020204030204" pitchFamily="34" charset="0"/>
+                  <a:ea typeface="Calibri" panose="020F0502020204030204" pitchFamily="34" charset="-122"/>
+                  <a:cs typeface="Calibri" panose="020F0502020204030204" pitchFamily="34" charset="-120"/>
+                </a:rPr>
+                <a:t>Pred: No Churn</a:t>
+              </a:r>
+              <a:endParaRPr lang="en-US" sz="1050" dirty="0">
                 <a:solidFill>
                   <a:srgbClr val="94A3B8"/>
                 </a:solidFill>
                 <a:latin typeface="Calibri" panose="020F0502020204030204" pitchFamily="34" charset="0"/>
                 <a:ea typeface="Calibri" panose="020F0502020204030204" pitchFamily="34" charset="-122"/>
                 <a:cs typeface="Calibri" panose="020F0502020204030204" pitchFamily="34" charset="-120"/>
-              </a:rPr>
-              <a:t>Pred: No Churn</a:t>
-            </a:r>
-            <a:endParaRPr lang="en-US" sz="850" dirty="0"/>
-          </a:p>
-        </p:txBody>
-      </p:sp>
-      <p:sp>
-        <p:nvSpPr>
-          <p:cNvPr id="32" name="Text 30"/>
-          <p:cNvSpPr/>
-          <p:nvPr/>
-        </p:nvSpPr>
-        <p:spPr>
-          <a:xfrm>
-            <a:off x="2423160" y="2755392"/>
-            <a:ext cx="1783080" cy="164592"/>
-          </a:xfrm>
-          <a:prstGeom prst="rect">
-            <a:avLst/>
-          </a:prstGeom>
-          <a:noFill/>
-        </p:spPr>
-        <p:txBody>
-          <a:bodyPr wrap="square" rtlCol="0" anchor="ctr"/>
-          <a:lstStyle/>
-          <a:p>
-            <a:pPr marL="0" indent="0" algn="ctr">
-              <a:buNone/>
-            </a:pPr>
-            <a:r>
-              <a:rPr lang="en-US" sz="850" dirty="0">
+              </a:endParaRPr>
+            </a:p>
+          </p:txBody>
+        </p:sp>
+        <p:sp>
+          <p:nvSpPr>
+            <p:cNvPr id="32" name="Text 30"/>
+            <p:cNvSpPr/>
+            <p:nvPr/>
+          </p:nvSpPr>
+          <p:spPr>
+            <a:xfrm>
+              <a:off x="3816" y="4291"/>
+              <a:ext cx="2808" cy="259"/>
+            </a:xfrm>
+            <a:prstGeom prst="rect">
+              <a:avLst/>
+            </a:prstGeom>
+            <a:noFill/>
+          </p:spPr>
+          <p:txBody>
+            <a:bodyPr wrap="square" rtlCol="0" anchor="ctr"/>
+            <a:lstStyle/>
+            <a:p>
+              <a:pPr marL="0" indent="0" algn="ctr">
+                <a:buNone/>
+              </a:pPr>
+              <a:r>
+                <a:rPr lang="en-US" sz="1050" dirty="0">
+                  <a:solidFill>
+                    <a:srgbClr val="94A3B8"/>
+                  </a:solidFill>
+                  <a:latin typeface="Calibri" panose="020F0502020204030204" pitchFamily="34" charset="0"/>
+                  <a:ea typeface="Calibri" panose="020F0502020204030204" pitchFamily="34" charset="-122"/>
+                  <a:cs typeface="Calibri" panose="020F0502020204030204" pitchFamily="34" charset="-120"/>
+                </a:rPr>
+                <a:t>Pred: Churn</a:t>
+              </a:r>
+              <a:endParaRPr lang="en-US" sz="1050" dirty="0">
                 <a:solidFill>
                   <a:srgbClr val="94A3B8"/>
                 </a:solidFill>
                 <a:latin typeface="Calibri" panose="020F0502020204030204" pitchFamily="34" charset="0"/>
                 <a:ea typeface="Calibri" panose="020F0502020204030204" pitchFamily="34" charset="-122"/>
                 <a:cs typeface="Calibri" panose="020F0502020204030204" pitchFamily="34" charset="-120"/>
-              </a:rPr>
-              <a:t>Pred: Churn</a:t>
-            </a:r>
-            <a:endParaRPr lang="en-US" sz="850" dirty="0"/>
-          </a:p>
-        </p:txBody>
-      </p:sp>
+              </a:endParaRPr>
+            </a:p>
+          </p:txBody>
+        </p:sp>
+      </p:grpSp>
       <p:sp>
         <p:nvSpPr>
           <p:cNvPr id="33" name="Shape 31"/>
@@ -18435,7 +19790,7 @@
               <a:buNone/>
             </a:pPr>
             <a:r>
-              <a:rPr lang="en-US" sz="1200" b="1" dirty="0">
+              <a:rPr lang="en-US" sz="1400" b="1" dirty="0">
                 <a:solidFill>
                   <a:srgbClr val="F59E0B"/>
                 </a:solidFill>
@@ -18445,7 +19800,14 @@
               </a:rPr>
               <a:t>💰  Business Cost at Optimal Threshold</a:t>
             </a:r>
-            <a:endParaRPr lang="en-US" sz="1200" dirty="0"/>
+            <a:endParaRPr lang="en-US" sz="1400" b="1" dirty="0">
+              <a:solidFill>
+                <a:srgbClr val="F59E0B"/>
+              </a:solidFill>
+              <a:latin typeface="Calibri" panose="020F0502020204030204" pitchFamily="34" charset="0"/>
+              <a:ea typeface="Calibri" panose="020F0502020204030204" pitchFamily="34" charset="-122"/>
+              <a:cs typeface="Calibri" panose="020F0502020204030204" pitchFamily="34" charset="-120"/>
+            </a:endParaRPr>
           </a:p>
         </p:txBody>
       </p:sp>
@@ -18511,7 +19873,7 @@
               <a:buNone/>
             </a:pPr>
             <a:r>
-              <a:rPr lang="en-US" sz="1100" dirty="0">
+              <a:rPr lang="en-US" sz="1200" dirty="0">
                 <a:solidFill>
                   <a:srgbClr val="94A3B8"/>
                 </a:solidFill>
@@ -18521,7 +19883,14 @@
               </a:rPr>
               <a:t>FN = 0 (₹0)  +  FP = 67 (₹33,500)  =  Total ₹33,500</a:t>
             </a:r>
-            <a:endParaRPr lang="en-US" sz="1100" dirty="0"/>
+            <a:endParaRPr lang="en-US" sz="1200" dirty="0">
+              <a:solidFill>
+                <a:srgbClr val="94A3B8"/>
+              </a:solidFill>
+              <a:latin typeface="Calibri" panose="020F0502020204030204" pitchFamily="34" charset="0"/>
+              <a:ea typeface="Calibri" panose="020F0502020204030204" pitchFamily="34" charset="-122"/>
+              <a:cs typeface="Calibri" panose="020F0502020204030204" pitchFamily="34" charset="-120"/>
+            </a:endParaRPr>
           </a:p>
         </p:txBody>
       </p:sp>
@@ -18574,7 +19943,7 @@
               <a:buNone/>
             </a:pPr>
             <a:r>
-              <a:rPr lang="en-US" sz="1100" b="1" dirty="0">
+              <a:rPr lang="en-US" sz="1200" b="1" dirty="0">
                 <a:solidFill>
                   <a:srgbClr val="14B8A6"/>
                 </a:solidFill>
@@ -18584,7 +19953,14 @@
               </a:rPr>
               <a:t>Threshold 0.01 → 100% Recall — catches every churner</a:t>
             </a:r>
-            <a:endParaRPr lang="en-US" sz="1100" dirty="0"/>
+            <a:endParaRPr lang="en-US" sz="1200" b="1" dirty="0">
+              <a:solidFill>
+                <a:srgbClr val="14B8A6"/>
+              </a:solidFill>
+              <a:latin typeface="Calibri" panose="020F0502020204030204" pitchFamily="34" charset="0"/>
+              <a:ea typeface="Calibri" panose="020F0502020204030204" pitchFamily="34" charset="-122"/>
+              <a:cs typeface="Calibri" panose="020F0502020204030204" pitchFamily="34" charset="-120"/>
+            </a:endParaRPr>
           </a:p>
         </p:txBody>
       </p:sp>
@@ -18612,7 +19988,7 @@
               <a:buNone/>
             </a:pPr>
             <a:r>
-              <a:rPr lang="en-US" sz="900" i="1" dirty="0">
+              <a:rPr lang="en-US" sz="1000" i="1" dirty="0">
                 <a:solidFill>
                   <a:srgbClr val="94A3B8"/>
                 </a:solidFill>
@@ -18622,7 +19998,14 @@
               </a:rPr>
               <a:t>⚠️  Near-perfect PR-AUC (0.9989) and 100% Recall suggest the dataset is synthetic or strongly separable. Model performance is valid given the data provided.</a:t>
             </a:r>
-            <a:endParaRPr lang="en-US" sz="900" dirty="0"/>
+            <a:endParaRPr lang="en-US" sz="1000" i="1" dirty="0">
+              <a:solidFill>
+                <a:srgbClr val="94A3B8"/>
+              </a:solidFill>
+              <a:latin typeface="Calibri" panose="020F0502020204030204" pitchFamily="34" charset="0"/>
+              <a:ea typeface="Calibri" panose="020F0502020204030204" pitchFamily="34" charset="-122"/>
+              <a:cs typeface="Calibri" panose="020F0502020204030204" pitchFamily="34" charset="-120"/>
+            </a:endParaRPr>
           </a:p>
         </p:txBody>
       </p:sp>

--- a/ChurnZero_atasikolexi05_presentation.pptx
+++ b/ChurnZero_atasikolexi05_presentation.pptx
@@ -2209,7 +2209,7 @@
                 <a:ea typeface="Georgia" panose="02040502050405020303" pitchFamily="34" charset="-122"/>
                 <a:cs typeface="Georgia" panose="02040502050405020303" pitchFamily="34" charset="-120"/>
               </a:rPr>
-              <a:t>0.9989</a:t>
+              <a:t>0.9992</a:t>
             </a:r>
             <a:endParaRPr lang="en-US" sz="3400" dirty="0"/>
           </a:p>
@@ -2475,7 +2475,7 @@
                 <a:ea typeface="Georgia" panose="02040502050405020303" pitchFamily="34" charset="-122"/>
                 <a:cs typeface="Georgia" panose="02040502050405020303" pitchFamily="34" charset="-120"/>
               </a:rPr>
-              <a:t>₹33,500</a:t>
+              <a:t>₹17,500</a:t>
             </a:r>
             <a:endParaRPr lang="en-US" sz="3400" dirty="0"/>
           </a:p>
@@ -2908,7 +2908,7 @@
                 <a:ea typeface="Calibri" panose="020F0502020204030204" pitchFamily="34" charset="-122"/>
                 <a:cs typeface="Calibri" panose="020F0502020204030204" pitchFamily="34" charset="-120"/>
               </a:rPr>
-              <a:t>0.212</a:t>
+              <a:t>0.177</a:t>
             </a:r>
             <a:endParaRPr lang="en-US" sz="1200" b="1" dirty="0">
               <a:solidFill>
@@ -2953,7 +2953,7 @@
                 <a:ea typeface="Calibri" panose="020F0502020204030204" pitchFamily="34" charset="-122"/>
                 <a:cs typeface="Calibri" panose="020F0502020204030204" pitchFamily="34" charset="-120"/>
               </a:rPr>
-              <a:t>Monthly Transaction Count</a:t>
+              <a:t>Total Digital Logins</a:t>
             </a:r>
             <a:endParaRPr lang="en-US" sz="1400" b="1" dirty="0">
               <a:solidFill>
@@ -3000,7 +3000,7 @@
                 <a:ea typeface="Calibri" panose="020F0502020204030204" pitchFamily="34" charset="-122"/>
                 <a:cs typeface="Calibri" panose="020F0502020204030204" pitchFamily="34" charset="-120"/>
               </a:rPr>
-              <a:t>Declining transaction frequency is the strongest churn signal; trigger outreach at &gt;30% MoM drop</a:t>
+              <a:t>Low digital banking activity is the strongest churn signal; re-engage via personalised app campaigns and usage nudges</a:t>
             </a:r>
             <a:endParaRPr lang="en-US" sz="1200" dirty="0">
               <a:solidFill>
@@ -3226,7 +3226,7 @@
                 <a:ea typeface="Calibri" panose="020F0502020204030204" pitchFamily="34" charset="-122"/>
                 <a:cs typeface="Calibri" panose="020F0502020204030204" pitchFamily="34" charset="-120"/>
               </a:rPr>
-              <a:t>0.202</a:t>
+              <a:t>0.144</a:t>
             </a:r>
             <a:endParaRPr lang="en-US" sz="1200" b="1" dirty="0">
               <a:solidFill>
@@ -3271,7 +3271,7 @@
                 <a:ea typeface="Calibri" panose="020F0502020204030204" pitchFamily="34" charset="-122"/>
                 <a:cs typeface="Calibri" panose="020F0502020204030204" pitchFamily="34" charset="-120"/>
               </a:rPr>
-              <a:t>Total Digital Logins</a:t>
+              <a:t>Total Transaction Amount</a:t>
             </a:r>
             <a:endParaRPr lang="en-US" sz="1400" b="1" dirty="0">
               <a:solidFill>
@@ -3318,7 +3318,7 @@
                 <a:ea typeface="Calibri" panose="020F0502020204030204" pitchFamily="34" charset="-122"/>
                 <a:cs typeface="Calibri" panose="020F0502020204030204" pitchFamily="34" charset="-120"/>
               </a:rPr>
-              <a:t>Low digital banking activity indicates reduced loyalty; re-engage via personalised app campaigns</a:t>
+              <a:t>Declining total transaction volume signals reduced banking engagement; trigger relationship review when monthly spend drops &gt;20%</a:t>
             </a:r>
             <a:endParaRPr lang="en-US" sz="1200" dirty="0">
               <a:solidFill>
@@ -3544,7 +3544,7 @@
                 <a:ea typeface="Calibri" panose="020F0502020204030204" pitchFamily="34" charset="-122"/>
                 <a:cs typeface="Calibri" panose="020F0502020204030204" pitchFamily="34" charset="-120"/>
               </a:rPr>
-              <a:t>0.075</a:t>
+              <a:t>0.131</a:t>
             </a:r>
             <a:endParaRPr lang="en-US" sz="1200" b="1" dirty="0">
               <a:solidFill>
@@ -3589,7 +3589,7 @@
                 <a:ea typeface="Calibri" panose="020F0502020204030204" pitchFamily="34" charset="-122"/>
                 <a:cs typeface="Calibri" panose="020F0502020204030204" pitchFamily="34" charset="-120"/>
               </a:rPr>
-              <a:t>RM Interaction Count</a:t>
+              <a:t>Monthly Transaction Count</a:t>
             </a:r>
             <a:endParaRPr lang="en-US" sz="1400" b="1" dirty="0">
               <a:solidFill>
@@ -3636,7 +3636,7 @@
                 <a:ea typeface="Calibri" panose="020F0502020204030204" pitchFamily="34" charset="-122"/>
                 <a:cs typeface="Calibri" panose="020F0502020204030204" pitchFamily="34" charset="-120"/>
               </a:rPr>
-              <a:t>Low relationship manager contact flags disengagement; proactive RM check-ins improve retention</a:t>
+              <a:t>Declining transaction frequency is a strong churn signal; trigger outreach when monthly count drops &gt;30% month-on-month</a:t>
             </a:r>
             <a:endParaRPr lang="en-US" sz="1200" dirty="0">
               <a:solidFill>
@@ -3862,7 +3862,7 @@
                 <a:ea typeface="Calibri" panose="020F0502020204030204" pitchFamily="34" charset="-122"/>
                 <a:cs typeface="Calibri" panose="020F0502020204030204" pitchFamily="34" charset="-120"/>
               </a:rPr>
-              <a:t>0.066</a:t>
+              <a:t>0.071</a:t>
             </a:r>
             <a:endParaRPr lang="en-US" sz="1200" b="1" dirty="0">
               <a:solidFill>
@@ -3907,7 +3907,7 @@
                 <a:ea typeface="Calibri" panose="020F0502020204030204" pitchFamily="34" charset="-122"/>
                 <a:cs typeface="Calibri" panose="020F0502020204030204" pitchFamily="34" charset="-120"/>
               </a:rPr>
-              <a:t>Balance Decline %</a:t>
+              <a:t>Minimum Due Paid Flag</a:t>
             </a:r>
             <a:endParaRPr lang="en-US" sz="1400" b="1" dirty="0">
               <a:solidFill>
@@ -3954,7 +3954,7 @@
                 <a:ea typeface="Calibri" panose="020F0502020204030204" pitchFamily="34" charset="-122"/>
                 <a:cs typeface="Calibri" panose="020F0502020204030204" pitchFamily="34" charset="-120"/>
               </a:rPr>
-              <a:t>Falling balances signal imminent exit; immediate outreach recommended at &gt;15% monthly decline</a:t>
+              <a:t>Customers paying only the minimum due show financial stress and reduced commitment; flag for early retention intervention</a:t>
             </a:r>
             <a:endParaRPr lang="en-US" sz="1200" dirty="0">
               <a:solidFill>
@@ -4180,7 +4180,7 @@
                 <a:ea typeface="Calibri" panose="020F0502020204030204" pitchFamily="34" charset="-122"/>
                 <a:cs typeface="Calibri" panose="020F0502020204030204" pitchFamily="34" charset="-120"/>
               </a:rPr>
-              <a:t>0.057</a:t>
+              <a:t>0.054</a:t>
             </a:r>
             <a:endParaRPr lang="en-US" sz="1200" b="1" dirty="0">
               <a:solidFill>
@@ -4225,7 +4225,7 @@
                 <a:ea typeface="Calibri" panose="020F0502020204030204" pitchFamily="34" charset="-122"/>
                 <a:cs typeface="Calibri" panose="020F0502020204030204" pitchFamily="34" charset="-120"/>
               </a:rPr>
-              <a:t>Referral Count</a:t>
+              <a:t>RM Interaction Count</a:t>
             </a:r>
             <a:endParaRPr lang="en-US" sz="1400" b="1" dirty="0">
               <a:solidFill>
@@ -4272,7 +4272,7 @@
                 <a:ea typeface="Calibri" panose="020F0502020204030204" pitchFamily="34" charset="-122"/>
                 <a:cs typeface="Calibri" panose="020F0502020204030204" pitchFamily="34" charset="-120"/>
               </a:rPr>
-              <a:t>Customers who refer others are deeply loyal; low referral count = low brand attachment and churn risk</a:t>
+              <a:t>Low relationship manager contact flags disengagement; proactive RM check-ins and personalised offers improve retention</a:t>
             </a:r>
             <a:endParaRPr lang="en-US" sz="1200" dirty="0">
               <a:solidFill>
@@ -4628,7 +4628,7 @@
                 <a:ea typeface="Calibri" panose="020F0502020204030204" pitchFamily="34" charset="-122"/>
                 <a:cs typeface="Calibri" panose="020F0502020204030204" pitchFamily="34" charset="-120"/>
               </a:rPr>
-              <a:t>XGBoost with SMOTE achieved PR-AUC of 0.9989 and F1 of 0.886 — significantly outperforming the logistic regression baseline</a:t>
+              <a:t>XGBoost with SMOTE achieved PR-AUC of 0.9992 and F1 of 0.9372 — significantly outperforming the logistic regression baseline</a:t>
             </a:r>
             <a:endParaRPr lang="en-US" sz="1400" dirty="0">
               <a:solidFill>
@@ -4753,7 +4753,7 @@
                 <a:ea typeface="Calibri" panose="020F0502020204030204" pitchFamily="34" charset="-122"/>
                 <a:cs typeface="Calibri" panose="020F0502020204030204" pitchFamily="34" charset="-120"/>
               </a:rPr>
-              <a:t>Cost-optimised threshold (0.01) achieves 100% recall, catching every churner with total validation cost of just ₹33,500</a:t>
+              <a:t>Cost-optimised threshold (0.02) achieves 100% recall, catching every churner with total validation cost of just ₹17,500</a:t>
             </a:r>
             <a:endParaRPr lang="en-US" sz="1400" dirty="0">
               <a:solidFill>
@@ -5003,7 +5003,7 @@
                 <a:ea typeface="Calibri" panose="020F0502020204030204" pitchFamily="34" charset="-122"/>
                 <a:cs typeface="Calibri" panose="020F0502020204030204" pitchFamily="34" charset="-120"/>
               </a:rPr>
-              <a:t>Top 5 churn drivers: transaction count (0.212), digital logins (0.202), RM interaction (0.075), balance decline (0.066), referrals (0.057)</a:t>
+              <a:t>Top 5 churn drivers: digital logins (0.177), transaction amount (0.144), transaction count (0.131), minimum due paid (0.071), RM interaction (0.054)</a:t>
             </a:r>
             <a:endParaRPr lang="en-US" sz="1400" dirty="0">
               <a:solidFill>
@@ -7220,7 +7220,7 @@
                             <a:srgbClr val="334155"/>
                           </a:solidFill>
                         </a:rPr>
-                        <a:t>0.9989</a:t>
+                        <a:t>0.9992</a:t>
                       </a:r>
                       <a:endParaRPr lang="en-US" sz="1400" dirty="0">
                         <a:solidFill>
@@ -7417,7 +7417,7 @@
                             <a:srgbClr val="334155"/>
                           </a:solidFill>
                         </a:rPr>
-                        <a:t>0.886</a:t>
+                        <a:t>0.9372</a:t>
                       </a:r>
                       <a:endParaRPr lang="en-US" sz="1400" dirty="0">
                         <a:solidFill>
@@ -7811,7 +7811,7 @@
                             <a:srgbClr val="334155"/>
                           </a:solidFill>
                         </a:rPr>
-                        <a:t>79.6%</a:t>
+                        <a:t>88.18%</a:t>
                       </a:r>
                       <a:endParaRPr lang="en-US" sz="1400" dirty="0">
                         <a:solidFill>
@@ -8008,7 +8008,7 @@
                             <a:srgbClr val="334155"/>
                           </a:solidFill>
                         </a:rPr>
-                        <a:t>0.01</a:t>
+                        <a:t>0.02</a:t>
                       </a:r>
                       <a:endParaRPr lang="en-US" sz="1400" dirty="0">
                         <a:solidFill>
@@ -8205,7 +8205,7 @@
                             <a:srgbClr val="334155"/>
                           </a:solidFill>
                         </a:rPr>
-                        <a:t>₹33,500 (67 FP, 0 FN)</a:t>
+                        <a:t>₹17,500 (35 FP, 0 FN)</a:t>
                       </a:r>
                       <a:endParaRPr lang="en-US" sz="1400" dirty="0">
                         <a:solidFill>
@@ -11702,7 +11702,7 @@
                 <a:ea typeface="Calibri" panose="020F0502020204030204" pitchFamily="34" charset="-122"/>
                 <a:cs typeface="Calibri" panose="020F0502020204030204" pitchFamily="34" charset="-120"/>
               </a:rPr>
-              <a:t>Business Cost = FP × ₹500 + </a:t>
+              <a:t xml:space="preserve">Business Cost = FP × ₹500 + </a:t>
             </a:r>
             <a:r>
               <a:rPr lang="en-US" sz="1400" b="1" dirty="0">
@@ -14522,7 +14522,7 @@
                 <a:ea typeface="Calibri" panose="020F0502020204030204" pitchFamily="34" charset="-122"/>
                 <a:cs typeface="Calibri" panose="020F0502020204030204" pitchFamily="34" charset="-120"/>
               </a:rPr>
-              <a:t>Transaction Activity (Imp: 0.212)</a:t>
+              <a:t>Transaction Activity (Imp: 0.131)</a:t>
             </a:r>
             <a:endParaRPr lang="en-US" sz="1600" b="1" dirty="0">
               <a:solidFill>
@@ -14570,7 +14570,7 @@
                 <a:ea typeface="Calibri" panose="020F0502020204030204" pitchFamily="34" charset="-122"/>
                 <a:cs typeface="Calibri" panose="020F0502020204030204" pitchFamily="34" charset="-120"/>
               </a:rPr>
-              <a:t>monthly_transaction_count and total_digital_logins (0.202) are the top two predictors. Low activity strongly signals churn intent.</a:t>
+              <a:t>total_digital_logins (0.177) and monthly_transaction_count (0.131) are the top predictors. Low activity strongly signals churn intent.</a:t>
             </a:r>
             <a:endParaRPr lang="en-US" sz="1400" dirty="0">
               <a:solidFill>
@@ -14822,7 +14822,7 @@
                 <a:ea typeface="Calibri" panose="020F0502020204030204" pitchFamily="34" charset="-122"/>
                 <a:cs typeface="Calibri" panose="020F0502020204030204" pitchFamily="34" charset="-120"/>
               </a:rPr>
-              <a:t>RM Interaction &amp; Referrals</a:t>
+              <a:t>RM Interaction &amp; Transaction Amount</a:t>
             </a:r>
             <a:endParaRPr lang="en-US" sz="1600" b="1" dirty="0">
               <a:solidFill>
@@ -14870,7 +14870,7 @@
                 <a:ea typeface="Calibri" panose="020F0502020204030204" pitchFamily="34" charset="-122"/>
                 <a:cs typeface="Calibri" panose="020F0502020204030204" pitchFamily="34" charset="-120"/>
               </a:rPr>
-              <a:t>relationship_manager_interaction_count (0.075) and referral_count (0.057) round out top 5. Low engagement flags low loyalty.</a:t>
+              <a:t>relationship_manager_interaction_count (0.054) and total_trans_amt (0.144) round out the top 5. Low engagement and transaction volume flag low loyalty.</a:t>
             </a:r>
             <a:endParaRPr lang="en-US" sz="1400" dirty="0">
               <a:solidFill>
@@ -15259,7 +15259,7 @@
                 <a:ea typeface="Calibri" panose="020F0502020204030204" pitchFamily="34" charset="-122"/>
                 <a:cs typeface="Calibri" panose="020F0502020204030204" pitchFamily="34" charset="-120"/>
               </a:rPr>
-              <a:t>· </a:t>
+              <a:t xml:space="preserve">· </a:t>
             </a:r>
             <a:r>
               <a:rPr lang="en-US" sz="1200" dirty="0">
@@ -15315,7 +15315,7 @@
                 <a:ea typeface="Calibri" panose="020F0502020204030204" pitchFamily="34" charset="-122"/>
                 <a:cs typeface="Calibri" panose="020F0502020204030204" pitchFamily="34" charset="-120"/>
               </a:rPr>
-              <a:t>· </a:t>
+              <a:t xml:space="preserve">· </a:t>
             </a:r>
             <a:r>
               <a:rPr lang="en-US" sz="1200" dirty="0">
@@ -15371,7 +15371,7 @@
                 <a:ea typeface="Calibri" panose="020F0502020204030204" pitchFamily="34" charset="-122"/>
                 <a:cs typeface="Calibri" panose="020F0502020204030204" pitchFamily="34" charset="-120"/>
               </a:rPr>
-              <a:t>· </a:t>
+              <a:t xml:space="preserve">· </a:t>
             </a:r>
             <a:r>
               <a:rPr lang="en-US" sz="1200" dirty="0">
@@ -15574,7 +15574,7 @@
                 <a:ea typeface="Calibri" panose="020F0502020204030204" pitchFamily="34" charset="-122"/>
                 <a:cs typeface="Calibri" panose="020F0502020204030204" pitchFamily="34" charset="-120"/>
               </a:rPr>
-              <a:t>· </a:t>
+              <a:t xml:space="preserve">· </a:t>
             </a:r>
             <a:r>
               <a:rPr lang="en-US" sz="1200" dirty="0">
@@ -15630,7 +15630,7 @@
                 <a:ea typeface="Calibri" panose="020F0502020204030204" pitchFamily="34" charset="-122"/>
                 <a:cs typeface="Calibri" panose="020F0502020204030204" pitchFamily="34" charset="-120"/>
               </a:rPr>
-              <a:t>· </a:t>
+              <a:t xml:space="preserve">· </a:t>
             </a:r>
             <a:r>
               <a:rPr lang="en-US" sz="1200" dirty="0">
@@ -15686,7 +15686,7 @@
                 <a:ea typeface="Calibri" panose="020F0502020204030204" pitchFamily="34" charset="-122"/>
                 <a:cs typeface="Calibri" panose="020F0502020204030204" pitchFamily="34" charset="-120"/>
               </a:rPr>
-              <a:t>· </a:t>
+              <a:t xml:space="preserve">· </a:t>
             </a:r>
             <a:r>
               <a:rPr lang="en-US" sz="1200" dirty="0">
@@ -15889,7 +15889,7 @@
                 <a:ea typeface="Calibri" panose="020F0502020204030204" pitchFamily="34" charset="-122"/>
                 <a:cs typeface="Calibri" panose="020F0502020204030204" pitchFamily="34" charset="-120"/>
               </a:rPr>
-              <a:t>· </a:t>
+              <a:t xml:space="preserve">· </a:t>
             </a:r>
             <a:r>
               <a:rPr lang="en-US" sz="1200" dirty="0">
@@ -15945,7 +15945,7 @@
                 <a:ea typeface="Calibri" panose="020F0502020204030204" pitchFamily="34" charset="-122"/>
                 <a:cs typeface="Calibri" panose="020F0502020204030204" pitchFamily="34" charset="-120"/>
               </a:rPr>
-              <a:t>· </a:t>
+              <a:t xml:space="preserve">· </a:t>
             </a:r>
             <a:r>
               <a:rPr lang="en-US" sz="1200" dirty="0">
@@ -16001,7 +16001,7 @@
                 <a:ea typeface="Calibri" panose="020F0502020204030204" pitchFamily="34" charset="-122"/>
                 <a:cs typeface="Calibri" panose="020F0502020204030204" pitchFamily="34" charset="-120"/>
               </a:rPr>
-              <a:t>· </a:t>
+              <a:t xml:space="preserve">· </a:t>
             </a:r>
             <a:r>
               <a:rPr lang="en-US" sz="1200" dirty="0">
@@ -16204,7 +16204,7 @@
                 <a:ea typeface="Calibri" panose="020F0502020204030204" pitchFamily="34" charset="-122"/>
                 <a:cs typeface="Calibri" panose="020F0502020204030204" pitchFamily="34" charset="-120"/>
               </a:rPr>
-              <a:t>· </a:t>
+              <a:t xml:space="preserve">· </a:t>
             </a:r>
             <a:r>
               <a:rPr lang="en-US" sz="1200" dirty="0">
@@ -16260,7 +16260,7 @@
                 <a:ea typeface="Calibri" panose="020F0502020204030204" pitchFamily="34" charset="-122"/>
                 <a:cs typeface="Calibri" panose="020F0502020204030204" pitchFamily="34" charset="-120"/>
               </a:rPr>
-              <a:t>· </a:t>
+              <a:t xml:space="preserve">· </a:t>
             </a:r>
             <a:r>
               <a:rPr lang="en-US" sz="1200" dirty="0">
@@ -16316,7 +16316,7 @@
                 <a:ea typeface="Calibri" panose="020F0502020204030204" pitchFamily="34" charset="-122"/>
                 <a:cs typeface="Calibri" panose="020F0502020204030204" pitchFamily="34" charset="-120"/>
               </a:rPr>
-              <a:t>· </a:t>
+              <a:t xml:space="preserve">· </a:t>
             </a:r>
             <a:r>
               <a:rPr lang="en-US" sz="1200" dirty="0">
@@ -16709,7 +16709,7 @@
                 <a:ea typeface="Calibri" panose="020F0502020204030204" pitchFamily="34" charset="-122"/>
                 <a:cs typeface="Calibri" panose="020F0502020204030204" pitchFamily="34" charset="-120"/>
               </a:rPr>
-              <a:t>→ </a:t>
+              <a:t xml:space="preserve">→ </a:t>
             </a:r>
             <a:r>
               <a:rPr lang="en-US" sz="1200" dirty="0">
@@ -16765,7 +16765,7 @@
                 <a:ea typeface="Calibri" panose="020F0502020204030204" pitchFamily="34" charset="-122"/>
                 <a:cs typeface="Calibri" panose="020F0502020204030204" pitchFamily="34" charset="-120"/>
               </a:rPr>
-              <a:t>→ </a:t>
+              <a:t xml:space="preserve">→ </a:t>
             </a:r>
             <a:r>
               <a:rPr lang="en-US" sz="1200" dirty="0">
@@ -16821,7 +16821,7 @@
                 <a:ea typeface="Calibri" panose="020F0502020204030204" pitchFamily="34" charset="-122"/>
                 <a:cs typeface="Calibri" panose="020F0502020204030204" pitchFamily="34" charset="-120"/>
               </a:rPr>
-              <a:t>→ </a:t>
+              <a:t xml:space="preserve">→ </a:t>
             </a:r>
             <a:r>
               <a:rPr lang="en-US" sz="1200" dirty="0">
@@ -16992,7 +16992,7 @@
                 <a:ea typeface="Calibri" panose="020F0502020204030204" pitchFamily="34" charset="-122"/>
                 <a:cs typeface="Calibri" panose="020F0502020204030204" pitchFamily="34" charset="-120"/>
               </a:rPr>
-              <a:t>→ </a:t>
+              <a:t xml:space="preserve">→ </a:t>
             </a:r>
             <a:r>
               <a:rPr lang="en-US" sz="1200" dirty="0">
@@ -17048,7 +17048,7 @@
                 <a:ea typeface="Calibri" panose="020F0502020204030204" pitchFamily="34" charset="-122"/>
                 <a:cs typeface="Calibri" panose="020F0502020204030204" pitchFamily="34" charset="-120"/>
               </a:rPr>
-              <a:t>→ </a:t>
+              <a:t xml:space="preserve">→ </a:t>
             </a:r>
             <a:r>
               <a:rPr lang="en-US" sz="1200" dirty="0">
@@ -17104,7 +17104,7 @@
                 <a:ea typeface="Calibri" panose="020F0502020204030204" pitchFamily="34" charset="-122"/>
                 <a:cs typeface="Calibri" panose="020F0502020204030204" pitchFamily="34" charset="-120"/>
               </a:rPr>
-              <a:t>→ </a:t>
+              <a:t xml:space="preserve">→ </a:t>
             </a:r>
             <a:r>
               <a:rPr lang="en-US" sz="1200" dirty="0">
@@ -18711,7 +18711,7 @@
                 <a:ea typeface="Georgia" panose="02040502050405020303" pitchFamily="34" charset="-122"/>
                 <a:cs typeface="Georgia" panose="02040502050405020303" pitchFamily="34" charset="-120"/>
               </a:rPr>
-              <a:t>0.9989</a:t>
+              <a:t>0.9992</a:t>
             </a:r>
             <a:endParaRPr lang="en-US" sz="3000" dirty="0"/>
           </a:p>
@@ -18871,7 +18871,7 @@
                 <a:ea typeface="Georgia" panose="02040502050405020303" pitchFamily="34" charset="-122"/>
                 <a:cs typeface="Georgia" panose="02040502050405020303" pitchFamily="34" charset="-120"/>
               </a:rPr>
-              <a:t>0.886</a:t>
+              <a:t>0.9372</a:t>
             </a:r>
             <a:endParaRPr lang="en-US" sz="3000" dirty="0"/>
           </a:p>
@@ -19191,7 +19191,7 @@
                 <a:ea typeface="Georgia" panose="02040502050405020303" pitchFamily="34" charset="-122"/>
                 <a:cs typeface="Georgia" panose="02040502050405020303" pitchFamily="34" charset="-120"/>
               </a:rPr>
-              <a:t>79.6%</a:t>
+              <a:t>88.18%</a:t>
             </a:r>
             <a:endParaRPr lang="en-US" sz="3000" dirty="0"/>
           </a:p>
@@ -19344,7 +19344,7 @@
                 <a:ea typeface="Calibri" panose="020F0502020204030204" pitchFamily="34" charset="-122"/>
                 <a:cs typeface="Calibri" panose="020F0502020204030204" pitchFamily="34" charset="-120"/>
               </a:rPr>
-              <a:t>Confusion Matrix  (Optimal Threshold = 0.01)</a:t>
+              <a:t>Confusion Matrix  (Optimal Threshold = 0.02)</a:t>
             </a:r>
             <a:endParaRPr lang="en-US" sz="1200" dirty="0"/>
           </a:p>
@@ -19843,7 +19843,7 @@
                 <a:ea typeface="Georgia" panose="02040502050405020303" pitchFamily="34" charset="-122"/>
                 <a:cs typeface="Georgia" panose="02040502050405020303" pitchFamily="34" charset="-120"/>
               </a:rPr>
-              <a:t>₹33,500</a:t>
+              <a:t>₹17,500</a:t>
             </a:r>
             <a:endParaRPr lang="en-US" sz="4800" dirty="0"/>
           </a:p>
@@ -19881,7 +19881,7 @@
                 <a:ea typeface="Calibri" panose="020F0502020204030204" pitchFamily="34" charset="-122"/>
                 <a:cs typeface="Calibri" panose="020F0502020204030204" pitchFamily="34" charset="-120"/>
               </a:rPr>
-              <a:t>FN = 0 (₹0)  +  FP = 67 (₹33,500)  =  Total ₹33,500</a:t>
+              <a:t>FN = 0 (₹0)  +  FP = 35 (₹17,500)  =  Total ₹17,500</a:t>
             </a:r>
             <a:endParaRPr lang="en-US" sz="1200" dirty="0">
               <a:solidFill>
@@ -19951,7 +19951,7 @@
                 <a:ea typeface="Calibri" panose="020F0502020204030204" pitchFamily="34" charset="-122"/>
                 <a:cs typeface="Calibri" panose="020F0502020204030204" pitchFamily="34" charset="-120"/>
               </a:rPr>
-              <a:t>Threshold 0.01 → 100% Recall — catches every churner</a:t>
+              <a:t>Threshold 0.02 → 100% Recall — catches every churner</a:t>
             </a:r>
             <a:endParaRPr lang="en-US" sz="1200" b="1" dirty="0">
               <a:solidFill>
@@ -19996,7 +19996,7 @@
                 <a:ea typeface="Calibri" panose="020F0502020204030204" pitchFamily="34" charset="-122"/>
                 <a:cs typeface="Calibri" panose="020F0502020204030204" pitchFamily="34" charset="-120"/>
               </a:rPr>
-              <a:t>⚠️  Near-perfect PR-AUC (0.9989) and 100% Recall suggest the dataset is synthetic or strongly separable. Model performance is valid given the data provided.</a:t>
+              <a:t>⚠️  Near-perfect PR-AUC (0.9992) and 100% Recall suggest the dataset is synthetic or strongly separable. Confirmed by 5-fold CV: 0.9994 ± 0.0002 — score is stable, not a lucky split.</a:t>
             </a:r>
             <a:endParaRPr lang="en-US" sz="1000" i="1" dirty="0">
               <a:solidFill>
